--- a/Calendario2026/presentaciones/15_POO_Encapsulamiento.pptx
+++ b/Calendario2026/presentaciones/15_POO_Encapsulamiento.pptx
@@ -5,18 +5,21 @@
     <p:sldMasterId id="2147483648" r:id="rId1"/>
   </p:sldMasterIdLst>
   <p:notesMasterIdLst>
-    <p:notesMasterId r:id="rId11"/>
+    <p:notesMasterId r:id="rId14"/>
   </p:notesMasterIdLst>
   <p:sldIdLst>
     <p:sldId id="293" r:id="rId2"/>
     <p:sldId id="646" r:id="rId3"/>
     <p:sldId id="647" r:id="rId4"/>
-    <p:sldId id="602" r:id="rId5"/>
-    <p:sldId id="603" r:id="rId6"/>
-    <p:sldId id="600" r:id="rId7"/>
-    <p:sldId id="605" r:id="rId8"/>
-    <p:sldId id="606" r:id="rId9"/>
-    <p:sldId id="282" r:id="rId10"/>
+    <p:sldId id="648" r:id="rId5"/>
+    <p:sldId id="649" r:id="rId6"/>
+    <p:sldId id="650" r:id="rId7"/>
+    <p:sldId id="602" r:id="rId8"/>
+    <p:sldId id="603" r:id="rId9"/>
+    <p:sldId id="600" r:id="rId10"/>
+    <p:sldId id="605" r:id="rId11"/>
+    <p:sldId id="606" r:id="rId12"/>
+    <p:sldId id="282" r:id="rId13"/>
   </p:sldIdLst>
   <p:sldSz cx="9144000" cy="6858000" type="screen4x3"/>
   <p:notesSz cx="6858000" cy="9144000"/>
@@ -137,7 +140,7 @@
 <file path=ppt/revisionInfo.xml><?xml version="1.0" encoding="utf-8"?>
 <p1510:revInfo xmlns:a="http://schemas.openxmlformats.org/drawingml/2006/main" xmlns:r="http://schemas.openxmlformats.org/officeDocument/2006/relationships" xmlns:p1510="http://schemas.microsoft.com/office/powerpoint/2015/10/main">
   <p1510:revLst>
-    <p1510:client id="{86AEB7C5-80AB-46E3-8154-676F473301F4}" v="2" dt="2025-08-29T19:06:17.820"/>
+    <p1510:client id="{24755AE2-CA08-46EC-8009-A370505BCE56}" v="1" dt="2026-03-01T13:14:55.234"/>
   </p1510:revLst>
 </p1510:revInfo>
 </file>
@@ -146,43 +149,19 @@
 <pc:chgInfo xmlns:a="http://schemas.openxmlformats.org/drawingml/2006/main" xmlns:r="http://schemas.openxmlformats.org/officeDocument/2006/relationships" xmlns:ac="http://schemas.microsoft.com/office/drawing/2013/main/command" xmlns:pc="http://schemas.microsoft.com/office/powerpoint/2013/main/command">
   <pc:docChgLst>
     <pc:chgData name="Lizethe Pérez Fuertes" userId="4ae9ef87-2a7d-42f8-8dfa-0a501a9e2ff4" providerId="ADAL" clId="{FDDD45CB-1330-4033-A842-3D2746AFF7C7}"/>
-    <pc:docChg chg="custSel addSld modSld">
-      <pc:chgData name="Lizethe Pérez Fuertes" userId="4ae9ef87-2a7d-42f8-8dfa-0a501a9e2ff4" providerId="ADAL" clId="{FDDD45CB-1330-4033-A842-3D2746AFF7C7}" dt="2025-08-29T19:28:37.167" v="86" actId="1076"/>
+    <pc:docChg chg="undo custSel addSld delSld modSld">
+      <pc:chgData name="Lizethe Pérez Fuertes" userId="4ae9ef87-2a7d-42f8-8dfa-0a501a9e2ff4" providerId="ADAL" clId="{FDDD45CB-1330-4033-A842-3D2746AFF7C7}" dt="2026-03-01T13:15:08.459" v="195" actId="1076"/>
       <pc:docMkLst>
         <pc:docMk/>
       </pc:docMkLst>
-      <pc:sldChg chg="modSp mod">
-        <pc:chgData name="Lizethe Pérez Fuertes" userId="4ae9ef87-2a7d-42f8-8dfa-0a501a9e2ff4" providerId="ADAL" clId="{FDDD45CB-1330-4033-A842-3D2746AFF7C7}" dt="2025-08-29T19:10:47.456" v="70" actId="1076"/>
+      <pc:sldChg chg="addSp delSp modSp mod">
+        <pc:chgData name="Lizethe Pérez Fuertes" userId="4ae9ef87-2a7d-42f8-8dfa-0a501a9e2ff4" providerId="ADAL" clId="{FDDD45CB-1330-4033-A842-3D2746AFF7C7}" dt="2026-02-27T20:47:16.248" v="165" actId="1035"/>
         <pc:sldMkLst>
           <pc:docMk/>
           <pc:sldMk cId="1674379023" sldId="602"/>
         </pc:sldMkLst>
-        <pc:spChg chg="mod">
-          <ac:chgData name="Lizethe Pérez Fuertes" userId="4ae9ef87-2a7d-42f8-8dfa-0a501a9e2ff4" providerId="ADAL" clId="{FDDD45CB-1330-4033-A842-3D2746AFF7C7}" dt="2025-08-29T19:10:47.456" v="70" actId="1076"/>
-          <ac:spMkLst>
-            <pc:docMk/>
-            <pc:sldMk cId="1674379023" sldId="602"/>
-            <ac:spMk id="6" creationId="{00A8FDE6-4A3E-4FB3-9730-D3716FB038D5}"/>
-          </ac:spMkLst>
-        </pc:spChg>
-        <pc:spChg chg="mod">
-          <ac:chgData name="Lizethe Pérez Fuertes" userId="4ae9ef87-2a7d-42f8-8dfa-0a501a9e2ff4" providerId="ADAL" clId="{FDDD45CB-1330-4033-A842-3D2746AFF7C7}" dt="2025-08-29T19:10:37.851" v="67" actId="14100"/>
-          <ac:spMkLst>
-            <pc:docMk/>
-            <pc:sldMk cId="1674379023" sldId="602"/>
-            <ac:spMk id="9" creationId="{1F896577-4B60-4BA6-A121-97638A434181}"/>
-          </ac:spMkLst>
-        </pc:spChg>
-        <pc:spChg chg="mod">
-          <ac:chgData name="Lizethe Pérez Fuertes" userId="4ae9ef87-2a7d-42f8-8dfa-0a501a9e2ff4" providerId="ADAL" clId="{FDDD45CB-1330-4033-A842-3D2746AFF7C7}" dt="2025-08-29T19:10:42.371" v="68" actId="1076"/>
-          <ac:spMkLst>
-            <pc:docMk/>
-            <pc:sldMk cId="1674379023" sldId="602"/>
-            <ac:spMk id="10" creationId="{B73C42C7-85D9-4D9B-B558-211E4812A4BA}"/>
-          </ac:spMkLst>
-        </pc:spChg>
-        <pc:picChg chg="mod">
-          <ac:chgData name="Lizethe Pérez Fuertes" userId="4ae9ef87-2a7d-42f8-8dfa-0a501a9e2ff4" providerId="ADAL" clId="{FDDD45CB-1330-4033-A842-3D2746AFF7C7}" dt="2025-08-29T19:10:44.665" v="69" actId="1076"/>
+        <pc:picChg chg="add del mod">
+          <ac:chgData name="Lizethe Pérez Fuertes" userId="4ae9ef87-2a7d-42f8-8dfa-0a501a9e2ff4" providerId="ADAL" clId="{FDDD45CB-1330-4033-A842-3D2746AFF7C7}" dt="2026-02-27T20:47:16.248" v="165" actId="1035"/>
           <ac:picMkLst>
             <pc:docMk/>
             <pc:sldMk cId="1674379023" sldId="602"/>
@@ -190,59 +169,113 @@
           </ac:picMkLst>
         </pc:picChg>
       </pc:sldChg>
-      <pc:sldChg chg="modSp mod">
-        <pc:chgData name="Lizethe Pérez Fuertes" userId="4ae9ef87-2a7d-42f8-8dfa-0a501a9e2ff4" providerId="ADAL" clId="{FDDD45CB-1330-4033-A842-3D2746AFF7C7}" dt="2025-08-29T19:05:34.104" v="0" actId="1076"/>
+      <pc:sldChg chg="addSp delSp modSp add mod">
+        <pc:chgData name="Lizethe Pérez Fuertes" userId="4ae9ef87-2a7d-42f8-8dfa-0a501a9e2ff4" providerId="ADAL" clId="{FDDD45CB-1330-4033-A842-3D2746AFF7C7}" dt="2026-03-01T13:09:45.174" v="175" actId="1076"/>
         <pc:sldMkLst>
           <pc:docMk/>
-          <pc:sldMk cId="3312662471" sldId="646"/>
+          <pc:sldMk cId="118615350" sldId="648"/>
         </pc:sldMkLst>
-        <pc:picChg chg="mod">
-          <ac:chgData name="Lizethe Pérez Fuertes" userId="4ae9ef87-2a7d-42f8-8dfa-0a501a9e2ff4" providerId="ADAL" clId="{FDDD45CB-1330-4033-A842-3D2746AFF7C7}" dt="2025-08-29T19:05:34.104" v="0" actId="1076"/>
+        <pc:spChg chg="mod">
+          <ac:chgData name="Lizethe Pérez Fuertes" userId="4ae9ef87-2a7d-42f8-8dfa-0a501a9e2ff4" providerId="ADAL" clId="{FDDD45CB-1330-4033-A842-3D2746AFF7C7}" dt="2026-03-01T13:09:42.789" v="174" actId="1076"/>
+          <ac:spMkLst>
+            <pc:docMk/>
+            <pc:sldMk cId="118615350" sldId="648"/>
+            <ac:spMk id="3" creationId="{59A1954C-0BF7-91D6-7C5F-2205CBAB48D5}"/>
+          </ac:spMkLst>
+        </pc:spChg>
+        <pc:spChg chg="mod">
+          <ac:chgData name="Lizethe Pérez Fuertes" userId="4ae9ef87-2a7d-42f8-8dfa-0a501a9e2ff4" providerId="ADAL" clId="{FDDD45CB-1330-4033-A842-3D2746AFF7C7}" dt="2026-02-27T20:26:22.874" v="117" actId="1076"/>
+          <ac:spMkLst>
+            <pc:docMk/>
+            <pc:sldMk cId="118615350" sldId="648"/>
+            <ac:spMk id="4" creationId="{8002B5CF-3BA5-7C25-67AE-23E40842CFD5}"/>
+          </ac:spMkLst>
+        </pc:spChg>
+        <pc:picChg chg="add mod">
+          <ac:chgData name="Lizethe Pérez Fuertes" userId="4ae9ef87-2a7d-42f8-8dfa-0a501a9e2ff4" providerId="ADAL" clId="{FDDD45CB-1330-4033-A842-3D2746AFF7C7}" dt="2026-03-01T13:09:45.174" v="175" actId="1076"/>
           <ac:picMkLst>
             <pc:docMk/>
-            <pc:sldMk cId="3312662471" sldId="646"/>
-            <ac:picMk id="3" creationId="{630FF934-A9A5-42D2-AB01-2F33DAA193C4}"/>
+            <pc:sldMk cId="118615350" sldId="648"/>
+            <ac:picMk id="5" creationId="{8D1CA2F1-2096-D714-9F93-38A5237E0AC8}"/>
           </ac:picMkLst>
         </pc:picChg>
       </pc:sldChg>
-      <pc:sldChg chg="addSp modSp add mod">
-        <pc:chgData name="Lizethe Pérez Fuertes" userId="4ae9ef87-2a7d-42f8-8dfa-0a501a9e2ff4" providerId="ADAL" clId="{FDDD45CB-1330-4033-A842-3D2746AFF7C7}" dt="2025-08-29T19:28:37.167" v="86" actId="1076"/>
+      <pc:sldChg chg="addSp delSp modSp add mod">
+        <pc:chgData name="Lizethe Pérez Fuertes" userId="4ae9ef87-2a7d-42f8-8dfa-0a501a9e2ff4" providerId="ADAL" clId="{FDDD45CB-1330-4033-A842-3D2746AFF7C7}" dt="2026-03-01T13:11:13.726" v="184" actId="1076"/>
         <pc:sldMkLst>
           <pc:docMk/>
-          <pc:sldMk cId="2206757477" sldId="647"/>
+          <pc:sldMk cId="712346558" sldId="649"/>
         </pc:sldMkLst>
-        <pc:spChg chg="add mod">
-          <ac:chgData name="Lizethe Pérez Fuertes" userId="4ae9ef87-2a7d-42f8-8dfa-0a501a9e2ff4" providerId="ADAL" clId="{FDDD45CB-1330-4033-A842-3D2746AFF7C7}" dt="2025-08-29T19:09:34.497" v="63" actId="12"/>
+        <pc:spChg chg="mod">
+          <ac:chgData name="Lizethe Pérez Fuertes" userId="4ae9ef87-2a7d-42f8-8dfa-0a501a9e2ff4" providerId="ADAL" clId="{FDDD45CB-1330-4033-A842-3D2746AFF7C7}" dt="2026-03-01T13:10:22.879" v="178" actId="1076"/>
           <ac:spMkLst>
             <pc:docMk/>
-            <pc:sldMk cId="2206757477" sldId="647"/>
-            <ac:spMk id="4" creationId="{64E5AC4F-F553-1E7D-56B9-35DB015E2DE7}"/>
+            <pc:sldMk cId="712346558" sldId="649"/>
+            <ac:spMk id="3" creationId="{18BA93F3-3CAF-D4BE-8698-F39F2D6F93B8}"/>
           </ac:spMkLst>
         </pc:spChg>
         <pc:spChg chg="mod">
-          <ac:chgData name="Lizethe Pérez Fuertes" userId="4ae9ef87-2a7d-42f8-8dfa-0a501a9e2ff4" providerId="ADAL" clId="{FDDD45CB-1330-4033-A842-3D2746AFF7C7}" dt="2025-08-29T19:27:37.487" v="85" actId="14100"/>
+          <ac:chgData name="Lizethe Pérez Fuertes" userId="4ae9ef87-2a7d-42f8-8dfa-0a501a9e2ff4" providerId="ADAL" clId="{FDDD45CB-1330-4033-A842-3D2746AFF7C7}" dt="2026-03-01T13:10:25.709" v="179" actId="1076"/>
           <ac:spMkLst>
             <pc:docMk/>
-            <pc:sldMk cId="2206757477" sldId="647"/>
-            <ac:spMk id="6" creationId="{55B72C59-3D23-DBA3-3DD7-4B14E3DFE15C}"/>
+            <pc:sldMk cId="712346558" sldId="649"/>
+            <ac:spMk id="4" creationId="{52600C6A-A4CE-782C-1E7B-1F867FBDC852}"/>
+          </ac:spMkLst>
+        </pc:spChg>
+        <pc:picChg chg="add del mod">
+          <ac:chgData name="Lizethe Pérez Fuertes" userId="4ae9ef87-2a7d-42f8-8dfa-0a501a9e2ff4" providerId="ADAL" clId="{FDDD45CB-1330-4033-A842-3D2746AFF7C7}" dt="2026-03-01T13:11:06.493" v="180" actId="478"/>
+          <ac:picMkLst>
+            <pc:docMk/>
+            <pc:sldMk cId="712346558" sldId="649"/>
+            <ac:picMk id="2" creationId="{0FD3A249-5856-4461-9BEB-468324A84341}"/>
+          </ac:picMkLst>
+        </pc:picChg>
+        <pc:picChg chg="add mod">
+          <ac:chgData name="Lizethe Pérez Fuertes" userId="4ae9ef87-2a7d-42f8-8dfa-0a501a9e2ff4" providerId="ADAL" clId="{FDDD45CB-1330-4033-A842-3D2746AFF7C7}" dt="2026-03-01T13:11:13.726" v="184" actId="1076"/>
+          <ac:picMkLst>
+            <pc:docMk/>
+            <pc:sldMk cId="712346558" sldId="649"/>
+            <ac:picMk id="6" creationId="{9D373540-466E-D9F9-F3FA-1460FE691F98}"/>
+          </ac:picMkLst>
+        </pc:picChg>
+      </pc:sldChg>
+      <pc:sldChg chg="modSp add del mod">
+        <pc:chgData name="Lizethe Pérez Fuertes" userId="4ae9ef87-2a7d-42f8-8dfa-0a501a9e2ff4" providerId="ADAL" clId="{FDDD45CB-1330-4033-A842-3D2746AFF7C7}" dt="2026-03-01T13:14:48.002" v="193" actId="2696"/>
+        <pc:sldMkLst>
+          <pc:docMk/>
+          <pc:sldMk cId="2347398049" sldId="650"/>
+        </pc:sldMkLst>
+        <pc:spChg chg="mod">
+          <ac:chgData name="Lizethe Pérez Fuertes" userId="4ae9ef87-2a7d-42f8-8dfa-0a501a9e2ff4" providerId="ADAL" clId="{FDDD45CB-1330-4033-A842-3D2746AFF7C7}" dt="2026-03-01T13:13:36.461" v="191" actId="123"/>
+          <ac:spMkLst>
+            <pc:docMk/>
+            <pc:sldMk cId="2347398049" sldId="650"/>
+            <ac:spMk id="3" creationId="{2BD8B9D4-F869-089C-B7A4-FD7DAF5A7711}"/>
           </ac:spMkLst>
         </pc:spChg>
         <pc:spChg chg="mod">
-          <ac:chgData name="Lizethe Pérez Fuertes" userId="4ae9ef87-2a7d-42f8-8dfa-0a501a9e2ff4" providerId="ADAL" clId="{FDDD45CB-1330-4033-A842-3D2746AFF7C7}" dt="2025-08-29T19:08:16.678" v="51" actId="20577"/>
+          <ac:chgData name="Lizethe Pérez Fuertes" userId="4ae9ef87-2a7d-42f8-8dfa-0a501a9e2ff4" providerId="ADAL" clId="{FDDD45CB-1330-4033-A842-3D2746AFF7C7}" dt="2026-03-01T13:14:31.030" v="192" actId="1076"/>
           <ac:spMkLst>
             <pc:docMk/>
-            <pc:sldMk cId="2206757477" sldId="647"/>
-            <ac:spMk id="8" creationId="{6F59E072-939F-134B-44DE-F9F6F5A68348}"/>
+            <pc:sldMk cId="2347398049" sldId="650"/>
+            <ac:spMk id="4" creationId="{DBE63BE9-3012-EA71-30D0-9910634A8C1E}"/>
           </ac:spMkLst>
         </pc:spChg>
-        <pc:picChg chg="mod">
-          <ac:chgData name="Lizethe Pérez Fuertes" userId="4ae9ef87-2a7d-42f8-8dfa-0a501a9e2ff4" providerId="ADAL" clId="{FDDD45CB-1330-4033-A842-3D2746AFF7C7}" dt="2025-08-29T19:28:37.167" v="86" actId="1076"/>
-          <ac:picMkLst>
+      </pc:sldChg>
+      <pc:sldChg chg="modSp add mod">
+        <pc:chgData name="Lizethe Pérez Fuertes" userId="4ae9ef87-2a7d-42f8-8dfa-0a501a9e2ff4" providerId="ADAL" clId="{FDDD45CB-1330-4033-A842-3D2746AFF7C7}" dt="2026-03-01T13:15:08.459" v="195" actId="1076"/>
+        <pc:sldMkLst>
+          <pc:docMk/>
+          <pc:sldMk cId="2485710823" sldId="650"/>
+        </pc:sldMkLst>
+        <pc:spChg chg="mod">
+          <ac:chgData name="Lizethe Pérez Fuertes" userId="4ae9ef87-2a7d-42f8-8dfa-0a501a9e2ff4" providerId="ADAL" clId="{FDDD45CB-1330-4033-A842-3D2746AFF7C7}" dt="2026-03-01T13:15:08.459" v="195" actId="1076"/>
+          <ac:spMkLst>
             <pc:docMk/>
-            <pc:sldMk cId="2206757477" sldId="647"/>
-            <ac:picMk id="3" creationId="{3071D3ED-EF92-34EA-C22C-1F5DDCCF6751}"/>
-          </ac:picMkLst>
-        </pc:picChg>
+            <pc:sldMk cId="2485710823" sldId="650"/>
+            <ac:spMk id="3" creationId="{2BD8B9D4-F869-089C-B7A4-FD7DAF5A7711}"/>
+          </ac:spMkLst>
+        </pc:spChg>
       </pc:sldChg>
     </pc:docChg>
   </pc:docChgLst>
@@ -331,7 +364,7 @@
           <a:p>
             <a:fld id="{DDE721D5-655F-45D2-B717-3C4CD78C8568}" type="datetimeFigureOut">
               <a:rPr lang="es-MX" smtClean="0"/>
-              <a:t>29/08/2025</a:t>
+              <a:t>01/03/2026</a:t>
             </a:fld>
             <a:endParaRPr lang="es-MX" dirty="0"/>
           </a:p>
@@ -780,7 +813,7 @@
           <a:p>
             <a:fld id="{B3F3E716-CACC-4490-AD07-F24B6A68DE47}" type="datetimeFigureOut">
               <a:rPr lang="es-MX" smtClean="0"/>
-              <a:t>29/08/2025</a:t>
+              <a:t>01/03/2026</a:t>
             </a:fld>
             <a:endParaRPr lang="es-MX" dirty="0"/>
           </a:p>
@@ -950,7 +983,7 @@
           <a:p>
             <a:fld id="{B3F3E716-CACC-4490-AD07-F24B6A68DE47}" type="datetimeFigureOut">
               <a:rPr lang="es-MX" smtClean="0"/>
-              <a:t>29/08/2025</a:t>
+              <a:t>01/03/2026</a:t>
             </a:fld>
             <a:endParaRPr lang="es-MX" dirty="0"/>
           </a:p>
@@ -1130,7 +1163,7 @@
           <a:p>
             <a:fld id="{B3F3E716-CACC-4490-AD07-F24B6A68DE47}" type="datetimeFigureOut">
               <a:rPr lang="es-MX" smtClean="0"/>
-              <a:t>29/08/2025</a:t>
+              <a:t>01/03/2026</a:t>
             </a:fld>
             <a:endParaRPr lang="es-MX" dirty="0"/>
           </a:p>
@@ -1283,7 +1316,7 @@
           <a:p>
             <a:fld id="{1D8BD707-D9CF-40AE-B4C6-C98DA3205C09}" type="datetimeFigureOut">
               <a:rPr lang="en-US" smtClean="0"/>
-              <a:t>8/29/2025</a:t>
+              <a:t>3/1/2026</a:t>
             </a:fld>
             <a:endParaRPr lang="en-US" dirty="0"/>
           </a:p>
@@ -1740,7 +1773,7 @@
           <a:p>
             <a:fld id="{B3F3E716-CACC-4490-AD07-F24B6A68DE47}" type="datetimeFigureOut">
               <a:rPr lang="es-MX" smtClean="0"/>
-              <a:t>29/08/2025</a:t>
+              <a:t>01/03/2026</a:t>
             </a:fld>
             <a:endParaRPr lang="es-MX" dirty="0"/>
           </a:p>
@@ -1986,7 +2019,7 @@
           <a:p>
             <a:fld id="{B3F3E716-CACC-4490-AD07-F24B6A68DE47}" type="datetimeFigureOut">
               <a:rPr lang="es-MX" smtClean="0"/>
-              <a:t>29/08/2025</a:t>
+              <a:t>01/03/2026</a:t>
             </a:fld>
             <a:endParaRPr lang="es-MX" dirty="0"/>
           </a:p>
@@ -2274,7 +2307,7 @@
           <a:p>
             <a:fld id="{B3F3E716-CACC-4490-AD07-F24B6A68DE47}" type="datetimeFigureOut">
               <a:rPr lang="es-MX" smtClean="0"/>
-              <a:t>29/08/2025</a:t>
+              <a:t>01/03/2026</a:t>
             </a:fld>
             <a:endParaRPr lang="es-MX" dirty="0"/>
           </a:p>
@@ -2696,7 +2729,7 @@
           <a:p>
             <a:fld id="{B3F3E716-CACC-4490-AD07-F24B6A68DE47}" type="datetimeFigureOut">
               <a:rPr lang="es-MX" smtClean="0"/>
-              <a:t>29/08/2025</a:t>
+              <a:t>01/03/2026</a:t>
             </a:fld>
             <a:endParaRPr lang="es-MX" dirty="0"/>
           </a:p>
@@ -2814,7 +2847,7 @@
           <a:p>
             <a:fld id="{B3F3E716-CACC-4490-AD07-F24B6A68DE47}" type="datetimeFigureOut">
               <a:rPr lang="es-MX" smtClean="0"/>
-              <a:t>29/08/2025</a:t>
+              <a:t>01/03/2026</a:t>
             </a:fld>
             <a:endParaRPr lang="es-MX" dirty="0"/>
           </a:p>
@@ -2909,7 +2942,7 @@
           <a:p>
             <a:fld id="{B3F3E716-CACC-4490-AD07-F24B6A68DE47}" type="datetimeFigureOut">
               <a:rPr lang="es-MX" smtClean="0"/>
-              <a:t>29/08/2025</a:t>
+              <a:t>01/03/2026</a:t>
             </a:fld>
             <a:endParaRPr lang="es-MX" dirty="0"/>
           </a:p>
@@ -3186,7 +3219,7 @@
           <a:p>
             <a:fld id="{B3F3E716-CACC-4490-AD07-F24B6A68DE47}" type="datetimeFigureOut">
               <a:rPr lang="es-MX" smtClean="0"/>
-              <a:t>29/08/2025</a:t>
+              <a:t>01/03/2026</a:t>
             </a:fld>
             <a:endParaRPr lang="es-MX" dirty="0"/>
           </a:p>
@@ -3439,7 +3472,7 @@
           <a:p>
             <a:fld id="{B3F3E716-CACC-4490-AD07-F24B6A68DE47}" type="datetimeFigureOut">
               <a:rPr lang="es-MX" smtClean="0"/>
-              <a:t>29/08/2025</a:t>
+              <a:t>01/03/2026</a:t>
             </a:fld>
             <a:endParaRPr lang="es-MX" dirty="0"/>
           </a:p>
@@ -3652,7 +3685,7 @@
           <a:p>
             <a:fld id="{B3F3E716-CACC-4490-AD07-F24B6A68DE47}" type="datetimeFigureOut">
               <a:rPr lang="es-MX" smtClean="0"/>
-              <a:t>29/08/2025</a:t>
+              <a:t>01/03/2026</a:t>
             </a:fld>
             <a:endParaRPr lang="es-MX" dirty="0"/>
           </a:p>
@@ -4191,6 +4224,3812 @@
 </p:sld>
 </file>
 
+<file path=ppt/slides/slide10.xml><?xml version="1.0" encoding="utf-8"?>
+<p:sld xmlns:a="http://schemas.openxmlformats.org/drawingml/2006/main" xmlns:r="http://schemas.openxmlformats.org/officeDocument/2006/relationships" xmlns:p="http://schemas.openxmlformats.org/presentationml/2006/main">
+  <p:cSld>
+    <p:spTree>
+      <p:nvGrpSpPr>
+        <p:cNvPr id="1" name=""/>
+        <p:cNvGrpSpPr/>
+        <p:nvPr/>
+      </p:nvGrpSpPr>
+      <p:grpSpPr>
+        <a:xfrm>
+          <a:off x="0" y="0"/>
+          <a:ext cx="0" cy="0"/>
+          <a:chOff x="0" y="0"/>
+          <a:chExt cx="0" cy="0"/>
+        </a:xfrm>
+      </p:grpSpPr>
+      <p:sp>
+        <p:nvSpPr>
+          <p:cNvPr id="4" name="Rectangle 2">
+            <a:extLst>
+              <a:ext uri="{FF2B5EF4-FFF2-40B4-BE49-F238E27FC236}">
+                <a16:creationId xmlns:a16="http://schemas.microsoft.com/office/drawing/2014/main" id="{7CE40F4F-E91D-42FD-B661-EAA8BC18ABC8}"/>
+              </a:ext>
+            </a:extLst>
+          </p:cNvPr>
+          <p:cNvSpPr txBox="1">
+            <a:spLocks noChangeArrowheads="1"/>
+          </p:cNvSpPr>
+          <p:nvPr/>
+        </p:nvSpPr>
+        <p:spPr>
+          <a:xfrm>
+            <a:off x="0" y="-27383"/>
+            <a:ext cx="9144000" cy="1008112"/>
+          </a:xfrm>
+          <a:prstGeom prst="rect">
+            <a:avLst/>
+          </a:prstGeom>
+        </p:spPr>
+        <p:txBody>
+          <a:bodyPr vert="horz" lIns="91440" tIns="45720" rIns="91440" bIns="45720" rtlCol="0" anchor="ctr">
+            <a:normAutofit/>
+          </a:bodyPr>
+          <a:lstStyle>
+            <a:lvl1pPr algn="ctr" defTabSz="914400" rtl="0" eaLnBrk="1" latinLnBrk="0" hangingPunct="1">
+              <a:spcBef>
+                <a:spcPct val="0"/>
+              </a:spcBef>
+              <a:buNone/>
+              <a:defRPr sz="4400" kern="1200">
+                <a:solidFill>
+                  <a:schemeClr val="tx1"/>
+                </a:solidFill>
+                <a:latin typeface="+mj-lt"/>
+                <a:ea typeface="+mj-ea"/>
+                <a:cs typeface="+mj-cs"/>
+              </a:defRPr>
+            </a:lvl1pPr>
+          </a:lstStyle>
+          <a:p>
+            <a:r>
+              <a:rPr lang="es-ES_tradnl" altLang="es-MX" sz="3200" b="1" dirty="0">
+                <a:solidFill>
+                  <a:schemeClr val="accent4">
+                    <a:lumMod val="50000"/>
+                  </a:schemeClr>
+                </a:solidFill>
+                <a:effectLst>
+                  <a:outerShdw blurRad="38100" dist="38100" dir="2700000" algn="tl">
+                    <a:srgbClr val="C0C0C0"/>
+                  </a:outerShdw>
+                </a:effectLst>
+                <a:latin typeface="Dom Casual" charset="0"/>
+              </a:rPr>
+              <a:t>Encapsulación : atributos privados</a:t>
+            </a:r>
+          </a:p>
+        </p:txBody>
+      </p:sp>
+      <p:sp>
+        <p:nvSpPr>
+          <p:cNvPr id="10" name="CuadroTexto 9">
+            <a:extLst>
+              <a:ext uri="{FF2B5EF4-FFF2-40B4-BE49-F238E27FC236}">
+                <a16:creationId xmlns:a16="http://schemas.microsoft.com/office/drawing/2014/main" id="{B73C42C7-85D9-4D9B-B558-211E4812A4BA}"/>
+              </a:ext>
+            </a:extLst>
+          </p:cNvPr>
+          <p:cNvSpPr txBox="1"/>
+          <p:nvPr/>
+        </p:nvSpPr>
+        <p:spPr>
+          <a:xfrm>
+            <a:off x="467544" y="1071605"/>
+            <a:ext cx="7992888" cy="1989904"/>
+          </a:xfrm>
+          <a:prstGeom prst="rect">
+            <a:avLst/>
+          </a:prstGeom>
+          <a:noFill/>
+        </p:spPr>
+        <p:txBody>
+          <a:bodyPr wrap="square" rtlCol="0">
+            <a:spAutoFit/>
+          </a:bodyPr>
+          <a:lstStyle/>
+          <a:p>
+            <a:pPr algn="just">
+              <a:lnSpc>
+                <a:spcPts val="2500"/>
+              </a:lnSpc>
+            </a:pPr>
+            <a:r>
+              <a:rPr lang="es-ES" sz="1600" dirty="0">
+                <a:solidFill>
+                  <a:schemeClr val="tx1">
+                    <a:lumMod val="95000"/>
+                    <a:lumOff val="5000"/>
+                  </a:schemeClr>
+                </a:solidFill>
+              </a:rPr>
+              <a:t>Los </a:t>
+            </a:r>
+            <a:r>
+              <a:rPr lang="es-ES" sz="1600" b="1" dirty="0">
+                <a:solidFill>
+                  <a:srgbClr val="0070C0"/>
+                </a:solidFill>
+              </a:rPr>
+              <a:t>atributos de clase </a:t>
+            </a:r>
+            <a:r>
+              <a:rPr lang="es-ES" sz="1600" dirty="0">
+                <a:solidFill>
+                  <a:schemeClr val="tx1">
+                    <a:lumMod val="95000"/>
+                    <a:lumOff val="5000"/>
+                  </a:schemeClr>
+                </a:solidFill>
+              </a:rPr>
+              <a:t>pueden ocultarse para que no sean accedidos desde fuera de la definición de una clase. Para ello, es necesario nombrar los atributos con un prefijo de doble subrayado: </a:t>
+            </a:r>
+            <a:r>
+              <a:rPr lang="es-ES" sz="1600" b="1" dirty="0">
+                <a:solidFill>
+                  <a:schemeClr val="accent6">
+                    <a:lumMod val="75000"/>
+                  </a:schemeClr>
+                </a:solidFill>
+              </a:rPr>
+              <a:t>__atributo</a:t>
+            </a:r>
+          </a:p>
+          <a:p>
+            <a:pPr algn="just">
+              <a:lnSpc>
+                <a:spcPts val="2500"/>
+              </a:lnSpc>
+            </a:pPr>
+            <a:endParaRPr lang="es-ES" sz="1600" b="1" dirty="0">
+              <a:solidFill>
+                <a:schemeClr val="accent6">
+                  <a:lumMod val="75000"/>
+                </a:schemeClr>
+              </a:solidFill>
+            </a:endParaRPr>
+          </a:p>
+          <a:p>
+            <a:pPr algn="just">
+              <a:lnSpc>
+                <a:spcPts val="2500"/>
+              </a:lnSpc>
+            </a:pPr>
+            <a:endParaRPr lang="es-ES" sz="1600" b="1" dirty="0">
+              <a:solidFill>
+                <a:schemeClr val="accent6">
+                  <a:lumMod val="75000"/>
+                </a:schemeClr>
+              </a:solidFill>
+            </a:endParaRPr>
+          </a:p>
+          <a:p>
+            <a:pPr algn="just">
+              <a:lnSpc>
+                <a:spcPts val="2500"/>
+              </a:lnSpc>
+            </a:pPr>
+            <a:endParaRPr lang="es-ES" sz="1600" b="1" dirty="0">
+              <a:solidFill>
+                <a:schemeClr val="accent6">
+                  <a:lumMod val="75000"/>
+                </a:schemeClr>
+              </a:solidFill>
+            </a:endParaRPr>
+          </a:p>
+        </p:txBody>
+      </p:sp>
+      <p:sp>
+        <p:nvSpPr>
+          <p:cNvPr id="5" name="Rectangle 3">
+            <a:extLst>
+              <a:ext uri="{FF2B5EF4-FFF2-40B4-BE49-F238E27FC236}">
+                <a16:creationId xmlns:a16="http://schemas.microsoft.com/office/drawing/2014/main" id="{1288C872-2009-4CB2-825E-4AA3461EF388}"/>
+              </a:ext>
+            </a:extLst>
+          </p:cNvPr>
+          <p:cNvSpPr>
+            <a:spLocks noChangeArrowheads="1"/>
+          </p:cNvSpPr>
+          <p:nvPr/>
+        </p:nvSpPr>
+        <p:spPr bwMode="auto">
+          <a:xfrm>
+            <a:off x="467544" y="2348880"/>
+            <a:ext cx="4887566" cy="3647152"/>
+          </a:xfrm>
+          <a:prstGeom prst="rect">
+            <a:avLst/>
+          </a:prstGeom>
+          <a:solidFill>
+            <a:srgbClr val="FFFFFF"/>
+          </a:solidFill>
+          <a:ln>
+            <a:noFill/>
+          </a:ln>
+          <a:effectLst/>
+          <a:extLst>
+            <a:ext uri="{91240B29-F687-4F45-9708-019B960494DF}">
+              <a14:hiddenLine xmlns:a14="http://schemas.microsoft.com/office/drawing/2010/main" w="9525">
+                <a:solidFill>
+                  <a:schemeClr val="tx1"/>
+                </a:solidFill>
+                <a:miter lim="800000"/>
+                <a:headEnd/>
+                <a:tailEnd/>
+              </a14:hiddenLine>
+            </a:ext>
+            <a:ext uri="{AF507438-7753-43E0-B8FC-AC1667EBCBE1}">
+              <a14:hiddenEffects xmlns:a14="http://schemas.microsoft.com/office/drawing/2010/main">
+                <a:effectLst>
+                  <a:outerShdw dist="35921" dir="2700000" algn="ctr" rotWithShape="0">
+                    <a:schemeClr val="bg2"/>
+                  </a:outerShdw>
+                </a:effectLst>
+              </a14:hiddenEffects>
+            </a:ext>
+          </a:extLst>
+        </p:spPr>
+        <p:txBody>
+          <a:bodyPr vert="horz" wrap="square" lIns="91440" tIns="45720" rIns="91440" bIns="45720" numCol="1" anchor="ctr" anchorCtr="0" compatLnSpc="1">
+            <a:prstTxWarp prst="textNoShape">
+              <a:avLst/>
+            </a:prstTxWarp>
+            <a:spAutoFit/>
+          </a:bodyPr>
+          <a:lstStyle/>
+          <a:p>
+            <a:pPr marL="0" marR="0" lvl="0" indent="0" algn="l" defTabSz="914400" rtl="0" eaLnBrk="0" fontAlgn="base" latinLnBrk="0" hangingPunct="0">
+              <a:lnSpc>
+                <a:spcPct val="100000"/>
+              </a:lnSpc>
+              <a:spcBef>
+                <a:spcPct val="0"/>
+              </a:spcBef>
+              <a:spcAft>
+                <a:spcPct val="0"/>
+              </a:spcAft>
+              <a:buClrTx/>
+              <a:buSzTx/>
+              <a:buFontTx/>
+              <a:buNone/>
+              <a:tabLst/>
+            </a:pPr>
+            <a:r>
+              <a:rPr kumimoji="0" lang="es-MX" altLang="es-MX" sz="1200" i="0" u="none" strike="noStrike" cap="none" normalizeH="0" baseline="0" dirty="0">
+                <a:ln>
+                  <a:noFill/>
+                </a:ln>
+                <a:solidFill>
+                  <a:srgbClr val="000088"/>
+                </a:solidFill>
+                <a:effectLst/>
+                <a:latin typeface="Courier New" panose="02070309020205020404" pitchFamily="49" charset="0"/>
+                <a:cs typeface="Courier New" panose="02070309020205020404" pitchFamily="49" charset="0"/>
+              </a:rPr>
+              <a:t>class</a:t>
+            </a:r>
+            <a:r>
+              <a:rPr kumimoji="0" lang="es-MX" altLang="es-MX" sz="1200" i="0" u="none" strike="noStrike" cap="none" normalizeH="0" baseline="0" dirty="0">
+                <a:ln>
+                  <a:noFill/>
+                </a:ln>
+                <a:solidFill>
+                  <a:srgbClr val="000000"/>
+                </a:solidFill>
+                <a:effectLst/>
+                <a:latin typeface="Courier New" panose="02070309020205020404" pitchFamily="49" charset="0"/>
+                <a:cs typeface="Courier New" panose="02070309020205020404" pitchFamily="49" charset="0"/>
+              </a:rPr>
+              <a:t> </a:t>
+            </a:r>
+            <a:r>
+              <a:rPr kumimoji="0" lang="es-MX" altLang="es-MX" sz="1200" i="0" u="none" strike="noStrike" cap="none" normalizeH="0" baseline="0" dirty="0">
+                <a:ln>
+                  <a:noFill/>
+                </a:ln>
+                <a:solidFill>
+                  <a:srgbClr val="660066"/>
+                </a:solidFill>
+                <a:effectLst/>
+                <a:latin typeface="Courier New" panose="02070309020205020404" pitchFamily="49" charset="0"/>
+                <a:cs typeface="Courier New" panose="02070309020205020404" pitchFamily="49" charset="0"/>
+              </a:rPr>
+              <a:t>Factura</a:t>
+            </a:r>
+            <a:r>
+              <a:rPr kumimoji="0" lang="es-MX" altLang="es-MX" sz="1200" i="0" u="none" strike="noStrike" cap="none" normalizeH="0" baseline="0" dirty="0">
+                <a:ln>
+                  <a:noFill/>
+                </a:ln>
+                <a:solidFill>
+                  <a:srgbClr val="666600"/>
+                </a:solidFill>
+                <a:effectLst/>
+                <a:latin typeface="Courier New" panose="02070309020205020404" pitchFamily="49" charset="0"/>
+                <a:cs typeface="Courier New" panose="02070309020205020404" pitchFamily="49" charset="0"/>
+              </a:rPr>
+              <a:t>:</a:t>
+            </a:r>
+            <a:r>
+              <a:rPr kumimoji="0" lang="es-MX" altLang="es-MX" sz="1200" i="0" u="none" strike="noStrike" cap="none" normalizeH="0" baseline="0" dirty="0">
+                <a:ln>
+                  <a:noFill/>
+                </a:ln>
+                <a:solidFill>
+                  <a:srgbClr val="000000"/>
+                </a:solidFill>
+                <a:effectLst/>
+                <a:latin typeface="Courier New" panose="02070309020205020404" pitchFamily="49" charset="0"/>
+                <a:cs typeface="Courier New" panose="02070309020205020404" pitchFamily="49" charset="0"/>
+              </a:rPr>
+              <a:t> </a:t>
+            </a:r>
+          </a:p>
+          <a:p>
+            <a:pPr marL="0" marR="0" lvl="0" indent="0" algn="l" defTabSz="914400" rtl="0" eaLnBrk="0" fontAlgn="base" latinLnBrk="0" hangingPunct="0">
+              <a:lnSpc>
+                <a:spcPct val="100000"/>
+              </a:lnSpc>
+              <a:spcBef>
+                <a:spcPct val="0"/>
+              </a:spcBef>
+              <a:spcAft>
+                <a:spcPct val="0"/>
+              </a:spcAft>
+              <a:buClrTx/>
+              <a:buSzTx/>
+              <a:buFontTx/>
+              <a:buNone/>
+              <a:tabLst/>
+            </a:pPr>
+            <a:r>
+              <a:rPr lang="es-MX" altLang="es-MX" sz="1200" dirty="0">
+                <a:solidFill>
+                  <a:srgbClr val="000000"/>
+                </a:solidFill>
+                <a:latin typeface="Courier New" panose="02070309020205020404" pitchFamily="49" charset="0"/>
+                <a:cs typeface="Courier New" panose="02070309020205020404" pitchFamily="49" charset="0"/>
+              </a:rPr>
+              <a:t>      </a:t>
+            </a:r>
+            <a:r>
+              <a:rPr kumimoji="0" lang="es-MX" altLang="es-MX" sz="1200" i="0" u="none" strike="noStrike" cap="none" normalizeH="0" baseline="0" dirty="0">
+                <a:ln>
+                  <a:noFill/>
+                </a:ln>
+                <a:solidFill>
+                  <a:srgbClr val="000000"/>
+                </a:solidFill>
+                <a:effectLst/>
+                <a:highlight>
+                  <a:srgbClr val="FFFF00"/>
+                </a:highlight>
+                <a:latin typeface="Courier New" panose="02070309020205020404" pitchFamily="49" charset="0"/>
+                <a:cs typeface="Courier New" panose="02070309020205020404" pitchFamily="49" charset="0"/>
+              </a:rPr>
+              <a:t>__tasa </a:t>
+            </a:r>
+            <a:r>
+              <a:rPr kumimoji="0" lang="es-MX" altLang="es-MX" sz="1200" i="0" u="none" strike="noStrike" cap="none" normalizeH="0" baseline="0" dirty="0">
+                <a:ln>
+                  <a:noFill/>
+                </a:ln>
+                <a:solidFill>
+                  <a:srgbClr val="666600"/>
+                </a:solidFill>
+                <a:effectLst/>
+                <a:highlight>
+                  <a:srgbClr val="FFFF00"/>
+                </a:highlight>
+                <a:latin typeface="Courier New" panose="02070309020205020404" pitchFamily="49" charset="0"/>
+                <a:cs typeface="Courier New" panose="02070309020205020404" pitchFamily="49" charset="0"/>
+              </a:rPr>
+              <a:t>=</a:t>
+            </a:r>
+            <a:r>
+              <a:rPr kumimoji="0" lang="es-MX" altLang="es-MX" sz="1200" i="0" u="none" strike="noStrike" cap="none" normalizeH="0" baseline="0" dirty="0">
+                <a:ln>
+                  <a:noFill/>
+                </a:ln>
+                <a:solidFill>
+                  <a:srgbClr val="000000"/>
+                </a:solidFill>
+                <a:effectLst/>
+                <a:highlight>
+                  <a:srgbClr val="FFFF00"/>
+                </a:highlight>
+                <a:latin typeface="Courier New" panose="02070309020205020404" pitchFamily="49" charset="0"/>
+                <a:cs typeface="Courier New" panose="02070309020205020404" pitchFamily="49" charset="0"/>
+              </a:rPr>
+              <a:t> </a:t>
+            </a:r>
+            <a:r>
+              <a:rPr kumimoji="0" lang="es-MX" altLang="es-MX" sz="1200" i="0" u="none" strike="noStrike" cap="none" normalizeH="0" baseline="0" dirty="0">
+                <a:ln>
+                  <a:noFill/>
+                </a:ln>
+                <a:solidFill>
+                  <a:srgbClr val="006666"/>
+                </a:solidFill>
+                <a:effectLst/>
+                <a:highlight>
+                  <a:srgbClr val="FFFF00"/>
+                </a:highlight>
+                <a:latin typeface="Courier New" panose="02070309020205020404" pitchFamily="49" charset="0"/>
+                <a:cs typeface="Courier New" panose="02070309020205020404" pitchFamily="49" charset="0"/>
+              </a:rPr>
+              <a:t>19</a:t>
+            </a:r>
+            <a:r>
+              <a:rPr kumimoji="0" lang="es-MX" altLang="es-MX" sz="1200" i="0" u="none" strike="noStrike" cap="none" normalizeH="0" baseline="0" dirty="0">
+                <a:ln>
+                  <a:noFill/>
+                </a:ln>
+                <a:solidFill>
+                  <a:srgbClr val="000000"/>
+                </a:solidFill>
+                <a:effectLst/>
+                <a:highlight>
+                  <a:srgbClr val="FFFF00"/>
+                </a:highlight>
+                <a:latin typeface="Courier New" panose="02070309020205020404" pitchFamily="49" charset="0"/>
+                <a:cs typeface="Courier New" panose="02070309020205020404" pitchFamily="49" charset="0"/>
+              </a:rPr>
+              <a:t> </a:t>
+            </a:r>
+          </a:p>
+          <a:p>
+            <a:pPr marL="0" marR="0" lvl="0" indent="0" algn="l" defTabSz="914400" rtl="0" eaLnBrk="0" fontAlgn="base" latinLnBrk="0" hangingPunct="0">
+              <a:lnSpc>
+                <a:spcPct val="100000"/>
+              </a:lnSpc>
+              <a:spcBef>
+                <a:spcPct val="0"/>
+              </a:spcBef>
+              <a:spcAft>
+                <a:spcPct val="0"/>
+              </a:spcAft>
+              <a:buClrTx/>
+              <a:buSzTx/>
+              <a:buFontTx/>
+              <a:buNone/>
+              <a:tabLst/>
+            </a:pPr>
+            <a:r>
+              <a:rPr kumimoji="0" lang="es-MX" altLang="es-MX" sz="1200" i="0" u="none" strike="noStrike" cap="none" normalizeH="0" baseline="0" dirty="0">
+                <a:ln>
+                  <a:noFill/>
+                </a:ln>
+                <a:solidFill>
+                  <a:srgbClr val="000088"/>
+                </a:solidFill>
+                <a:effectLst/>
+                <a:latin typeface="Courier New" panose="02070309020205020404" pitchFamily="49" charset="0"/>
+                <a:cs typeface="Courier New" panose="02070309020205020404" pitchFamily="49" charset="0"/>
+              </a:rPr>
+              <a:t>      </a:t>
+            </a:r>
+          </a:p>
+          <a:p>
+            <a:pPr marL="0" marR="0" lvl="0" indent="0" algn="l" defTabSz="914400" rtl="0" eaLnBrk="0" fontAlgn="base" latinLnBrk="0" hangingPunct="0">
+              <a:lnSpc>
+                <a:spcPct val="100000"/>
+              </a:lnSpc>
+              <a:spcBef>
+                <a:spcPct val="0"/>
+              </a:spcBef>
+              <a:spcAft>
+                <a:spcPct val="0"/>
+              </a:spcAft>
+              <a:buClrTx/>
+              <a:buSzTx/>
+              <a:buFontTx/>
+              <a:buNone/>
+              <a:tabLst/>
+            </a:pPr>
+            <a:r>
+              <a:rPr lang="es-MX" altLang="es-MX" sz="1200" dirty="0">
+                <a:solidFill>
+                  <a:srgbClr val="000088"/>
+                </a:solidFill>
+                <a:latin typeface="Courier New" panose="02070309020205020404" pitchFamily="49" charset="0"/>
+                <a:cs typeface="Courier New" panose="02070309020205020404" pitchFamily="49" charset="0"/>
+              </a:rPr>
+              <a:t>      </a:t>
+            </a:r>
+            <a:r>
+              <a:rPr kumimoji="0" lang="es-MX" altLang="es-MX" sz="1200" i="0" u="none" strike="noStrike" cap="none" normalizeH="0" baseline="0" dirty="0">
+                <a:ln>
+                  <a:noFill/>
+                </a:ln>
+                <a:solidFill>
+                  <a:srgbClr val="000088"/>
+                </a:solidFill>
+                <a:effectLst/>
+                <a:latin typeface="Courier New" panose="02070309020205020404" pitchFamily="49" charset="0"/>
+                <a:cs typeface="Courier New" panose="02070309020205020404" pitchFamily="49" charset="0"/>
+              </a:rPr>
+              <a:t>def</a:t>
+            </a:r>
+            <a:r>
+              <a:rPr kumimoji="0" lang="es-MX" altLang="es-MX" sz="1200" i="0" u="none" strike="noStrike" cap="none" normalizeH="0" baseline="0" dirty="0">
+                <a:ln>
+                  <a:noFill/>
+                </a:ln>
+                <a:solidFill>
+                  <a:srgbClr val="000000"/>
+                </a:solidFill>
+                <a:effectLst/>
+                <a:latin typeface="Courier New" panose="02070309020205020404" pitchFamily="49" charset="0"/>
+                <a:cs typeface="Courier New" panose="02070309020205020404" pitchFamily="49" charset="0"/>
+              </a:rPr>
+              <a:t> __init__</a:t>
+            </a:r>
+            <a:r>
+              <a:rPr kumimoji="0" lang="es-MX" altLang="es-MX" sz="1200" i="0" u="none" strike="noStrike" cap="none" normalizeH="0" baseline="0" dirty="0">
+                <a:ln>
+                  <a:noFill/>
+                </a:ln>
+                <a:solidFill>
+                  <a:srgbClr val="666600"/>
+                </a:solidFill>
+                <a:effectLst/>
+                <a:latin typeface="Courier New" panose="02070309020205020404" pitchFamily="49" charset="0"/>
+                <a:cs typeface="Courier New" panose="02070309020205020404" pitchFamily="49" charset="0"/>
+              </a:rPr>
+              <a:t>(</a:t>
+            </a:r>
+            <a:r>
+              <a:rPr kumimoji="0" lang="es-MX" altLang="es-MX" sz="1200" i="0" u="none" strike="noStrike" cap="none" normalizeH="0" baseline="0" dirty="0">
+                <a:ln>
+                  <a:noFill/>
+                </a:ln>
+                <a:solidFill>
+                  <a:srgbClr val="000088"/>
+                </a:solidFill>
+                <a:effectLst/>
+                <a:latin typeface="Courier New" panose="02070309020205020404" pitchFamily="49" charset="0"/>
+                <a:cs typeface="Courier New" panose="02070309020205020404" pitchFamily="49" charset="0"/>
+              </a:rPr>
+              <a:t>self</a:t>
+            </a:r>
+            <a:r>
+              <a:rPr kumimoji="0" lang="es-MX" altLang="es-MX" sz="1200" i="0" u="none" strike="noStrike" cap="none" normalizeH="0" baseline="0" dirty="0">
+                <a:ln>
+                  <a:noFill/>
+                </a:ln>
+                <a:solidFill>
+                  <a:srgbClr val="666600"/>
+                </a:solidFill>
+                <a:effectLst/>
+                <a:latin typeface="Courier New" panose="02070309020205020404" pitchFamily="49" charset="0"/>
+                <a:cs typeface="Courier New" panose="02070309020205020404" pitchFamily="49" charset="0"/>
+              </a:rPr>
+              <a:t>,</a:t>
+            </a:r>
+            <a:r>
+              <a:rPr kumimoji="0" lang="es-MX" altLang="es-MX" sz="1200" i="0" u="none" strike="noStrike" cap="none" normalizeH="0" baseline="0" dirty="0">
+                <a:ln>
+                  <a:noFill/>
+                </a:ln>
+                <a:solidFill>
+                  <a:srgbClr val="000000"/>
+                </a:solidFill>
+                <a:effectLst/>
+                <a:latin typeface="Courier New" panose="02070309020205020404" pitchFamily="49" charset="0"/>
+                <a:cs typeface="Courier New" panose="02070309020205020404" pitchFamily="49" charset="0"/>
+              </a:rPr>
+              <a:t> unidad</a:t>
+            </a:r>
+            <a:r>
+              <a:rPr kumimoji="0" lang="es-MX" altLang="es-MX" sz="1200" i="0" u="none" strike="noStrike" cap="none" normalizeH="0" baseline="0" dirty="0">
+                <a:ln>
+                  <a:noFill/>
+                </a:ln>
+                <a:solidFill>
+                  <a:srgbClr val="666600"/>
+                </a:solidFill>
+                <a:effectLst/>
+                <a:latin typeface="Courier New" panose="02070309020205020404" pitchFamily="49" charset="0"/>
+                <a:cs typeface="Courier New" panose="02070309020205020404" pitchFamily="49" charset="0"/>
+              </a:rPr>
+              <a:t>,</a:t>
+            </a:r>
+            <a:r>
+              <a:rPr kumimoji="0" lang="es-MX" altLang="es-MX" sz="1200" i="0" u="none" strike="noStrike" cap="none" normalizeH="0" baseline="0" dirty="0">
+                <a:ln>
+                  <a:noFill/>
+                </a:ln>
+                <a:solidFill>
+                  <a:srgbClr val="000000"/>
+                </a:solidFill>
+                <a:effectLst/>
+                <a:latin typeface="Courier New" panose="02070309020205020404" pitchFamily="49" charset="0"/>
+                <a:cs typeface="Courier New" panose="02070309020205020404" pitchFamily="49" charset="0"/>
+              </a:rPr>
+              <a:t> precio</a:t>
+            </a:r>
+            <a:r>
+              <a:rPr kumimoji="0" lang="es-MX" altLang="es-MX" sz="1200" i="0" u="none" strike="noStrike" cap="none" normalizeH="0" baseline="0" dirty="0">
+                <a:ln>
+                  <a:noFill/>
+                </a:ln>
+                <a:solidFill>
+                  <a:srgbClr val="666600"/>
+                </a:solidFill>
+                <a:effectLst/>
+                <a:latin typeface="Courier New" panose="02070309020205020404" pitchFamily="49" charset="0"/>
+                <a:cs typeface="Courier New" panose="02070309020205020404" pitchFamily="49" charset="0"/>
+              </a:rPr>
+              <a:t>):</a:t>
+            </a:r>
+            <a:r>
+              <a:rPr kumimoji="0" lang="es-MX" altLang="es-MX" sz="1200" i="0" u="none" strike="noStrike" cap="none" normalizeH="0" baseline="0" dirty="0">
+                <a:ln>
+                  <a:noFill/>
+                </a:ln>
+                <a:solidFill>
+                  <a:srgbClr val="000000"/>
+                </a:solidFill>
+                <a:effectLst/>
+                <a:latin typeface="Courier New" panose="02070309020205020404" pitchFamily="49" charset="0"/>
+                <a:cs typeface="Courier New" panose="02070309020205020404" pitchFamily="49" charset="0"/>
+              </a:rPr>
+              <a:t> </a:t>
+            </a:r>
+          </a:p>
+          <a:p>
+            <a:pPr marL="0" marR="0" lvl="0" indent="0" algn="l" defTabSz="914400" rtl="0" eaLnBrk="0" fontAlgn="base" latinLnBrk="0" hangingPunct="0">
+              <a:lnSpc>
+                <a:spcPct val="100000"/>
+              </a:lnSpc>
+              <a:spcBef>
+                <a:spcPct val="0"/>
+              </a:spcBef>
+              <a:spcAft>
+                <a:spcPct val="0"/>
+              </a:spcAft>
+              <a:buClrTx/>
+              <a:buSzTx/>
+              <a:buFontTx/>
+              <a:buNone/>
+              <a:tabLst/>
+            </a:pPr>
+            <a:r>
+              <a:rPr kumimoji="0" lang="es-MX" altLang="es-MX" sz="1200" i="0" u="none" strike="noStrike" cap="none" normalizeH="0" baseline="0" dirty="0">
+                <a:ln>
+                  <a:noFill/>
+                </a:ln>
+                <a:solidFill>
+                  <a:srgbClr val="000000"/>
+                </a:solidFill>
+                <a:effectLst/>
+                <a:latin typeface="Courier New" panose="02070309020205020404" pitchFamily="49" charset="0"/>
+                <a:cs typeface="Courier New" panose="02070309020205020404" pitchFamily="49" charset="0"/>
+              </a:rPr>
+              <a:t>            </a:t>
+            </a:r>
+            <a:r>
+              <a:rPr kumimoji="0" lang="es-MX" altLang="es-MX" sz="1200" i="0" u="none" strike="noStrike" cap="none" normalizeH="0" baseline="0" dirty="0">
+                <a:ln>
+                  <a:noFill/>
+                </a:ln>
+                <a:solidFill>
+                  <a:srgbClr val="000088"/>
+                </a:solidFill>
+                <a:effectLst/>
+                <a:latin typeface="Courier New" panose="02070309020205020404" pitchFamily="49" charset="0"/>
+                <a:cs typeface="Courier New" panose="02070309020205020404" pitchFamily="49" charset="0"/>
+              </a:rPr>
+              <a:t>self</a:t>
+            </a:r>
+            <a:r>
+              <a:rPr kumimoji="0" lang="es-MX" altLang="es-MX" sz="1200" i="0" u="none" strike="noStrike" cap="none" normalizeH="0" baseline="0" dirty="0">
+                <a:ln>
+                  <a:noFill/>
+                </a:ln>
+                <a:solidFill>
+                  <a:srgbClr val="666600"/>
+                </a:solidFill>
+                <a:effectLst/>
+                <a:latin typeface="Courier New" panose="02070309020205020404" pitchFamily="49" charset="0"/>
+                <a:cs typeface="Courier New" panose="02070309020205020404" pitchFamily="49" charset="0"/>
+              </a:rPr>
+              <a:t>.</a:t>
+            </a:r>
+            <a:r>
+              <a:rPr kumimoji="0" lang="es-MX" altLang="es-MX" sz="1200" i="0" u="none" strike="noStrike" cap="none" normalizeH="0" baseline="0" dirty="0">
+                <a:ln>
+                  <a:noFill/>
+                </a:ln>
+                <a:solidFill>
+                  <a:srgbClr val="000000"/>
+                </a:solidFill>
+                <a:effectLst/>
+                <a:latin typeface="Courier New" panose="02070309020205020404" pitchFamily="49" charset="0"/>
+                <a:cs typeface="Courier New" panose="02070309020205020404" pitchFamily="49" charset="0"/>
+              </a:rPr>
+              <a:t>unidad </a:t>
+            </a:r>
+            <a:r>
+              <a:rPr kumimoji="0" lang="es-MX" altLang="es-MX" sz="1200" i="0" u="none" strike="noStrike" cap="none" normalizeH="0" baseline="0" dirty="0">
+                <a:ln>
+                  <a:noFill/>
+                </a:ln>
+                <a:solidFill>
+                  <a:srgbClr val="666600"/>
+                </a:solidFill>
+                <a:effectLst/>
+                <a:latin typeface="Courier New" panose="02070309020205020404" pitchFamily="49" charset="0"/>
+                <a:cs typeface="Courier New" panose="02070309020205020404" pitchFamily="49" charset="0"/>
+              </a:rPr>
+              <a:t>=</a:t>
+            </a:r>
+            <a:r>
+              <a:rPr kumimoji="0" lang="es-MX" altLang="es-MX" sz="1200" i="0" u="none" strike="noStrike" cap="none" normalizeH="0" baseline="0" dirty="0">
+                <a:ln>
+                  <a:noFill/>
+                </a:ln>
+                <a:solidFill>
+                  <a:srgbClr val="000000"/>
+                </a:solidFill>
+                <a:effectLst/>
+                <a:latin typeface="Courier New" panose="02070309020205020404" pitchFamily="49" charset="0"/>
+                <a:cs typeface="Courier New" panose="02070309020205020404" pitchFamily="49" charset="0"/>
+              </a:rPr>
+              <a:t> unidad </a:t>
+            </a:r>
+          </a:p>
+          <a:p>
+            <a:pPr marL="0" marR="0" lvl="0" indent="0" algn="l" defTabSz="914400" rtl="0" eaLnBrk="0" fontAlgn="base" latinLnBrk="0" hangingPunct="0">
+              <a:lnSpc>
+                <a:spcPct val="100000"/>
+              </a:lnSpc>
+              <a:spcBef>
+                <a:spcPct val="0"/>
+              </a:spcBef>
+              <a:spcAft>
+                <a:spcPct val="0"/>
+              </a:spcAft>
+              <a:buClrTx/>
+              <a:buSzTx/>
+              <a:buFontTx/>
+              <a:buNone/>
+              <a:tabLst/>
+            </a:pPr>
+            <a:r>
+              <a:rPr lang="es-MX" altLang="es-MX" sz="1200" dirty="0">
+                <a:solidFill>
+                  <a:srgbClr val="000000"/>
+                </a:solidFill>
+                <a:latin typeface="Courier New" panose="02070309020205020404" pitchFamily="49" charset="0"/>
+                <a:cs typeface="Courier New" panose="02070309020205020404" pitchFamily="49" charset="0"/>
+              </a:rPr>
+              <a:t>            </a:t>
+            </a:r>
+            <a:r>
+              <a:rPr kumimoji="0" lang="es-MX" altLang="es-MX" sz="1200" i="0" u="none" strike="noStrike" cap="none" normalizeH="0" baseline="0" dirty="0">
+                <a:ln>
+                  <a:noFill/>
+                </a:ln>
+                <a:solidFill>
+                  <a:srgbClr val="000088"/>
+                </a:solidFill>
+                <a:effectLst/>
+                <a:latin typeface="Courier New" panose="02070309020205020404" pitchFamily="49" charset="0"/>
+                <a:cs typeface="Courier New" panose="02070309020205020404" pitchFamily="49" charset="0"/>
+              </a:rPr>
+              <a:t>self</a:t>
+            </a:r>
+            <a:r>
+              <a:rPr kumimoji="0" lang="es-MX" altLang="es-MX" sz="1200" i="0" u="none" strike="noStrike" cap="none" normalizeH="0" baseline="0" dirty="0">
+                <a:ln>
+                  <a:noFill/>
+                </a:ln>
+                <a:solidFill>
+                  <a:srgbClr val="666600"/>
+                </a:solidFill>
+                <a:effectLst/>
+                <a:latin typeface="Courier New" panose="02070309020205020404" pitchFamily="49" charset="0"/>
+                <a:cs typeface="Courier New" panose="02070309020205020404" pitchFamily="49" charset="0"/>
+              </a:rPr>
+              <a:t>.</a:t>
+            </a:r>
+            <a:r>
+              <a:rPr kumimoji="0" lang="es-MX" altLang="es-MX" sz="1200" i="0" u="none" strike="noStrike" cap="none" normalizeH="0" baseline="0" dirty="0">
+                <a:ln>
+                  <a:noFill/>
+                </a:ln>
+                <a:solidFill>
+                  <a:srgbClr val="000000"/>
+                </a:solidFill>
+                <a:effectLst/>
+                <a:latin typeface="Courier New" panose="02070309020205020404" pitchFamily="49" charset="0"/>
+                <a:cs typeface="Courier New" panose="02070309020205020404" pitchFamily="49" charset="0"/>
+              </a:rPr>
+              <a:t>precio </a:t>
+            </a:r>
+            <a:r>
+              <a:rPr kumimoji="0" lang="es-MX" altLang="es-MX" sz="1200" i="0" u="none" strike="noStrike" cap="none" normalizeH="0" baseline="0" dirty="0">
+                <a:ln>
+                  <a:noFill/>
+                </a:ln>
+                <a:solidFill>
+                  <a:srgbClr val="666600"/>
+                </a:solidFill>
+                <a:effectLst/>
+                <a:latin typeface="Courier New" panose="02070309020205020404" pitchFamily="49" charset="0"/>
+                <a:cs typeface="Courier New" panose="02070309020205020404" pitchFamily="49" charset="0"/>
+              </a:rPr>
+              <a:t>=</a:t>
+            </a:r>
+            <a:r>
+              <a:rPr kumimoji="0" lang="es-MX" altLang="es-MX" sz="1200" i="0" u="none" strike="noStrike" cap="none" normalizeH="0" baseline="0" dirty="0">
+                <a:ln>
+                  <a:noFill/>
+                </a:ln>
+                <a:solidFill>
+                  <a:srgbClr val="000000"/>
+                </a:solidFill>
+                <a:effectLst/>
+                <a:latin typeface="Courier New" panose="02070309020205020404" pitchFamily="49" charset="0"/>
+                <a:cs typeface="Courier New" panose="02070309020205020404" pitchFamily="49" charset="0"/>
+              </a:rPr>
+              <a:t> precio </a:t>
+            </a:r>
+          </a:p>
+          <a:p>
+            <a:pPr marL="0" marR="0" lvl="0" indent="0" algn="l" defTabSz="914400" rtl="0" eaLnBrk="0" fontAlgn="base" latinLnBrk="0" hangingPunct="0">
+              <a:lnSpc>
+                <a:spcPct val="100000"/>
+              </a:lnSpc>
+              <a:spcBef>
+                <a:spcPct val="0"/>
+              </a:spcBef>
+              <a:spcAft>
+                <a:spcPct val="0"/>
+              </a:spcAft>
+              <a:buClrTx/>
+              <a:buSzTx/>
+              <a:buFontTx/>
+              <a:buNone/>
+              <a:tabLst/>
+            </a:pPr>
+            <a:r>
+              <a:rPr lang="es-MX" altLang="es-MX" sz="1200" dirty="0">
+                <a:solidFill>
+                  <a:srgbClr val="000000"/>
+                </a:solidFill>
+                <a:latin typeface="Courier New" panose="02070309020205020404" pitchFamily="49" charset="0"/>
+                <a:cs typeface="Courier New" panose="02070309020205020404" pitchFamily="49" charset="0"/>
+              </a:rPr>
+              <a:t>      </a:t>
+            </a:r>
+          </a:p>
+          <a:p>
+            <a:pPr marL="0" marR="0" lvl="0" indent="0" algn="l" defTabSz="914400" rtl="0" eaLnBrk="0" fontAlgn="base" latinLnBrk="0" hangingPunct="0">
+              <a:lnSpc>
+                <a:spcPct val="100000"/>
+              </a:lnSpc>
+              <a:spcBef>
+                <a:spcPct val="0"/>
+              </a:spcBef>
+              <a:spcAft>
+                <a:spcPct val="0"/>
+              </a:spcAft>
+              <a:buClrTx/>
+              <a:buSzTx/>
+              <a:buFontTx/>
+              <a:buNone/>
+              <a:tabLst/>
+            </a:pPr>
+            <a:r>
+              <a:rPr kumimoji="0" lang="es-MX" altLang="es-MX" sz="1200" i="0" u="none" strike="noStrike" cap="none" normalizeH="0" baseline="0" dirty="0">
+                <a:ln>
+                  <a:noFill/>
+                </a:ln>
+                <a:solidFill>
+                  <a:srgbClr val="000000"/>
+                </a:solidFill>
+                <a:effectLst/>
+                <a:latin typeface="Courier New" panose="02070309020205020404" pitchFamily="49" charset="0"/>
+                <a:cs typeface="Courier New" panose="02070309020205020404" pitchFamily="49" charset="0"/>
+              </a:rPr>
+              <a:t>      </a:t>
+            </a:r>
+            <a:r>
+              <a:rPr kumimoji="0" lang="es-MX" altLang="es-MX" sz="1200" i="0" u="none" strike="noStrike" cap="none" normalizeH="0" baseline="0" dirty="0">
+                <a:ln>
+                  <a:noFill/>
+                </a:ln>
+                <a:solidFill>
+                  <a:srgbClr val="000088"/>
+                </a:solidFill>
+                <a:effectLst/>
+                <a:latin typeface="Courier New" panose="02070309020205020404" pitchFamily="49" charset="0"/>
+                <a:cs typeface="Courier New" panose="02070309020205020404" pitchFamily="49" charset="0"/>
+              </a:rPr>
+              <a:t>def</a:t>
+            </a:r>
+            <a:r>
+              <a:rPr kumimoji="0" lang="es-MX" altLang="es-MX" sz="1200" i="0" u="none" strike="noStrike" cap="none" normalizeH="0" baseline="0" dirty="0">
+                <a:ln>
+                  <a:noFill/>
+                </a:ln>
+                <a:solidFill>
+                  <a:srgbClr val="000000"/>
+                </a:solidFill>
+                <a:effectLst/>
+                <a:latin typeface="Courier New" panose="02070309020205020404" pitchFamily="49" charset="0"/>
+                <a:cs typeface="Courier New" panose="02070309020205020404" pitchFamily="49" charset="0"/>
+              </a:rPr>
+              <a:t> a_pagar</a:t>
+            </a:r>
+            <a:r>
+              <a:rPr kumimoji="0" lang="es-MX" altLang="es-MX" sz="1200" i="0" u="none" strike="noStrike" cap="none" normalizeH="0" baseline="0" dirty="0">
+                <a:ln>
+                  <a:noFill/>
+                </a:ln>
+                <a:solidFill>
+                  <a:srgbClr val="666600"/>
+                </a:solidFill>
+                <a:effectLst/>
+                <a:latin typeface="Courier New" panose="02070309020205020404" pitchFamily="49" charset="0"/>
+                <a:cs typeface="Courier New" panose="02070309020205020404" pitchFamily="49" charset="0"/>
+              </a:rPr>
+              <a:t>(</a:t>
+            </a:r>
+            <a:r>
+              <a:rPr kumimoji="0" lang="es-MX" altLang="es-MX" sz="1200" i="0" u="none" strike="noStrike" cap="none" normalizeH="0" baseline="0" dirty="0">
+                <a:ln>
+                  <a:noFill/>
+                </a:ln>
+                <a:solidFill>
+                  <a:srgbClr val="000088"/>
+                </a:solidFill>
+                <a:effectLst/>
+                <a:latin typeface="Courier New" panose="02070309020205020404" pitchFamily="49" charset="0"/>
+                <a:cs typeface="Courier New" panose="02070309020205020404" pitchFamily="49" charset="0"/>
+              </a:rPr>
+              <a:t>self</a:t>
+            </a:r>
+            <a:r>
+              <a:rPr kumimoji="0" lang="es-MX" altLang="es-MX" sz="1200" i="0" u="none" strike="noStrike" cap="none" normalizeH="0" baseline="0" dirty="0">
+                <a:ln>
+                  <a:noFill/>
+                </a:ln>
+                <a:solidFill>
+                  <a:srgbClr val="666600"/>
+                </a:solidFill>
+                <a:effectLst/>
+                <a:latin typeface="Courier New" panose="02070309020205020404" pitchFamily="49" charset="0"/>
+                <a:cs typeface="Courier New" panose="02070309020205020404" pitchFamily="49" charset="0"/>
+              </a:rPr>
+              <a:t>):</a:t>
+            </a:r>
+          </a:p>
+          <a:p>
+            <a:pPr marL="0" marR="0" lvl="0" indent="0" algn="l" defTabSz="914400" rtl="0" eaLnBrk="0" fontAlgn="base" latinLnBrk="0" hangingPunct="0">
+              <a:lnSpc>
+                <a:spcPct val="100000"/>
+              </a:lnSpc>
+              <a:spcBef>
+                <a:spcPct val="0"/>
+              </a:spcBef>
+              <a:spcAft>
+                <a:spcPct val="0"/>
+              </a:spcAft>
+              <a:buClrTx/>
+              <a:buSzTx/>
+              <a:buFontTx/>
+              <a:buNone/>
+              <a:tabLst/>
+            </a:pPr>
+            <a:r>
+              <a:rPr lang="es-MX" altLang="es-MX" sz="1200" dirty="0">
+                <a:solidFill>
+                  <a:srgbClr val="666600"/>
+                </a:solidFill>
+                <a:latin typeface="Courier New" panose="02070309020205020404" pitchFamily="49" charset="0"/>
+                <a:cs typeface="Courier New" panose="02070309020205020404" pitchFamily="49" charset="0"/>
+              </a:rPr>
+              <a:t>           </a:t>
+            </a:r>
+            <a:r>
+              <a:rPr kumimoji="0" lang="es-MX" altLang="es-MX" sz="1200" i="0" u="none" strike="noStrike" cap="none" normalizeH="0" baseline="0" dirty="0">
+                <a:ln>
+                  <a:noFill/>
+                </a:ln>
+                <a:solidFill>
+                  <a:srgbClr val="000000"/>
+                </a:solidFill>
+                <a:effectLst/>
+                <a:latin typeface="Courier New" panose="02070309020205020404" pitchFamily="49" charset="0"/>
+                <a:cs typeface="Courier New" panose="02070309020205020404" pitchFamily="49" charset="0"/>
+              </a:rPr>
+              <a:t> total </a:t>
+            </a:r>
+            <a:r>
+              <a:rPr kumimoji="0" lang="es-MX" altLang="es-MX" sz="1200" i="0" u="none" strike="noStrike" cap="none" normalizeH="0" baseline="0" dirty="0">
+                <a:ln>
+                  <a:noFill/>
+                </a:ln>
+                <a:solidFill>
+                  <a:srgbClr val="666600"/>
+                </a:solidFill>
+                <a:effectLst/>
+                <a:latin typeface="Courier New" panose="02070309020205020404" pitchFamily="49" charset="0"/>
+                <a:cs typeface="Courier New" panose="02070309020205020404" pitchFamily="49" charset="0"/>
+              </a:rPr>
+              <a:t>=</a:t>
+            </a:r>
+            <a:r>
+              <a:rPr kumimoji="0" lang="es-MX" altLang="es-MX" sz="1200" i="0" u="none" strike="noStrike" cap="none" normalizeH="0" baseline="0" dirty="0">
+                <a:ln>
+                  <a:noFill/>
+                </a:ln>
+                <a:solidFill>
+                  <a:srgbClr val="000000"/>
+                </a:solidFill>
+                <a:effectLst/>
+                <a:latin typeface="Courier New" panose="02070309020205020404" pitchFamily="49" charset="0"/>
+                <a:cs typeface="Courier New" panose="02070309020205020404" pitchFamily="49" charset="0"/>
+              </a:rPr>
+              <a:t> </a:t>
+            </a:r>
+            <a:r>
+              <a:rPr kumimoji="0" lang="es-MX" altLang="es-MX" sz="1200" i="0" u="none" strike="noStrike" cap="none" normalizeH="0" baseline="0" dirty="0">
+                <a:ln>
+                  <a:noFill/>
+                </a:ln>
+                <a:solidFill>
+                  <a:srgbClr val="000088"/>
+                </a:solidFill>
+                <a:effectLst/>
+                <a:latin typeface="Courier New" panose="02070309020205020404" pitchFamily="49" charset="0"/>
+                <a:cs typeface="Courier New" panose="02070309020205020404" pitchFamily="49" charset="0"/>
+              </a:rPr>
+              <a:t>self</a:t>
+            </a:r>
+            <a:r>
+              <a:rPr kumimoji="0" lang="es-MX" altLang="es-MX" sz="1200" i="0" u="none" strike="noStrike" cap="none" normalizeH="0" baseline="0" dirty="0">
+                <a:ln>
+                  <a:noFill/>
+                </a:ln>
+                <a:solidFill>
+                  <a:srgbClr val="666600"/>
+                </a:solidFill>
+                <a:effectLst/>
+                <a:latin typeface="Courier New" panose="02070309020205020404" pitchFamily="49" charset="0"/>
+                <a:cs typeface="Courier New" panose="02070309020205020404" pitchFamily="49" charset="0"/>
+              </a:rPr>
+              <a:t>.</a:t>
+            </a:r>
+            <a:r>
+              <a:rPr kumimoji="0" lang="es-MX" altLang="es-MX" sz="1200" i="0" u="none" strike="noStrike" cap="none" normalizeH="0" baseline="0" dirty="0">
+                <a:ln>
+                  <a:noFill/>
+                </a:ln>
+                <a:solidFill>
+                  <a:srgbClr val="000000"/>
+                </a:solidFill>
+                <a:effectLst/>
+                <a:latin typeface="Courier New" panose="02070309020205020404" pitchFamily="49" charset="0"/>
+                <a:cs typeface="Courier New" panose="02070309020205020404" pitchFamily="49" charset="0"/>
+              </a:rPr>
+              <a:t>unidad </a:t>
+            </a:r>
+            <a:r>
+              <a:rPr kumimoji="0" lang="es-MX" altLang="es-MX" sz="1200" i="0" u="none" strike="noStrike" cap="none" normalizeH="0" baseline="0" dirty="0">
+                <a:ln>
+                  <a:noFill/>
+                </a:ln>
+                <a:solidFill>
+                  <a:srgbClr val="666600"/>
+                </a:solidFill>
+                <a:effectLst/>
+                <a:latin typeface="Courier New" panose="02070309020205020404" pitchFamily="49" charset="0"/>
+                <a:cs typeface="Courier New" panose="02070309020205020404" pitchFamily="49" charset="0"/>
+              </a:rPr>
+              <a:t>*</a:t>
+            </a:r>
+            <a:r>
+              <a:rPr kumimoji="0" lang="es-MX" altLang="es-MX" sz="1200" i="0" u="none" strike="noStrike" cap="none" normalizeH="0" baseline="0" dirty="0">
+                <a:ln>
+                  <a:noFill/>
+                </a:ln>
+                <a:solidFill>
+                  <a:srgbClr val="000000"/>
+                </a:solidFill>
+                <a:effectLst/>
+                <a:latin typeface="Courier New" panose="02070309020205020404" pitchFamily="49" charset="0"/>
+                <a:cs typeface="Courier New" panose="02070309020205020404" pitchFamily="49" charset="0"/>
+              </a:rPr>
+              <a:t> </a:t>
+            </a:r>
+            <a:r>
+              <a:rPr kumimoji="0" lang="es-MX" altLang="es-MX" sz="1200" i="0" u="none" strike="noStrike" cap="none" normalizeH="0" baseline="0" dirty="0">
+                <a:ln>
+                  <a:noFill/>
+                </a:ln>
+                <a:solidFill>
+                  <a:srgbClr val="000088"/>
+                </a:solidFill>
+                <a:effectLst/>
+                <a:latin typeface="Courier New" panose="02070309020205020404" pitchFamily="49" charset="0"/>
+                <a:cs typeface="Courier New" panose="02070309020205020404" pitchFamily="49" charset="0"/>
+              </a:rPr>
+              <a:t>self</a:t>
+            </a:r>
+            <a:r>
+              <a:rPr kumimoji="0" lang="es-MX" altLang="es-MX" sz="1200" i="0" u="none" strike="noStrike" cap="none" normalizeH="0" baseline="0" dirty="0">
+                <a:ln>
+                  <a:noFill/>
+                </a:ln>
+                <a:solidFill>
+                  <a:srgbClr val="666600"/>
+                </a:solidFill>
+                <a:effectLst/>
+                <a:latin typeface="Courier New" panose="02070309020205020404" pitchFamily="49" charset="0"/>
+                <a:cs typeface="Courier New" panose="02070309020205020404" pitchFamily="49" charset="0"/>
+              </a:rPr>
+              <a:t>.</a:t>
+            </a:r>
+            <a:r>
+              <a:rPr kumimoji="0" lang="es-MX" altLang="es-MX" sz="1200" i="0" u="none" strike="noStrike" cap="none" normalizeH="0" baseline="0" dirty="0">
+                <a:ln>
+                  <a:noFill/>
+                </a:ln>
+                <a:solidFill>
+                  <a:srgbClr val="000000"/>
+                </a:solidFill>
+                <a:effectLst/>
+                <a:latin typeface="Courier New" panose="02070309020205020404" pitchFamily="49" charset="0"/>
+                <a:cs typeface="Courier New" panose="02070309020205020404" pitchFamily="49" charset="0"/>
+              </a:rPr>
+              <a:t>precio </a:t>
+            </a:r>
+          </a:p>
+          <a:p>
+            <a:pPr marL="0" marR="0" lvl="0" indent="0" algn="l" defTabSz="914400" rtl="0" eaLnBrk="0" fontAlgn="base" latinLnBrk="0" hangingPunct="0">
+              <a:lnSpc>
+                <a:spcPct val="100000"/>
+              </a:lnSpc>
+              <a:spcBef>
+                <a:spcPct val="0"/>
+              </a:spcBef>
+              <a:spcAft>
+                <a:spcPct val="0"/>
+              </a:spcAft>
+              <a:buClrTx/>
+              <a:buSzTx/>
+              <a:buFontTx/>
+              <a:buNone/>
+              <a:tabLst/>
+            </a:pPr>
+            <a:r>
+              <a:rPr lang="es-MX" altLang="es-MX" sz="1200" dirty="0">
+                <a:solidFill>
+                  <a:srgbClr val="000000"/>
+                </a:solidFill>
+                <a:latin typeface="Courier New" panose="02070309020205020404" pitchFamily="49" charset="0"/>
+                <a:cs typeface="Courier New" panose="02070309020205020404" pitchFamily="49" charset="0"/>
+              </a:rPr>
+              <a:t>            </a:t>
+            </a:r>
+            <a:r>
+              <a:rPr kumimoji="0" lang="es-MX" altLang="es-MX" sz="1200" i="0" u="none" strike="noStrike" cap="none" normalizeH="0" baseline="0" dirty="0">
+                <a:ln>
+                  <a:noFill/>
+                </a:ln>
+                <a:solidFill>
+                  <a:srgbClr val="000000"/>
+                </a:solidFill>
+                <a:effectLst/>
+                <a:latin typeface="Courier New" panose="02070309020205020404" pitchFamily="49" charset="0"/>
+                <a:cs typeface="Courier New" panose="02070309020205020404" pitchFamily="49" charset="0"/>
+              </a:rPr>
+              <a:t>impuesto </a:t>
+            </a:r>
+            <a:r>
+              <a:rPr kumimoji="0" lang="es-MX" altLang="es-MX" sz="1200" i="0" u="none" strike="noStrike" cap="none" normalizeH="0" baseline="0" dirty="0">
+                <a:ln>
+                  <a:noFill/>
+                </a:ln>
+                <a:solidFill>
+                  <a:srgbClr val="666600"/>
+                </a:solidFill>
+                <a:effectLst/>
+                <a:latin typeface="Courier New" panose="02070309020205020404" pitchFamily="49" charset="0"/>
+                <a:cs typeface="Courier New" panose="02070309020205020404" pitchFamily="49" charset="0"/>
+              </a:rPr>
+              <a:t>=</a:t>
+            </a:r>
+            <a:r>
+              <a:rPr kumimoji="0" lang="es-MX" altLang="es-MX" sz="1200" i="0" u="none" strike="noStrike" cap="none" normalizeH="0" baseline="0" dirty="0">
+                <a:ln>
+                  <a:noFill/>
+                </a:ln>
+                <a:solidFill>
+                  <a:srgbClr val="000000"/>
+                </a:solidFill>
+                <a:effectLst/>
+                <a:latin typeface="Courier New" panose="02070309020205020404" pitchFamily="49" charset="0"/>
+                <a:cs typeface="Courier New" panose="02070309020205020404" pitchFamily="49" charset="0"/>
+              </a:rPr>
+              <a:t> total </a:t>
+            </a:r>
+            <a:r>
+              <a:rPr kumimoji="0" lang="es-MX" altLang="es-MX" sz="1200" i="0" u="none" strike="noStrike" cap="none" normalizeH="0" baseline="0" dirty="0">
+                <a:ln>
+                  <a:noFill/>
+                </a:ln>
+                <a:solidFill>
+                  <a:srgbClr val="666600"/>
+                </a:solidFill>
+                <a:effectLst/>
+                <a:latin typeface="Courier New" panose="02070309020205020404" pitchFamily="49" charset="0"/>
+                <a:cs typeface="Courier New" panose="02070309020205020404" pitchFamily="49" charset="0"/>
+              </a:rPr>
+              <a:t>*</a:t>
+            </a:r>
+            <a:r>
+              <a:rPr kumimoji="0" lang="es-MX" altLang="es-MX" sz="1200" i="0" u="none" strike="noStrike" cap="none" normalizeH="0" baseline="0" dirty="0">
+                <a:ln>
+                  <a:noFill/>
+                </a:ln>
+                <a:solidFill>
+                  <a:srgbClr val="000000"/>
+                </a:solidFill>
+                <a:effectLst/>
+                <a:latin typeface="Courier New" panose="02070309020205020404" pitchFamily="49" charset="0"/>
+                <a:cs typeface="Courier New" panose="02070309020205020404" pitchFamily="49" charset="0"/>
+              </a:rPr>
+              <a:t> </a:t>
+            </a:r>
+            <a:r>
+              <a:rPr kumimoji="0" lang="es-MX" altLang="es-MX" sz="1200" i="0" u="none" strike="noStrike" cap="none" normalizeH="0" baseline="0" dirty="0">
+                <a:ln>
+                  <a:noFill/>
+                </a:ln>
+                <a:solidFill>
+                  <a:srgbClr val="660066"/>
+                </a:solidFill>
+                <a:effectLst/>
+                <a:latin typeface="Courier New" panose="02070309020205020404" pitchFamily="49" charset="0"/>
+                <a:cs typeface="Courier New" panose="02070309020205020404" pitchFamily="49" charset="0"/>
+              </a:rPr>
+              <a:t>Factura</a:t>
+            </a:r>
+            <a:r>
+              <a:rPr kumimoji="0" lang="es-MX" altLang="es-MX" sz="1200" i="0" u="none" strike="noStrike" cap="none" normalizeH="0" baseline="0" dirty="0">
+                <a:ln>
+                  <a:noFill/>
+                </a:ln>
+                <a:solidFill>
+                  <a:srgbClr val="666600"/>
+                </a:solidFill>
+                <a:effectLst/>
+                <a:latin typeface="Courier New" panose="02070309020205020404" pitchFamily="49" charset="0"/>
+                <a:cs typeface="Courier New" panose="02070309020205020404" pitchFamily="49" charset="0"/>
+              </a:rPr>
+              <a:t>.</a:t>
+            </a:r>
+            <a:r>
+              <a:rPr kumimoji="0" lang="es-MX" altLang="es-MX" sz="1200" i="0" u="none" strike="noStrike" cap="none" normalizeH="0" baseline="0" dirty="0">
+                <a:ln>
+                  <a:noFill/>
+                </a:ln>
+                <a:solidFill>
+                  <a:srgbClr val="000000"/>
+                </a:solidFill>
+                <a:effectLst/>
+                <a:latin typeface="Courier New" panose="02070309020205020404" pitchFamily="49" charset="0"/>
+                <a:cs typeface="Courier New" panose="02070309020205020404" pitchFamily="49" charset="0"/>
+              </a:rPr>
+              <a:t>__tasa </a:t>
+            </a:r>
+            <a:r>
+              <a:rPr kumimoji="0" lang="es-MX" altLang="es-MX" sz="1200" i="0" u="none" strike="noStrike" cap="none" normalizeH="0" baseline="0" dirty="0">
+                <a:ln>
+                  <a:noFill/>
+                </a:ln>
+                <a:solidFill>
+                  <a:srgbClr val="666600"/>
+                </a:solidFill>
+                <a:effectLst/>
+                <a:latin typeface="Courier New" panose="02070309020205020404" pitchFamily="49" charset="0"/>
+                <a:cs typeface="Courier New" panose="02070309020205020404" pitchFamily="49" charset="0"/>
+              </a:rPr>
+              <a:t>/</a:t>
+            </a:r>
+            <a:r>
+              <a:rPr kumimoji="0" lang="es-MX" altLang="es-MX" sz="1200" i="0" u="none" strike="noStrike" cap="none" normalizeH="0" baseline="0" dirty="0">
+                <a:ln>
+                  <a:noFill/>
+                </a:ln>
+                <a:solidFill>
+                  <a:srgbClr val="000000"/>
+                </a:solidFill>
+                <a:effectLst/>
+                <a:latin typeface="Courier New" panose="02070309020205020404" pitchFamily="49" charset="0"/>
+                <a:cs typeface="Courier New" panose="02070309020205020404" pitchFamily="49" charset="0"/>
+              </a:rPr>
+              <a:t> </a:t>
+            </a:r>
+            <a:r>
+              <a:rPr kumimoji="0" lang="es-MX" altLang="es-MX" sz="1200" i="0" u="none" strike="noStrike" cap="none" normalizeH="0" baseline="0" dirty="0">
+                <a:ln>
+                  <a:noFill/>
+                </a:ln>
+                <a:solidFill>
+                  <a:srgbClr val="006666"/>
+                </a:solidFill>
+                <a:effectLst/>
+                <a:latin typeface="Courier New" panose="02070309020205020404" pitchFamily="49" charset="0"/>
+                <a:cs typeface="Courier New" panose="02070309020205020404" pitchFamily="49" charset="0"/>
+              </a:rPr>
+              <a:t>100</a:t>
+            </a:r>
+          </a:p>
+          <a:p>
+            <a:pPr marL="0" marR="0" lvl="0" indent="0" algn="l" defTabSz="914400" rtl="0" eaLnBrk="0" fontAlgn="base" latinLnBrk="0" hangingPunct="0">
+              <a:lnSpc>
+                <a:spcPct val="100000"/>
+              </a:lnSpc>
+              <a:spcBef>
+                <a:spcPct val="0"/>
+              </a:spcBef>
+              <a:spcAft>
+                <a:spcPct val="0"/>
+              </a:spcAft>
+              <a:buClrTx/>
+              <a:buSzTx/>
+              <a:buFontTx/>
+              <a:buNone/>
+              <a:tabLst/>
+            </a:pPr>
+            <a:r>
+              <a:rPr lang="es-MX" altLang="es-MX" sz="1200" dirty="0">
+                <a:solidFill>
+                  <a:srgbClr val="006666"/>
+                </a:solidFill>
+                <a:latin typeface="Courier New" panose="02070309020205020404" pitchFamily="49" charset="0"/>
+                <a:cs typeface="Courier New" panose="02070309020205020404" pitchFamily="49" charset="0"/>
+              </a:rPr>
+              <a:t>           </a:t>
+            </a:r>
+            <a:r>
+              <a:rPr kumimoji="0" lang="es-MX" altLang="es-MX" sz="1200" i="0" u="none" strike="noStrike" cap="none" normalizeH="0" baseline="0" dirty="0">
+                <a:ln>
+                  <a:noFill/>
+                </a:ln>
+                <a:solidFill>
+                  <a:srgbClr val="000000"/>
+                </a:solidFill>
+                <a:effectLst/>
+                <a:latin typeface="Courier New" panose="02070309020205020404" pitchFamily="49" charset="0"/>
+                <a:cs typeface="Courier New" panose="02070309020205020404" pitchFamily="49" charset="0"/>
+              </a:rPr>
+              <a:t> </a:t>
+            </a:r>
+            <a:r>
+              <a:rPr kumimoji="0" lang="es-MX" altLang="es-MX" sz="1200" i="0" u="none" strike="noStrike" cap="none" normalizeH="0" baseline="0" dirty="0">
+                <a:ln>
+                  <a:noFill/>
+                </a:ln>
+                <a:solidFill>
+                  <a:srgbClr val="000088"/>
+                </a:solidFill>
+                <a:effectLst/>
+                <a:latin typeface="Courier New" panose="02070309020205020404" pitchFamily="49" charset="0"/>
+                <a:cs typeface="Courier New" panose="02070309020205020404" pitchFamily="49" charset="0"/>
+              </a:rPr>
+              <a:t>return</a:t>
+            </a:r>
+            <a:r>
+              <a:rPr kumimoji="0" lang="es-MX" altLang="es-MX" sz="1200" i="0" u="none" strike="noStrike" cap="none" normalizeH="0" baseline="0" dirty="0">
+                <a:ln>
+                  <a:noFill/>
+                </a:ln>
+                <a:solidFill>
+                  <a:srgbClr val="666600"/>
+                </a:solidFill>
+                <a:effectLst/>
+                <a:latin typeface="Courier New" panose="02070309020205020404" pitchFamily="49" charset="0"/>
+                <a:cs typeface="Courier New" panose="02070309020205020404" pitchFamily="49" charset="0"/>
+              </a:rPr>
+              <a:t>(</a:t>
+            </a:r>
+            <a:r>
+              <a:rPr kumimoji="0" lang="es-MX" altLang="es-MX" sz="1200" i="0" u="none" strike="noStrike" cap="none" normalizeH="0" baseline="0" dirty="0">
+                <a:ln>
+                  <a:noFill/>
+                </a:ln>
+                <a:solidFill>
+                  <a:srgbClr val="000000"/>
+                </a:solidFill>
+                <a:effectLst/>
+                <a:latin typeface="Courier New" panose="02070309020205020404" pitchFamily="49" charset="0"/>
+                <a:cs typeface="Courier New" panose="02070309020205020404" pitchFamily="49" charset="0"/>
+              </a:rPr>
+              <a:t>total </a:t>
+            </a:r>
+            <a:r>
+              <a:rPr kumimoji="0" lang="es-MX" altLang="es-MX" sz="1200" i="0" u="none" strike="noStrike" cap="none" normalizeH="0" baseline="0" dirty="0">
+                <a:ln>
+                  <a:noFill/>
+                </a:ln>
+                <a:solidFill>
+                  <a:srgbClr val="666600"/>
+                </a:solidFill>
+                <a:effectLst/>
+                <a:latin typeface="Courier New" panose="02070309020205020404" pitchFamily="49" charset="0"/>
+                <a:cs typeface="Courier New" panose="02070309020205020404" pitchFamily="49" charset="0"/>
+              </a:rPr>
+              <a:t>+</a:t>
+            </a:r>
+            <a:r>
+              <a:rPr kumimoji="0" lang="es-MX" altLang="es-MX" sz="1200" i="0" u="none" strike="noStrike" cap="none" normalizeH="0" baseline="0" dirty="0">
+                <a:ln>
+                  <a:noFill/>
+                </a:ln>
+                <a:solidFill>
+                  <a:srgbClr val="000000"/>
+                </a:solidFill>
+                <a:effectLst/>
+                <a:latin typeface="Courier New" panose="02070309020205020404" pitchFamily="49" charset="0"/>
+                <a:cs typeface="Courier New" panose="02070309020205020404" pitchFamily="49" charset="0"/>
+              </a:rPr>
+              <a:t> impuesto</a:t>
+            </a:r>
+            <a:r>
+              <a:rPr kumimoji="0" lang="es-MX" altLang="es-MX" sz="1200" i="0" u="none" strike="noStrike" cap="none" normalizeH="0" baseline="0" dirty="0">
+                <a:ln>
+                  <a:noFill/>
+                </a:ln>
+                <a:solidFill>
+                  <a:srgbClr val="666600"/>
+                </a:solidFill>
+                <a:effectLst/>
+                <a:latin typeface="Courier New" panose="02070309020205020404" pitchFamily="49" charset="0"/>
+                <a:cs typeface="Courier New" panose="02070309020205020404" pitchFamily="49" charset="0"/>
+              </a:rPr>
+              <a:t>)</a:t>
+            </a:r>
+            <a:r>
+              <a:rPr kumimoji="0" lang="es-MX" altLang="es-MX" sz="1200" i="0" u="none" strike="noStrike" cap="none" normalizeH="0" baseline="0" dirty="0">
+                <a:ln>
+                  <a:noFill/>
+                </a:ln>
+                <a:solidFill>
+                  <a:srgbClr val="000000"/>
+                </a:solidFill>
+                <a:effectLst/>
+                <a:latin typeface="Courier New" panose="02070309020205020404" pitchFamily="49" charset="0"/>
+                <a:cs typeface="Courier New" panose="02070309020205020404" pitchFamily="49" charset="0"/>
+              </a:rPr>
+              <a:t> </a:t>
+            </a:r>
+          </a:p>
+          <a:p>
+            <a:pPr marL="0" marR="0" lvl="0" indent="0" algn="l" defTabSz="914400" rtl="0" eaLnBrk="0" fontAlgn="base" latinLnBrk="0" hangingPunct="0">
+              <a:lnSpc>
+                <a:spcPct val="100000"/>
+              </a:lnSpc>
+              <a:spcBef>
+                <a:spcPct val="0"/>
+              </a:spcBef>
+              <a:spcAft>
+                <a:spcPct val="0"/>
+              </a:spcAft>
+              <a:buClrTx/>
+              <a:buSzTx/>
+              <a:buFontTx/>
+              <a:buNone/>
+              <a:tabLst/>
+            </a:pPr>
+            <a:endParaRPr lang="es-MX" altLang="es-MX" sz="1200" dirty="0">
+              <a:solidFill>
+                <a:srgbClr val="000000"/>
+              </a:solidFill>
+              <a:latin typeface="Courier New" panose="02070309020205020404" pitchFamily="49" charset="0"/>
+              <a:cs typeface="Courier New" panose="02070309020205020404" pitchFamily="49" charset="0"/>
+            </a:endParaRPr>
+          </a:p>
+          <a:p>
+            <a:pPr marL="0" marR="0" lvl="0" indent="0" algn="l" defTabSz="914400" rtl="0" eaLnBrk="0" fontAlgn="base" latinLnBrk="0" hangingPunct="0">
+              <a:lnSpc>
+                <a:spcPct val="100000"/>
+              </a:lnSpc>
+              <a:spcBef>
+                <a:spcPct val="0"/>
+              </a:spcBef>
+              <a:spcAft>
+                <a:spcPct val="0"/>
+              </a:spcAft>
+              <a:buClrTx/>
+              <a:buSzTx/>
+              <a:buFontTx/>
+              <a:buNone/>
+              <a:tabLst/>
+            </a:pPr>
+            <a:r>
+              <a:rPr kumimoji="0" lang="es-MX" altLang="es-MX" sz="1200" i="0" u="none" strike="noStrike" cap="none" normalizeH="0" baseline="0" dirty="0">
+                <a:ln>
+                  <a:noFill/>
+                </a:ln>
+                <a:solidFill>
+                  <a:srgbClr val="000000"/>
+                </a:solidFill>
+                <a:effectLst/>
+                <a:latin typeface="Courier New" panose="02070309020205020404" pitchFamily="49" charset="0"/>
+                <a:cs typeface="Courier New" panose="02070309020205020404" pitchFamily="49" charset="0"/>
+              </a:rPr>
+              <a:t>compra1 </a:t>
+            </a:r>
+            <a:r>
+              <a:rPr kumimoji="0" lang="es-MX" altLang="es-MX" sz="1200" i="0" u="none" strike="noStrike" cap="none" normalizeH="0" baseline="0" dirty="0">
+                <a:ln>
+                  <a:noFill/>
+                </a:ln>
+                <a:solidFill>
+                  <a:srgbClr val="666600"/>
+                </a:solidFill>
+                <a:effectLst/>
+                <a:latin typeface="Courier New" panose="02070309020205020404" pitchFamily="49" charset="0"/>
+                <a:cs typeface="Courier New" panose="02070309020205020404" pitchFamily="49" charset="0"/>
+              </a:rPr>
+              <a:t>=</a:t>
+            </a:r>
+            <a:r>
+              <a:rPr kumimoji="0" lang="es-MX" altLang="es-MX" sz="1200" i="0" u="none" strike="noStrike" cap="none" normalizeH="0" baseline="0" dirty="0">
+                <a:ln>
+                  <a:noFill/>
+                </a:ln>
+                <a:solidFill>
+                  <a:srgbClr val="000000"/>
+                </a:solidFill>
+                <a:effectLst/>
+                <a:latin typeface="Courier New" panose="02070309020205020404" pitchFamily="49" charset="0"/>
+                <a:cs typeface="Courier New" panose="02070309020205020404" pitchFamily="49" charset="0"/>
+              </a:rPr>
+              <a:t> </a:t>
+            </a:r>
+            <a:r>
+              <a:rPr kumimoji="0" lang="es-MX" altLang="es-MX" sz="1200" i="0" u="none" strike="noStrike" cap="none" normalizeH="0" baseline="0" dirty="0">
+                <a:ln>
+                  <a:noFill/>
+                </a:ln>
+                <a:solidFill>
+                  <a:srgbClr val="660066"/>
+                </a:solidFill>
+                <a:effectLst/>
+                <a:latin typeface="Courier New" panose="02070309020205020404" pitchFamily="49" charset="0"/>
+                <a:cs typeface="Courier New" panose="02070309020205020404" pitchFamily="49" charset="0"/>
+              </a:rPr>
+              <a:t>Factura</a:t>
+            </a:r>
+            <a:r>
+              <a:rPr kumimoji="0" lang="es-MX" altLang="es-MX" sz="1200" i="0" u="none" strike="noStrike" cap="none" normalizeH="0" baseline="0" dirty="0">
+                <a:ln>
+                  <a:noFill/>
+                </a:ln>
+                <a:solidFill>
+                  <a:srgbClr val="666600"/>
+                </a:solidFill>
+                <a:effectLst/>
+                <a:latin typeface="Courier New" panose="02070309020205020404" pitchFamily="49" charset="0"/>
+                <a:cs typeface="Courier New" panose="02070309020205020404" pitchFamily="49" charset="0"/>
+              </a:rPr>
+              <a:t>(</a:t>
+            </a:r>
+            <a:r>
+              <a:rPr kumimoji="0" lang="es-MX" altLang="es-MX" sz="1200" i="0" u="none" strike="noStrike" cap="none" normalizeH="0" baseline="0" dirty="0">
+                <a:ln>
+                  <a:noFill/>
+                </a:ln>
+                <a:solidFill>
+                  <a:srgbClr val="006666"/>
+                </a:solidFill>
+                <a:effectLst/>
+                <a:latin typeface="Courier New" panose="02070309020205020404" pitchFamily="49" charset="0"/>
+                <a:cs typeface="Courier New" panose="02070309020205020404" pitchFamily="49" charset="0"/>
+              </a:rPr>
+              <a:t>12</a:t>
+            </a:r>
+            <a:r>
+              <a:rPr kumimoji="0" lang="es-MX" altLang="es-MX" sz="1200" i="0" u="none" strike="noStrike" cap="none" normalizeH="0" baseline="0" dirty="0">
+                <a:ln>
+                  <a:noFill/>
+                </a:ln>
+                <a:solidFill>
+                  <a:srgbClr val="666600"/>
+                </a:solidFill>
+                <a:effectLst/>
+                <a:latin typeface="Courier New" panose="02070309020205020404" pitchFamily="49" charset="0"/>
+                <a:cs typeface="Courier New" panose="02070309020205020404" pitchFamily="49" charset="0"/>
+              </a:rPr>
+              <a:t>,</a:t>
+            </a:r>
+            <a:r>
+              <a:rPr kumimoji="0" lang="es-MX" altLang="es-MX" sz="1200" i="0" u="none" strike="noStrike" cap="none" normalizeH="0" baseline="0" dirty="0">
+                <a:ln>
+                  <a:noFill/>
+                </a:ln>
+                <a:solidFill>
+                  <a:srgbClr val="000000"/>
+                </a:solidFill>
+                <a:effectLst/>
+                <a:latin typeface="Courier New" panose="02070309020205020404" pitchFamily="49" charset="0"/>
+                <a:cs typeface="Courier New" panose="02070309020205020404" pitchFamily="49" charset="0"/>
+              </a:rPr>
+              <a:t> </a:t>
+            </a:r>
+            <a:r>
+              <a:rPr kumimoji="0" lang="es-MX" altLang="es-MX" sz="1200" i="0" u="none" strike="noStrike" cap="none" normalizeH="0" baseline="0" dirty="0">
+                <a:ln>
+                  <a:noFill/>
+                </a:ln>
+                <a:solidFill>
+                  <a:srgbClr val="006666"/>
+                </a:solidFill>
+                <a:effectLst/>
+                <a:latin typeface="Courier New" panose="02070309020205020404" pitchFamily="49" charset="0"/>
+                <a:cs typeface="Courier New" panose="02070309020205020404" pitchFamily="49" charset="0"/>
+              </a:rPr>
+              <a:t>110</a:t>
+            </a:r>
+            <a:r>
+              <a:rPr kumimoji="0" lang="es-MX" altLang="es-MX" sz="1200" i="0" u="none" strike="noStrike" cap="none" normalizeH="0" baseline="0" dirty="0">
+                <a:ln>
+                  <a:noFill/>
+                </a:ln>
+                <a:solidFill>
+                  <a:srgbClr val="666600"/>
+                </a:solidFill>
+                <a:effectLst/>
+                <a:latin typeface="Courier New" panose="02070309020205020404" pitchFamily="49" charset="0"/>
+                <a:cs typeface="Courier New" panose="02070309020205020404" pitchFamily="49" charset="0"/>
+              </a:rPr>
+              <a:t>)</a:t>
+            </a:r>
+            <a:r>
+              <a:rPr kumimoji="0" lang="es-MX" altLang="es-MX" sz="1200" i="0" u="none" strike="noStrike" cap="none" normalizeH="0" baseline="0" dirty="0">
+                <a:ln>
+                  <a:noFill/>
+                </a:ln>
+                <a:solidFill>
+                  <a:srgbClr val="000000"/>
+                </a:solidFill>
+                <a:effectLst/>
+                <a:latin typeface="Courier New" panose="02070309020205020404" pitchFamily="49" charset="0"/>
+                <a:cs typeface="Courier New" panose="02070309020205020404" pitchFamily="49" charset="0"/>
+              </a:rPr>
+              <a:t> </a:t>
+            </a:r>
+          </a:p>
+          <a:p>
+            <a:pPr marL="0" marR="0" lvl="0" indent="0" algn="l" defTabSz="914400" rtl="0" eaLnBrk="0" fontAlgn="base" latinLnBrk="0" hangingPunct="0">
+              <a:lnSpc>
+                <a:spcPct val="100000"/>
+              </a:lnSpc>
+              <a:spcBef>
+                <a:spcPct val="0"/>
+              </a:spcBef>
+              <a:spcAft>
+                <a:spcPct val="0"/>
+              </a:spcAft>
+              <a:buClrTx/>
+              <a:buSzTx/>
+              <a:buFontTx/>
+              <a:buNone/>
+              <a:tabLst/>
+            </a:pPr>
+            <a:r>
+              <a:rPr kumimoji="0" lang="es-MX" altLang="es-MX" sz="1200" i="0" u="none" strike="noStrike" cap="none" normalizeH="0" baseline="0" dirty="0">
+                <a:ln>
+                  <a:noFill/>
+                </a:ln>
+                <a:solidFill>
+                  <a:srgbClr val="000088"/>
+                </a:solidFill>
+                <a:effectLst/>
+                <a:latin typeface="Courier New" panose="02070309020205020404" pitchFamily="49" charset="0"/>
+                <a:cs typeface="Courier New" panose="02070309020205020404" pitchFamily="49" charset="0"/>
+              </a:rPr>
+              <a:t>print</a:t>
+            </a:r>
+            <a:r>
+              <a:rPr kumimoji="0" lang="es-MX" altLang="es-MX" sz="1200" i="0" u="none" strike="noStrike" cap="none" normalizeH="0" baseline="0" dirty="0">
+                <a:ln>
+                  <a:noFill/>
+                </a:ln>
+                <a:solidFill>
+                  <a:srgbClr val="666600"/>
+                </a:solidFill>
+                <a:effectLst/>
+                <a:latin typeface="Courier New" panose="02070309020205020404" pitchFamily="49" charset="0"/>
+                <a:cs typeface="Courier New" panose="02070309020205020404" pitchFamily="49" charset="0"/>
+              </a:rPr>
+              <a:t>(</a:t>
+            </a:r>
+            <a:r>
+              <a:rPr kumimoji="0" lang="es-MX" altLang="es-MX" sz="1200" i="0" u="none" strike="noStrike" cap="none" normalizeH="0" baseline="0" dirty="0">
+                <a:ln>
+                  <a:noFill/>
+                </a:ln>
+                <a:solidFill>
+                  <a:srgbClr val="000000"/>
+                </a:solidFill>
+                <a:effectLst/>
+                <a:latin typeface="Courier New" panose="02070309020205020404" pitchFamily="49" charset="0"/>
+                <a:cs typeface="Courier New" panose="02070309020205020404" pitchFamily="49" charset="0"/>
+              </a:rPr>
+              <a:t>compra1</a:t>
+            </a:r>
+            <a:r>
+              <a:rPr kumimoji="0" lang="es-MX" altLang="es-MX" sz="1200" i="0" u="none" strike="noStrike" cap="none" normalizeH="0" baseline="0" dirty="0">
+                <a:ln>
+                  <a:noFill/>
+                </a:ln>
+                <a:solidFill>
+                  <a:srgbClr val="666600"/>
+                </a:solidFill>
+                <a:effectLst/>
+                <a:latin typeface="Courier New" panose="02070309020205020404" pitchFamily="49" charset="0"/>
+                <a:cs typeface="Courier New" panose="02070309020205020404" pitchFamily="49" charset="0"/>
+              </a:rPr>
+              <a:t>.</a:t>
+            </a:r>
+            <a:r>
+              <a:rPr kumimoji="0" lang="es-MX" altLang="es-MX" sz="1200" i="0" u="none" strike="noStrike" cap="none" normalizeH="0" baseline="0" dirty="0">
+                <a:ln>
+                  <a:noFill/>
+                </a:ln>
+                <a:solidFill>
+                  <a:srgbClr val="000000"/>
+                </a:solidFill>
+                <a:effectLst/>
+                <a:latin typeface="Courier New" panose="02070309020205020404" pitchFamily="49" charset="0"/>
+                <a:cs typeface="Courier New" panose="02070309020205020404" pitchFamily="49" charset="0"/>
+              </a:rPr>
+              <a:t>unidad</a:t>
+            </a:r>
+            <a:r>
+              <a:rPr kumimoji="0" lang="es-MX" altLang="es-MX" sz="1200" i="0" u="none" strike="noStrike" cap="none" normalizeH="0" baseline="0" dirty="0">
+                <a:ln>
+                  <a:noFill/>
+                </a:ln>
+                <a:solidFill>
+                  <a:srgbClr val="666600"/>
+                </a:solidFill>
+                <a:effectLst/>
+                <a:latin typeface="Courier New" panose="02070309020205020404" pitchFamily="49" charset="0"/>
+                <a:cs typeface="Courier New" panose="02070309020205020404" pitchFamily="49" charset="0"/>
+              </a:rPr>
+              <a:t>)</a:t>
+            </a:r>
+            <a:r>
+              <a:rPr kumimoji="0" lang="es-MX" altLang="es-MX" sz="1200" i="0" u="none" strike="noStrike" cap="none" normalizeH="0" baseline="0" dirty="0">
+                <a:ln>
+                  <a:noFill/>
+                </a:ln>
+                <a:solidFill>
+                  <a:srgbClr val="000000"/>
+                </a:solidFill>
+                <a:effectLst/>
+                <a:latin typeface="Courier New" panose="02070309020205020404" pitchFamily="49" charset="0"/>
+                <a:cs typeface="Courier New" panose="02070309020205020404" pitchFamily="49" charset="0"/>
+              </a:rPr>
+              <a:t> </a:t>
+            </a:r>
+          </a:p>
+          <a:p>
+            <a:pPr marL="0" marR="0" lvl="0" indent="0" algn="l" defTabSz="914400" rtl="0" eaLnBrk="0" fontAlgn="base" latinLnBrk="0" hangingPunct="0">
+              <a:lnSpc>
+                <a:spcPct val="100000"/>
+              </a:lnSpc>
+              <a:spcBef>
+                <a:spcPct val="0"/>
+              </a:spcBef>
+              <a:spcAft>
+                <a:spcPct val="0"/>
+              </a:spcAft>
+              <a:buClrTx/>
+              <a:buSzTx/>
+              <a:buFontTx/>
+              <a:buNone/>
+              <a:tabLst/>
+            </a:pPr>
+            <a:r>
+              <a:rPr kumimoji="0" lang="es-MX" altLang="es-MX" sz="1200" i="0" u="none" strike="noStrike" cap="none" normalizeH="0" baseline="0" dirty="0">
+                <a:ln>
+                  <a:noFill/>
+                </a:ln>
+                <a:solidFill>
+                  <a:srgbClr val="000088"/>
+                </a:solidFill>
+                <a:effectLst/>
+                <a:latin typeface="Courier New" panose="02070309020205020404" pitchFamily="49" charset="0"/>
+                <a:cs typeface="Courier New" panose="02070309020205020404" pitchFamily="49" charset="0"/>
+              </a:rPr>
+              <a:t>print</a:t>
+            </a:r>
+            <a:r>
+              <a:rPr kumimoji="0" lang="es-MX" altLang="es-MX" sz="1200" i="0" u="none" strike="noStrike" cap="none" normalizeH="0" baseline="0" dirty="0">
+                <a:ln>
+                  <a:noFill/>
+                </a:ln>
+                <a:solidFill>
+                  <a:srgbClr val="666600"/>
+                </a:solidFill>
+                <a:effectLst/>
+                <a:latin typeface="Courier New" panose="02070309020205020404" pitchFamily="49" charset="0"/>
+                <a:cs typeface="Courier New" panose="02070309020205020404" pitchFamily="49" charset="0"/>
+              </a:rPr>
+              <a:t>(</a:t>
+            </a:r>
+            <a:r>
+              <a:rPr kumimoji="0" lang="es-MX" altLang="es-MX" sz="1200" i="0" u="none" strike="noStrike" cap="none" normalizeH="0" baseline="0" dirty="0">
+                <a:ln>
+                  <a:noFill/>
+                </a:ln>
+                <a:solidFill>
+                  <a:srgbClr val="000000"/>
+                </a:solidFill>
+                <a:effectLst/>
+                <a:latin typeface="Courier New" panose="02070309020205020404" pitchFamily="49" charset="0"/>
+                <a:cs typeface="Courier New" panose="02070309020205020404" pitchFamily="49" charset="0"/>
+              </a:rPr>
+              <a:t>compra1</a:t>
+            </a:r>
+            <a:r>
+              <a:rPr kumimoji="0" lang="es-MX" altLang="es-MX" sz="1200" i="0" u="none" strike="noStrike" cap="none" normalizeH="0" baseline="0" dirty="0">
+                <a:ln>
+                  <a:noFill/>
+                </a:ln>
+                <a:solidFill>
+                  <a:srgbClr val="666600"/>
+                </a:solidFill>
+                <a:effectLst/>
+                <a:latin typeface="Courier New" panose="02070309020205020404" pitchFamily="49" charset="0"/>
+                <a:cs typeface="Courier New" panose="02070309020205020404" pitchFamily="49" charset="0"/>
+              </a:rPr>
+              <a:t>.</a:t>
+            </a:r>
+            <a:r>
+              <a:rPr kumimoji="0" lang="es-MX" altLang="es-MX" sz="1200" i="0" u="none" strike="noStrike" cap="none" normalizeH="0" baseline="0" dirty="0">
+                <a:ln>
+                  <a:noFill/>
+                </a:ln>
+                <a:solidFill>
+                  <a:srgbClr val="000000"/>
+                </a:solidFill>
+                <a:effectLst/>
+                <a:latin typeface="Courier New" panose="02070309020205020404" pitchFamily="49" charset="0"/>
+                <a:cs typeface="Courier New" panose="02070309020205020404" pitchFamily="49" charset="0"/>
+              </a:rPr>
+              <a:t>precio</a:t>
+            </a:r>
+            <a:r>
+              <a:rPr kumimoji="0" lang="es-MX" altLang="es-MX" sz="1200" i="0" u="none" strike="noStrike" cap="none" normalizeH="0" baseline="0" dirty="0">
+                <a:ln>
+                  <a:noFill/>
+                </a:ln>
+                <a:solidFill>
+                  <a:srgbClr val="666600"/>
+                </a:solidFill>
+                <a:effectLst/>
+                <a:latin typeface="Courier New" panose="02070309020205020404" pitchFamily="49" charset="0"/>
+                <a:cs typeface="Courier New" panose="02070309020205020404" pitchFamily="49" charset="0"/>
+              </a:rPr>
+              <a:t>)</a:t>
+            </a:r>
+            <a:r>
+              <a:rPr kumimoji="0" lang="es-MX" altLang="es-MX" sz="1200" i="0" u="none" strike="noStrike" cap="none" normalizeH="0" baseline="0" dirty="0">
+                <a:ln>
+                  <a:noFill/>
+                </a:ln>
+                <a:solidFill>
+                  <a:srgbClr val="000000"/>
+                </a:solidFill>
+                <a:effectLst/>
+                <a:latin typeface="Courier New" panose="02070309020205020404" pitchFamily="49" charset="0"/>
+                <a:cs typeface="Courier New" panose="02070309020205020404" pitchFamily="49" charset="0"/>
+              </a:rPr>
+              <a:t> </a:t>
+            </a:r>
+          </a:p>
+          <a:p>
+            <a:pPr marL="0" marR="0" lvl="0" indent="0" algn="l" defTabSz="914400" rtl="0" eaLnBrk="0" fontAlgn="base" latinLnBrk="0" hangingPunct="0">
+              <a:lnSpc>
+                <a:spcPct val="100000"/>
+              </a:lnSpc>
+              <a:spcBef>
+                <a:spcPct val="0"/>
+              </a:spcBef>
+              <a:spcAft>
+                <a:spcPct val="0"/>
+              </a:spcAft>
+              <a:buClrTx/>
+              <a:buSzTx/>
+              <a:buFontTx/>
+              <a:buNone/>
+              <a:tabLst/>
+            </a:pPr>
+            <a:r>
+              <a:rPr kumimoji="0" lang="es-MX" altLang="es-MX" sz="1200" i="0" u="none" strike="noStrike" cap="none" normalizeH="0" baseline="0" dirty="0">
+                <a:ln>
+                  <a:noFill/>
+                </a:ln>
+                <a:solidFill>
+                  <a:srgbClr val="000088"/>
+                </a:solidFill>
+                <a:effectLst/>
+                <a:latin typeface="Courier New" panose="02070309020205020404" pitchFamily="49" charset="0"/>
+                <a:cs typeface="Courier New" panose="02070309020205020404" pitchFamily="49" charset="0"/>
+              </a:rPr>
+              <a:t>print</a:t>
+            </a:r>
+            <a:r>
+              <a:rPr kumimoji="0" lang="es-MX" altLang="es-MX" sz="1200" i="0" u="none" strike="noStrike" cap="none" normalizeH="0" baseline="0" dirty="0">
+                <a:ln>
+                  <a:noFill/>
+                </a:ln>
+                <a:solidFill>
+                  <a:srgbClr val="666600"/>
+                </a:solidFill>
+                <a:effectLst/>
+                <a:latin typeface="Courier New" panose="02070309020205020404" pitchFamily="49" charset="0"/>
+                <a:cs typeface="Courier New" panose="02070309020205020404" pitchFamily="49" charset="0"/>
+              </a:rPr>
+              <a:t>(</a:t>
+            </a:r>
+            <a:r>
+              <a:rPr kumimoji="0" lang="es-MX" altLang="es-MX" sz="1200" i="0" u="none" strike="noStrike" cap="none" normalizeH="0" baseline="0" dirty="0">
+                <a:ln>
+                  <a:noFill/>
+                </a:ln>
+                <a:solidFill>
+                  <a:srgbClr val="000000"/>
+                </a:solidFill>
+                <a:effectLst/>
+                <a:latin typeface="Courier New" panose="02070309020205020404" pitchFamily="49" charset="0"/>
+                <a:cs typeface="Courier New" panose="02070309020205020404" pitchFamily="49" charset="0"/>
+              </a:rPr>
+              <a:t>compra1</a:t>
+            </a:r>
+            <a:r>
+              <a:rPr kumimoji="0" lang="es-MX" altLang="es-MX" sz="1200" i="0" u="none" strike="noStrike" cap="none" normalizeH="0" baseline="0" dirty="0">
+                <a:ln>
+                  <a:noFill/>
+                </a:ln>
+                <a:solidFill>
+                  <a:srgbClr val="666600"/>
+                </a:solidFill>
+                <a:effectLst/>
+                <a:latin typeface="Courier New" panose="02070309020205020404" pitchFamily="49" charset="0"/>
+                <a:cs typeface="Courier New" panose="02070309020205020404" pitchFamily="49" charset="0"/>
+              </a:rPr>
+              <a:t>.</a:t>
+            </a:r>
+            <a:r>
+              <a:rPr kumimoji="0" lang="es-MX" altLang="es-MX" sz="1200" i="0" u="none" strike="noStrike" cap="none" normalizeH="0" baseline="0" dirty="0">
+                <a:ln>
+                  <a:noFill/>
+                </a:ln>
+                <a:solidFill>
+                  <a:srgbClr val="000000"/>
+                </a:solidFill>
+                <a:effectLst/>
+                <a:latin typeface="Courier New" panose="02070309020205020404" pitchFamily="49" charset="0"/>
+                <a:cs typeface="Courier New" panose="02070309020205020404" pitchFamily="49" charset="0"/>
+              </a:rPr>
+              <a:t>a_pagar</a:t>
+            </a:r>
+            <a:r>
+              <a:rPr kumimoji="0" lang="es-MX" altLang="es-MX" sz="1200" i="0" u="none" strike="noStrike" cap="none" normalizeH="0" baseline="0" dirty="0">
+                <a:ln>
+                  <a:noFill/>
+                </a:ln>
+                <a:solidFill>
+                  <a:srgbClr val="666600"/>
+                </a:solidFill>
+                <a:effectLst/>
+                <a:latin typeface="Courier New" panose="02070309020205020404" pitchFamily="49" charset="0"/>
+                <a:cs typeface="Courier New" panose="02070309020205020404" pitchFamily="49" charset="0"/>
+              </a:rPr>
+              <a:t>(),</a:t>
+            </a:r>
+            <a:r>
+              <a:rPr kumimoji="0" lang="es-MX" altLang="es-MX" sz="1200" i="0" u="none" strike="noStrike" cap="none" normalizeH="0" baseline="0" dirty="0">
+                <a:ln>
+                  <a:noFill/>
+                </a:ln>
+                <a:solidFill>
+                  <a:srgbClr val="000000"/>
+                </a:solidFill>
+                <a:effectLst/>
+                <a:latin typeface="Courier New" panose="02070309020205020404" pitchFamily="49" charset="0"/>
+                <a:cs typeface="Courier New" panose="02070309020205020404" pitchFamily="49" charset="0"/>
+              </a:rPr>
+              <a:t> </a:t>
+            </a:r>
+            <a:r>
+              <a:rPr kumimoji="0" lang="es-MX" altLang="es-MX" sz="1200" i="0" u="none" strike="noStrike" cap="none" normalizeH="0" baseline="0" dirty="0">
+                <a:ln>
+                  <a:noFill/>
+                </a:ln>
+                <a:solidFill>
+                  <a:srgbClr val="008800"/>
+                </a:solidFill>
+                <a:effectLst/>
+                <a:latin typeface="Courier New" panose="02070309020205020404" pitchFamily="49" charset="0"/>
+                <a:cs typeface="Courier New" panose="02070309020205020404" pitchFamily="49" charset="0"/>
+              </a:rPr>
+              <a:t>"euros"</a:t>
+            </a:r>
+            <a:r>
+              <a:rPr kumimoji="0" lang="es-MX" altLang="es-MX" sz="1200" i="0" u="none" strike="noStrike" cap="none" normalizeH="0" baseline="0" dirty="0">
+                <a:ln>
+                  <a:noFill/>
+                </a:ln>
+                <a:solidFill>
+                  <a:srgbClr val="666600"/>
+                </a:solidFill>
+                <a:effectLst/>
+                <a:latin typeface="Courier New" panose="02070309020205020404" pitchFamily="49" charset="0"/>
+                <a:cs typeface="Courier New" panose="02070309020205020404" pitchFamily="49" charset="0"/>
+              </a:rPr>
+              <a:t>)</a:t>
+            </a:r>
+            <a:r>
+              <a:rPr kumimoji="0" lang="es-MX" altLang="es-MX" sz="1200" i="0" u="none" strike="noStrike" cap="none" normalizeH="0" baseline="0" dirty="0">
+                <a:ln>
+                  <a:noFill/>
+                </a:ln>
+                <a:solidFill>
+                  <a:srgbClr val="000000"/>
+                </a:solidFill>
+                <a:effectLst/>
+                <a:latin typeface="Courier New" panose="02070309020205020404" pitchFamily="49" charset="0"/>
+                <a:cs typeface="Courier New" panose="02070309020205020404" pitchFamily="49" charset="0"/>
+              </a:rPr>
+              <a:t> </a:t>
+            </a:r>
+          </a:p>
+          <a:p>
+            <a:pPr marL="0" marR="0" lvl="0" indent="0" algn="l" defTabSz="914400" rtl="0" eaLnBrk="0" fontAlgn="base" latinLnBrk="0" hangingPunct="0">
+              <a:lnSpc>
+                <a:spcPct val="100000"/>
+              </a:lnSpc>
+              <a:spcBef>
+                <a:spcPct val="0"/>
+              </a:spcBef>
+              <a:spcAft>
+                <a:spcPct val="0"/>
+              </a:spcAft>
+              <a:buClrTx/>
+              <a:buSzTx/>
+              <a:buFontTx/>
+              <a:buNone/>
+              <a:tabLst/>
+            </a:pPr>
+            <a:r>
+              <a:rPr kumimoji="0" lang="es-MX" altLang="es-MX" sz="1200" i="0" u="none" strike="noStrike" cap="none" normalizeH="0" baseline="0" dirty="0">
+                <a:ln>
+                  <a:noFill/>
+                </a:ln>
+                <a:solidFill>
+                  <a:srgbClr val="000088"/>
+                </a:solidFill>
+                <a:effectLst/>
+                <a:highlight>
+                  <a:srgbClr val="FFFF00"/>
+                </a:highlight>
+                <a:latin typeface="Courier New" panose="02070309020205020404" pitchFamily="49" charset="0"/>
+                <a:cs typeface="Courier New" panose="02070309020205020404" pitchFamily="49" charset="0"/>
+              </a:rPr>
+              <a:t>print</a:t>
+            </a:r>
+            <a:r>
+              <a:rPr kumimoji="0" lang="es-MX" altLang="es-MX" sz="1200" i="0" u="none" strike="noStrike" cap="none" normalizeH="0" baseline="0" dirty="0">
+                <a:ln>
+                  <a:noFill/>
+                </a:ln>
+                <a:solidFill>
+                  <a:srgbClr val="666600"/>
+                </a:solidFill>
+                <a:effectLst/>
+                <a:highlight>
+                  <a:srgbClr val="FFFF00"/>
+                </a:highlight>
+                <a:latin typeface="Courier New" panose="02070309020205020404" pitchFamily="49" charset="0"/>
+                <a:cs typeface="Courier New" panose="02070309020205020404" pitchFamily="49" charset="0"/>
+              </a:rPr>
+              <a:t>(</a:t>
+            </a:r>
+            <a:r>
+              <a:rPr kumimoji="0" lang="es-MX" altLang="es-MX" sz="1200" i="0" u="none" strike="noStrike" cap="none" normalizeH="0" baseline="0" dirty="0">
+                <a:ln>
+                  <a:noFill/>
+                </a:ln>
+                <a:solidFill>
+                  <a:srgbClr val="000000"/>
+                </a:solidFill>
+                <a:effectLst/>
+                <a:highlight>
+                  <a:srgbClr val="FFFF00"/>
+                </a:highlight>
+                <a:latin typeface="Courier New" panose="02070309020205020404" pitchFamily="49" charset="0"/>
+                <a:cs typeface="Courier New" panose="02070309020205020404" pitchFamily="49" charset="0"/>
+              </a:rPr>
+              <a:t>compra1</a:t>
+            </a:r>
+            <a:r>
+              <a:rPr kumimoji="0" lang="es-MX" altLang="es-MX" sz="1200" i="0" u="none" strike="noStrike" cap="none" normalizeH="0" baseline="0" dirty="0">
+                <a:ln>
+                  <a:noFill/>
+                </a:ln>
+                <a:solidFill>
+                  <a:srgbClr val="666600"/>
+                </a:solidFill>
+                <a:effectLst/>
+                <a:highlight>
+                  <a:srgbClr val="FFFF00"/>
+                </a:highlight>
+                <a:latin typeface="Courier New" panose="02070309020205020404" pitchFamily="49" charset="0"/>
+                <a:cs typeface="Courier New" panose="02070309020205020404" pitchFamily="49" charset="0"/>
+              </a:rPr>
+              <a:t>.</a:t>
+            </a:r>
+            <a:r>
+              <a:rPr kumimoji="0" lang="es-MX" altLang="es-MX" sz="1200" i="0" u="none" strike="noStrike" cap="none" normalizeH="0" baseline="0" dirty="0">
+                <a:ln>
+                  <a:noFill/>
+                </a:ln>
+                <a:solidFill>
+                  <a:srgbClr val="660066"/>
+                </a:solidFill>
+                <a:effectLst/>
+                <a:highlight>
+                  <a:srgbClr val="FFFF00"/>
+                </a:highlight>
+                <a:latin typeface="Courier New" panose="02070309020205020404" pitchFamily="49" charset="0"/>
+                <a:cs typeface="Courier New" panose="02070309020205020404" pitchFamily="49" charset="0"/>
+              </a:rPr>
+              <a:t>_Factura__tasa</a:t>
+            </a:r>
+            <a:r>
+              <a:rPr kumimoji="0" lang="es-MX" altLang="es-MX" sz="1200" i="0" u="none" strike="noStrike" cap="none" normalizeH="0" baseline="0" dirty="0">
+                <a:ln>
+                  <a:noFill/>
+                </a:ln>
+                <a:solidFill>
+                  <a:srgbClr val="666600"/>
+                </a:solidFill>
+                <a:effectLst/>
+                <a:highlight>
+                  <a:srgbClr val="FFFF00"/>
+                </a:highlight>
+                <a:latin typeface="Courier New" panose="02070309020205020404" pitchFamily="49" charset="0"/>
+                <a:cs typeface="Courier New" panose="02070309020205020404" pitchFamily="49" charset="0"/>
+              </a:rPr>
+              <a:t>)</a:t>
+            </a:r>
+            <a:r>
+              <a:rPr kumimoji="0" lang="es-MX" altLang="es-MX" sz="1200" i="0" u="none" strike="noStrike" cap="none" normalizeH="0" baseline="0" dirty="0">
+                <a:ln>
+                  <a:noFill/>
+                </a:ln>
+                <a:solidFill>
+                  <a:srgbClr val="000000"/>
+                </a:solidFill>
+                <a:effectLst/>
+                <a:highlight>
+                  <a:srgbClr val="FFFF00"/>
+                </a:highlight>
+                <a:latin typeface="Courier New" panose="02070309020205020404" pitchFamily="49" charset="0"/>
+                <a:cs typeface="Courier New" panose="02070309020205020404" pitchFamily="49" charset="0"/>
+              </a:rPr>
+              <a:t> </a:t>
+            </a:r>
+            <a:r>
+              <a:rPr kumimoji="0" lang="es-MX" altLang="es-MX" sz="1200" i="0" u="none" strike="noStrike" cap="none" normalizeH="0" baseline="0" dirty="0">
+                <a:ln>
+                  <a:noFill/>
+                </a:ln>
+                <a:solidFill>
+                  <a:srgbClr val="880000"/>
+                </a:solidFill>
+                <a:effectLst/>
+                <a:highlight>
+                  <a:srgbClr val="FFFF00"/>
+                </a:highlight>
+                <a:latin typeface="Courier New" panose="02070309020205020404" pitchFamily="49" charset="0"/>
+                <a:cs typeface="Courier New" panose="02070309020205020404" pitchFamily="49" charset="0"/>
+              </a:rPr>
+              <a:t># 19</a:t>
+            </a:r>
+            <a:endParaRPr kumimoji="0" lang="es-MX" altLang="es-MX" sz="1200" i="0" u="none" strike="noStrike" cap="none" normalizeH="0" baseline="0" dirty="0">
+              <a:ln>
+                <a:noFill/>
+              </a:ln>
+              <a:solidFill>
+                <a:srgbClr val="000000"/>
+              </a:solidFill>
+              <a:effectLst/>
+              <a:highlight>
+                <a:srgbClr val="FFFF00"/>
+              </a:highlight>
+              <a:latin typeface="Courier New" panose="02070309020205020404" pitchFamily="49" charset="0"/>
+              <a:cs typeface="Courier New" panose="02070309020205020404" pitchFamily="49" charset="0"/>
+            </a:endParaRPr>
+          </a:p>
+          <a:p>
+            <a:pPr marL="0" marR="0" lvl="0" indent="0" algn="l" defTabSz="914400" rtl="0" eaLnBrk="0" fontAlgn="base" latinLnBrk="0" hangingPunct="0">
+              <a:lnSpc>
+                <a:spcPct val="100000"/>
+              </a:lnSpc>
+              <a:spcBef>
+                <a:spcPct val="0"/>
+              </a:spcBef>
+              <a:spcAft>
+                <a:spcPct val="0"/>
+              </a:spcAft>
+              <a:buClrTx/>
+              <a:buSzTx/>
+              <a:buFontTx/>
+              <a:buNone/>
+              <a:tabLst/>
+            </a:pPr>
+            <a:endParaRPr kumimoji="0" lang="es-MX" altLang="es-MX" sz="900" b="0" i="0" u="none" strike="noStrike" cap="none" normalizeH="0" baseline="0" dirty="0">
+              <a:ln>
+                <a:noFill/>
+              </a:ln>
+              <a:solidFill>
+                <a:srgbClr val="000000"/>
+              </a:solidFill>
+              <a:effectLst/>
+              <a:latin typeface="Arial Unicode MS"/>
+            </a:endParaRPr>
+          </a:p>
+          <a:p>
+            <a:pPr marL="0" marR="0" lvl="0" indent="0" algn="l" defTabSz="914400" rtl="0" eaLnBrk="0" fontAlgn="base" latinLnBrk="0" hangingPunct="0">
+              <a:lnSpc>
+                <a:spcPct val="100000"/>
+              </a:lnSpc>
+              <a:spcBef>
+                <a:spcPct val="0"/>
+              </a:spcBef>
+              <a:spcAft>
+                <a:spcPct val="0"/>
+              </a:spcAft>
+              <a:buClrTx/>
+              <a:buSzTx/>
+              <a:buFontTx/>
+              <a:buNone/>
+              <a:tabLst/>
+            </a:pPr>
+            <a:endParaRPr kumimoji="0" lang="es-MX" altLang="es-MX" sz="1800" b="0" i="0" u="none" strike="noStrike" cap="none" normalizeH="0" baseline="0" dirty="0">
+              <a:ln>
+                <a:noFill/>
+              </a:ln>
+              <a:solidFill>
+                <a:schemeClr val="tx1"/>
+              </a:solidFill>
+              <a:effectLst/>
+              <a:latin typeface="Arial" panose="020B0604020202020204" pitchFamily="34" charset="0"/>
+            </a:endParaRPr>
+          </a:p>
+        </p:txBody>
+      </p:sp>
+    </p:spTree>
+    <p:extLst>
+      <p:ext uri="{BB962C8B-B14F-4D97-AF65-F5344CB8AC3E}">
+        <p14:creationId xmlns:p14="http://schemas.microsoft.com/office/powerpoint/2010/main" val="3978711830"/>
+      </p:ext>
+    </p:extLst>
+  </p:cSld>
+  <p:clrMapOvr>
+    <a:masterClrMapping/>
+  </p:clrMapOvr>
+</p:sld>
+</file>
+
+<file path=ppt/slides/slide11.xml><?xml version="1.0" encoding="utf-8"?>
+<p:sld xmlns:a="http://schemas.openxmlformats.org/drawingml/2006/main" xmlns:r="http://schemas.openxmlformats.org/officeDocument/2006/relationships" xmlns:p="http://schemas.openxmlformats.org/presentationml/2006/main">
+  <p:cSld>
+    <p:spTree>
+      <p:nvGrpSpPr>
+        <p:cNvPr id="1" name=""/>
+        <p:cNvGrpSpPr/>
+        <p:nvPr/>
+      </p:nvGrpSpPr>
+      <p:grpSpPr>
+        <a:xfrm>
+          <a:off x="0" y="0"/>
+          <a:ext cx="0" cy="0"/>
+          <a:chOff x="0" y="0"/>
+          <a:chExt cx="0" cy="0"/>
+        </a:xfrm>
+      </p:grpSpPr>
+      <p:sp>
+        <p:nvSpPr>
+          <p:cNvPr id="4" name="Rectangle 2">
+            <a:extLst>
+              <a:ext uri="{FF2B5EF4-FFF2-40B4-BE49-F238E27FC236}">
+                <a16:creationId xmlns:a16="http://schemas.microsoft.com/office/drawing/2014/main" id="{7CE40F4F-E91D-42FD-B661-EAA8BC18ABC8}"/>
+              </a:ext>
+            </a:extLst>
+          </p:cNvPr>
+          <p:cNvSpPr txBox="1">
+            <a:spLocks noChangeArrowheads="1"/>
+          </p:cNvSpPr>
+          <p:nvPr/>
+        </p:nvSpPr>
+        <p:spPr>
+          <a:xfrm>
+            <a:off x="0" y="-27383"/>
+            <a:ext cx="9144000" cy="1008112"/>
+          </a:xfrm>
+          <a:prstGeom prst="rect">
+            <a:avLst/>
+          </a:prstGeom>
+        </p:spPr>
+        <p:txBody>
+          <a:bodyPr vert="horz" lIns="91440" tIns="45720" rIns="91440" bIns="45720" rtlCol="0" anchor="ctr">
+            <a:normAutofit/>
+          </a:bodyPr>
+          <a:lstStyle>
+            <a:lvl1pPr algn="ctr" defTabSz="914400" rtl="0" eaLnBrk="1" latinLnBrk="0" hangingPunct="1">
+              <a:spcBef>
+                <a:spcPct val="0"/>
+              </a:spcBef>
+              <a:buNone/>
+              <a:defRPr sz="4400" kern="1200">
+                <a:solidFill>
+                  <a:schemeClr val="tx1"/>
+                </a:solidFill>
+                <a:latin typeface="+mj-lt"/>
+                <a:ea typeface="+mj-ea"/>
+                <a:cs typeface="+mj-cs"/>
+              </a:defRPr>
+            </a:lvl1pPr>
+          </a:lstStyle>
+          <a:p>
+            <a:r>
+              <a:rPr lang="es-ES_tradnl" altLang="es-MX" sz="3200" b="1" dirty="0">
+                <a:solidFill>
+                  <a:schemeClr val="accent4">
+                    <a:lumMod val="50000"/>
+                  </a:schemeClr>
+                </a:solidFill>
+                <a:effectLst>
+                  <a:outerShdw blurRad="38100" dist="38100" dir="2700000" algn="tl">
+                    <a:srgbClr val="C0C0C0"/>
+                  </a:outerShdw>
+                </a:effectLst>
+                <a:latin typeface="Dom Casual" charset="0"/>
+              </a:rPr>
+              <a:t>Métodos </a:t>
+            </a:r>
+            <a:r>
+              <a:rPr lang="es-ES_tradnl" altLang="es-MX" sz="3200" b="1" dirty="0" err="1">
+                <a:solidFill>
+                  <a:schemeClr val="accent4">
+                    <a:lumMod val="50000"/>
+                  </a:schemeClr>
+                </a:solidFill>
+                <a:effectLst>
+                  <a:outerShdw blurRad="38100" dist="38100" dir="2700000" algn="tl">
+                    <a:srgbClr val="C0C0C0"/>
+                  </a:outerShdw>
+                </a:effectLst>
+                <a:latin typeface="Dom Casual" charset="0"/>
+              </a:rPr>
+              <a:t>get</a:t>
+            </a:r>
+            <a:r>
+              <a:rPr lang="es-ES_tradnl" altLang="es-MX" sz="3200" b="1" dirty="0">
+                <a:solidFill>
+                  <a:schemeClr val="accent4">
+                    <a:lumMod val="50000"/>
+                  </a:schemeClr>
+                </a:solidFill>
+                <a:effectLst>
+                  <a:outerShdw blurRad="38100" dist="38100" dir="2700000" algn="tl">
+                    <a:srgbClr val="C0C0C0"/>
+                  </a:outerShdw>
+                </a:effectLst>
+                <a:latin typeface="Dom Casual" charset="0"/>
+              </a:rPr>
+              <a:t>, set y del</a:t>
+            </a:r>
+          </a:p>
+        </p:txBody>
+      </p:sp>
+      <p:sp>
+        <p:nvSpPr>
+          <p:cNvPr id="10" name="CuadroTexto 9">
+            <a:extLst>
+              <a:ext uri="{FF2B5EF4-FFF2-40B4-BE49-F238E27FC236}">
+                <a16:creationId xmlns:a16="http://schemas.microsoft.com/office/drawing/2014/main" id="{B73C42C7-85D9-4D9B-B558-211E4812A4BA}"/>
+              </a:ext>
+            </a:extLst>
+          </p:cNvPr>
+          <p:cNvSpPr txBox="1"/>
+          <p:nvPr/>
+        </p:nvSpPr>
+        <p:spPr>
+          <a:xfrm>
+            <a:off x="467544" y="1071605"/>
+            <a:ext cx="8208912" cy="707501"/>
+          </a:xfrm>
+          <a:prstGeom prst="rect">
+            <a:avLst/>
+          </a:prstGeom>
+          <a:noFill/>
+        </p:spPr>
+        <p:txBody>
+          <a:bodyPr wrap="square" rtlCol="0">
+            <a:spAutoFit/>
+          </a:bodyPr>
+          <a:lstStyle/>
+          <a:p>
+            <a:pPr algn="just">
+              <a:lnSpc>
+                <a:spcPts val="2500"/>
+              </a:lnSpc>
+            </a:pPr>
+            <a:r>
+              <a:rPr lang="es-ES" sz="1600" dirty="0">
+                <a:solidFill>
+                  <a:schemeClr val="tx1">
+                    <a:lumMod val="95000"/>
+                    <a:lumOff val="5000"/>
+                  </a:schemeClr>
+                </a:solidFill>
+              </a:rPr>
+              <a:t>Cuando se trabajan con clases es recomendable crear </a:t>
+            </a:r>
+            <a:r>
+              <a:rPr lang="es-ES" sz="1600" b="1" dirty="0">
+                <a:solidFill>
+                  <a:srgbClr val="0070C0"/>
+                </a:solidFill>
+              </a:rPr>
+              <a:t>atributos ocultos </a:t>
+            </a:r>
+            <a:r>
+              <a:rPr lang="es-ES" sz="1600" dirty="0">
+                <a:solidFill>
+                  <a:schemeClr val="tx1">
+                    <a:lumMod val="95000"/>
+                    <a:lumOff val="5000"/>
+                  </a:schemeClr>
+                </a:solidFill>
+              </a:rPr>
+              <a:t>y utilizar </a:t>
+            </a:r>
+            <a:r>
+              <a:rPr lang="es-ES" sz="1600" b="1" dirty="0">
+                <a:solidFill>
+                  <a:srgbClr val="0070C0"/>
+                </a:solidFill>
+              </a:rPr>
+              <a:t>métodos</a:t>
+            </a:r>
+            <a:r>
+              <a:rPr lang="es-ES" sz="1600" dirty="0">
+                <a:solidFill>
+                  <a:schemeClr val="tx1">
+                    <a:lumMod val="95000"/>
+                    <a:lumOff val="5000"/>
+                  </a:schemeClr>
+                </a:solidFill>
+              </a:rPr>
+              <a:t> específicos para acceder a los mismos para establecer, obtener o borrar la información:</a:t>
+            </a:r>
+            <a:endParaRPr lang="es-ES" sz="1600" b="1" dirty="0">
+              <a:solidFill>
+                <a:schemeClr val="accent6">
+                  <a:lumMod val="75000"/>
+                </a:schemeClr>
+              </a:solidFill>
+            </a:endParaRPr>
+          </a:p>
+        </p:txBody>
+      </p:sp>
+      <p:pic>
+        <p:nvPicPr>
+          <p:cNvPr id="3" name="Imagen 2">
+            <a:extLst>
+              <a:ext uri="{FF2B5EF4-FFF2-40B4-BE49-F238E27FC236}">
+                <a16:creationId xmlns:a16="http://schemas.microsoft.com/office/drawing/2014/main" id="{66F3A83B-2FA4-4582-BCE0-C9174424F60B}"/>
+              </a:ext>
+            </a:extLst>
+          </p:cNvPr>
+          <p:cNvPicPr>
+            <a:picLocks noChangeAspect="1"/>
+          </p:cNvPicPr>
+          <p:nvPr/>
+        </p:nvPicPr>
+        <p:blipFill>
+          <a:blip r:embed="rId2"/>
+          <a:stretch>
+            <a:fillRect/>
+          </a:stretch>
+        </p:blipFill>
+        <p:spPr>
+          <a:xfrm>
+            <a:off x="611560" y="1970545"/>
+            <a:ext cx="3586201" cy="4293096"/>
+          </a:xfrm>
+          <a:prstGeom prst="rect">
+            <a:avLst/>
+          </a:prstGeom>
+        </p:spPr>
+      </p:pic>
+    </p:spTree>
+    <p:extLst>
+      <p:ext uri="{BB962C8B-B14F-4D97-AF65-F5344CB8AC3E}">
+        <p14:creationId xmlns:p14="http://schemas.microsoft.com/office/powerpoint/2010/main" val="2924426002"/>
+      </p:ext>
+    </p:extLst>
+  </p:cSld>
+  <p:clrMapOvr>
+    <a:masterClrMapping/>
+  </p:clrMapOvr>
+</p:sld>
+</file>
+
+<file path=ppt/slides/slide12.xml><?xml version="1.0" encoding="utf-8"?>
+<p:sld xmlns:a="http://schemas.openxmlformats.org/drawingml/2006/main" xmlns:r="http://schemas.openxmlformats.org/officeDocument/2006/relationships" xmlns:p="http://schemas.openxmlformats.org/presentationml/2006/main">
+  <p:cSld>
+    <p:spTree>
+      <p:nvGrpSpPr>
+        <p:cNvPr id="1" name=""/>
+        <p:cNvGrpSpPr/>
+        <p:nvPr/>
+      </p:nvGrpSpPr>
+      <p:grpSpPr>
+        <a:xfrm>
+          <a:off x="0" y="0"/>
+          <a:ext cx="0" cy="0"/>
+          <a:chOff x="0" y="0"/>
+          <a:chExt cx="0" cy="0"/>
+        </a:xfrm>
+      </p:grpSpPr>
+      <p:sp>
+        <p:nvSpPr>
+          <p:cNvPr id="2" name="object 2"/>
+          <p:cNvSpPr/>
+          <p:nvPr/>
+        </p:nvSpPr>
+        <p:spPr>
+          <a:xfrm>
+            <a:off x="8218931" y="4978146"/>
+            <a:ext cx="684276" cy="594360"/>
+          </a:xfrm>
+          <a:prstGeom prst="rect">
+            <a:avLst/>
+          </a:prstGeom>
+          <a:blipFill>
+            <a:blip r:embed="rId2" cstate="print"/>
+            <a:stretch>
+              <a:fillRect/>
+            </a:stretch>
+          </a:blipFill>
+        </p:spPr>
+        <p:txBody>
+          <a:bodyPr wrap="square" lIns="0" tIns="0" rIns="0" bIns="0" rtlCol="0">
+            <a:noAutofit/>
+          </a:bodyPr>
+          <a:lstStyle/>
+          <a:p>
+            <a:endParaRPr dirty="0"/>
+          </a:p>
+        </p:txBody>
+      </p:sp>
+      <p:sp>
+        <p:nvSpPr>
+          <p:cNvPr id="3" name="object 3"/>
+          <p:cNvSpPr/>
+          <p:nvPr/>
+        </p:nvSpPr>
+        <p:spPr>
+          <a:xfrm>
+            <a:off x="315468" y="1035558"/>
+            <a:ext cx="1089660" cy="943355"/>
+          </a:xfrm>
+          <a:prstGeom prst="rect">
+            <a:avLst/>
+          </a:prstGeom>
+          <a:blipFill>
+            <a:blip r:embed="rId3" cstate="print"/>
+            <a:stretch>
+              <a:fillRect/>
+            </a:stretch>
+          </a:blipFill>
+        </p:spPr>
+        <p:txBody>
+          <a:bodyPr wrap="square" lIns="0" tIns="0" rIns="0" bIns="0" rtlCol="0">
+            <a:noAutofit/>
+          </a:bodyPr>
+          <a:lstStyle/>
+          <a:p>
+            <a:endParaRPr dirty="0"/>
+          </a:p>
+        </p:txBody>
+      </p:sp>
+      <p:sp>
+        <p:nvSpPr>
+          <p:cNvPr id="4" name="object 4"/>
+          <p:cNvSpPr/>
+          <p:nvPr/>
+        </p:nvSpPr>
+        <p:spPr>
+          <a:xfrm>
+            <a:off x="0" y="1704595"/>
+            <a:ext cx="550164" cy="585215"/>
+          </a:xfrm>
+          <a:custGeom>
+            <a:avLst/>
+            <a:gdLst/>
+            <a:ahLst/>
+            <a:cxnLst/>
+            <a:rect l="l" t="t" r="r" b="b"/>
+            <a:pathLst>
+              <a:path w="550164" h="585215">
+                <a:moveTo>
+                  <a:pt x="0" y="507832"/>
+                </a:moveTo>
+                <a:lnTo>
+                  <a:pt x="44383" y="585215"/>
+                </a:lnTo>
+                <a:lnTo>
+                  <a:pt x="382333" y="585215"/>
+                </a:lnTo>
+                <a:lnTo>
+                  <a:pt x="550164" y="292607"/>
+                </a:lnTo>
+                <a:lnTo>
+                  <a:pt x="382333" y="0"/>
+                </a:lnTo>
+                <a:lnTo>
+                  <a:pt x="44383" y="0"/>
+                </a:lnTo>
+                <a:lnTo>
+                  <a:pt x="0" y="77383"/>
+                </a:lnTo>
+              </a:path>
+            </a:pathLst>
+          </a:custGeom>
+          <a:ln w="9144">
+            <a:solidFill>
+              <a:srgbClr val="18BAD4"/>
+            </a:solidFill>
+          </a:ln>
+        </p:spPr>
+        <p:txBody>
+          <a:bodyPr wrap="square" lIns="0" tIns="0" rIns="0" bIns="0" rtlCol="0">
+            <a:noAutofit/>
+          </a:bodyPr>
+          <a:lstStyle/>
+          <a:p>
+            <a:endParaRPr dirty="0"/>
+          </a:p>
+        </p:txBody>
+      </p:sp>
+      <p:sp>
+        <p:nvSpPr>
+          <p:cNvPr id="5" name="object 5"/>
+          <p:cNvSpPr/>
+          <p:nvPr/>
+        </p:nvSpPr>
+        <p:spPr>
+          <a:xfrm>
+            <a:off x="502920" y="2018538"/>
+            <a:ext cx="353567" cy="306324"/>
+          </a:xfrm>
+          <a:custGeom>
+            <a:avLst/>
+            <a:gdLst/>
+            <a:ahLst/>
+            <a:cxnLst/>
+            <a:rect l="l" t="t" r="r" b="b"/>
+            <a:pathLst>
+              <a:path w="353568" h="306324">
+                <a:moveTo>
+                  <a:pt x="265722" y="0"/>
+                </a:moveTo>
+                <a:lnTo>
+                  <a:pt x="87845" y="0"/>
+                </a:lnTo>
+                <a:lnTo>
+                  <a:pt x="0" y="153162"/>
+                </a:lnTo>
+                <a:lnTo>
+                  <a:pt x="87845" y="306324"/>
+                </a:lnTo>
+                <a:lnTo>
+                  <a:pt x="265722" y="306324"/>
+                </a:lnTo>
+                <a:lnTo>
+                  <a:pt x="353567" y="153162"/>
+                </a:lnTo>
+                <a:lnTo>
+                  <a:pt x="265722" y="0"/>
+                </a:lnTo>
+                <a:close/>
+              </a:path>
+            </a:pathLst>
+          </a:custGeom>
+          <a:solidFill>
+            <a:srgbClr val="174669"/>
+          </a:solidFill>
+        </p:spPr>
+        <p:txBody>
+          <a:bodyPr wrap="square" lIns="0" tIns="0" rIns="0" bIns="0" rtlCol="0">
+            <a:noAutofit/>
+          </a:bodyPr>
+          <a:lstStyle/>
+          <a:p>
+            <a:endParaRPr dirty="0"/>
+          </a:p>
+        </p:txBody>
+      </p:sp>
+      <p:sp>
+        <p:nvSpPr>
+          <p:cNvPr id="6" name="object 6"/>
+          <p:cNvSpPr/>
+          <p:nvPr/>
+        </p:nvSpPr>
+        <p:spPr>
+          <a:xfrm>
+            <a:off x="1208533" y="857251"/>
+            <a:ext cx="673607" cy="452627"/>
+          </a:xfrm>
+          <a:custGeom>
+            <a:avLst/>
+            <a:gdLst/>
+            <a:ahLst/>
+            <a:cxnLst/>
+            <a:rect l="l" t="t" r="r" b="b"/>
+            <a:pathLst>
+              <a:path w="673607" h="452627">
+                <a:moveTo>
+                  <a:pt x="0" y="160781"/>
+                </a:moveTo>
+                <a:lnTo>
+                  <a:pt x="167386" y="452627"/>
+                </a:lnTo>
+                <a:lnTo>
+                  <a:pt x="506222" y="452627"/>
+                </a:lnTo>
+                <a:lnTo>
+                  <a:pt x="673607" y="160781"/>
+                </a:lnTo>
+                <a:lnTo>
+                  <a:pt x="581393" y="0"/>
+                </a:lnTo>
+              </a:path>
+            </a:pathLst>
+          </a:custGeom>
+          <a:ln w="76200">
+            <a:solidFill>
+              <a:srgbClr val="174669"/>
+            </a:solidFill>
+          </a:ln>
+        </p:spPr>
+        <p:txBody>
+          <a:bodyPr wrap="square" lIns="0" tIns="0" rIns="0" bIns="0" rtlCol="0">
+            <a:noAutofit/>
+          </a:bodyPr>
+          <a:lstStyle/>
+          <a:p>
+            <a:endParaRPr dirty="0"/>
+          </a:p>
+        </p:txBody>
+      </p:sp>
+      <p:sp>
+        <p:nvSpPr>
+          <p:cNvPr id="7" name="object 7"/>
+          <p:cNvSpPr/>
+          <p:nvPr/>
+        </p:nvSpPr>
+        <p:spPr>
+          <a:xfrm>
+            <a:off x="1208532" y="857251"/>
+            <a:ext cx="92214" cy="160781"/>
+          </a:xfrm>
+          <a:custGeom>
+            <a:avLst/>
+            <a:gdLst/>
+            <a:ahLst/>
+            <a:cxnLst/>
+            <a:rect l="l" t="t" r="r" b="b"/>
+            <a:pathLst>
+              <a:path w="92214" h="160781">
+                <a:moveTo>
+                  <a:pt x="92214" y="0"/>
+                </a:moveTo>
+                <a:lnTo>
+                  <a:pt x="0" y="160781"/>
+                </a:lnTo>
+              </a:path>
+            </a:pathLst>
+          </a:custGeom>
+          <a:ln w="76199">
+            <a:solidFill>
+              <a:srgbClr val="174669"/>
+            </a:solidFill>
+          </a:ln>
+        </p:spPr>
+        <p:txBody>
+          <a:bodyPr wrap="square" lIns="0" tIns="0" rIns="0" bIns="0" rtlCol="0">
+            <a:noAutofit/>
+          </a:bodyPr>
+          <a:lstStyle/>
+          <a:p>
+            <a:endParaRPr dirty="0"/>
+          </a:p>
+        </p:txBody>
+      </p:sp>
+      <p:sp>
+        <p:nvSpPr>
+          <p:cNvPr id="8" name="object 8"/>
+          <p:cNvSpPr/>
+          <p:nvPr/>
+        </p:nvSpPr>
+        <p:spPr>
+          <a:xfrm>
+            <a:off x="248411" y="907542"/>
+            <a:ext cx="294132" cy="254508"/>
+          </a:xfrm>
+          <a:custGeom>
+            <a:avLst/>
+            <a:gdLst/>
+            <a:ahLst/>
+            <a:cxnLst/>
+            <a:rect l="l" t="t" r="r" b="b"/>
+            <a:pathLst>
+              <a:path w="294131" h="254508">
+                <a:moveTo>
+                  <a:pt x="221145" y="0"/>
+                </a:moveTo>
+                <a:lnTo>
+                  <a:pt x="72986" y="0"/>
+                </a:lnTo>
+                <a:lnTo>
+                  <a:pt x="0" y="127254"/>
+                </a:lnTo>
+                <a:lnTo>
+                  <a:pt x="72986" y="254508"/>
+                </a:lnTo>
+                <a:lnTo>
+                  <a:pt x="221145" y="254508"/>
+                </a:lnTo>
+                <a:lnTo>
+                  <a:pt x="294132" y="127254"/>
+                </a:lnTo>
+                <a:lnTo>
+                  <a:pt x="221145" y="0"/>
+                </a:lnTo>
+                <a:close/>
+              </a:path>
+            </a:pathLst>
+          </a:custGeom>
+          <a:solidFill>
+            <a:srgbClr val="00E0C5"/>
+          </a:solidFill>
+        </p:spPr>
+        <p:txBody>
+          <a:bodyPr wrap="square" lIns="0" tIns="0" rIns="0" bIns="0" rtlCol="0">
+            <a:noAutofit/>
+          </a:bodyPr>
+          <a:lstStyle/>
+          <a:p>
+            <a:endParaRPr dirty="0"/>
+          </a:p>
+        </p:txBody>
+      </p:sp>
+      <p:sp>
+        <p:nvSpPr>
+          <p:cNvPr id="9" name="object 9"/>
+          <p:cNvSpPr/>
+          <p:nvPr/>
+        </p:nvSpPr>
+        <p:spPr>
+          <a:xfrm>
+            <a:off x="8763000" y="5578602"/>
+            <a:ext cx="381000" cy="234696"/>
+          </a:xfrm>
+          <a:custGeom>
+            <a:avLst/>
+            <a:gdLst/>
+            <a:ahLst/>
+            <a:cxnLst/>
+            <a:rect l="l" t="t" r="r" b="b"/>
+            <a:pathLst>
+              <a:path w="381000" h="234696">
+                <a:moveTo>
+                  <a:pt x="0" y="0"/>
+                </a:moveTo>
+                <a:lnTo>
+                  <a:pt x="134620" y="234696"/>
+                </a:lnTo>
+                <a:lnTo>
+                  <a:pt x="381000" y="234696"/>
+                </a:lnTo>
+              </a:path>
+            </a:pathLst>
+          </a:custGeom>
+          <a:ln w="9144">
+            <a:solidFill>
+              <a:srgbClr val="174669"/>
+            </a:solidFill>
+          </a:ln>
+        </p:spPr>
+        <p:txBody>
+          <a:bodyPr wrap="square" lIns="0" tIns="0" rIns="0" bIns="0" rtlCol="0">
+            <a:noAutofit/>
+          </a:bodyPr>
+          <a:lstStyle/>
+          <a:p>
+            <a:endParaRPr dirty="0"/>
+          </a:p>
+        </p:txBody>
+      </p:sp>
+      <p:sp>
+        <p:nvSpPr>
+          <p:cNvPr id="10" name="object 10"/>
+          <p:cNvSpPr/>
+          <p:nvPr/>
+        </p:nvSpPr>
+        <p:spPr>
+          <a:xfrm>
+            <a:off x="8763000" y="5343906"/>
+            <a:ext cx="381000" cy="234695"/>
+          </a:xfrm>
+          <a:custGeom>
+            <a:avLst/>
+            <a:gdLst/>
+            <a:ahLst/>
+            <a:cxnLst/>
+            <a:rect l="l" t="t" r="r" b="b"/>
+            <a:pathLst>
+              <a:path w="381000" h="234696">
+                <a:moveTo>
+                  <a:pt x="381000" y="0"/>
+                </a:moveTo>
+                <a:lnTo>
+                  <a:pt x="134620" y="0"/>
+                </a:lnTo>
+                <a:lnTo>
+                  <a:pt x="0" y="234696"/>
+                </a:lnTo>
+              </a:path>
+            </a:pathLst>
+          </a:custGeom>
+          <a:ln w="9144">
+            <a:solidFill>
+              <a:srgbClr val="174669"/>
+            </a:solidFill>
+          </a:ln>
+        </p:spPr>
+        <p:txBody>
+          <a:bodyPr wrap="square" lIns="0" tIns="0" rIns="0" bIns="0" rtlCol="0">
+            <a:noAutofit/>
+          </a:bodyPr>
+          <a:lstStyle/>
+          <a:p>
+            <a:endParaRPr dirty="0"/>
+          </a:p>
+        </p:txBody>
+      </p:sp>
+      <p:sp>
+        <p:nvSpPr>
+          <p:cNvPr id="11" name="object 11"/>
+          <p:cNvSpPr/>
+          <p:nvPr/>
+        </p:nvSpPr>
+        <p:spPr>
+          <a:xfrm>
+            <a:off x="8523731" y="5598414"/>
+            <a:ext cx="283464" cy="245364"/>
+          </a:xfrm>
+          <a:custGeom>
+            <a:avLst/>
+            <a:gdLst/>
+            <a:ahLst/>
+            <a:cxnLst/>
+            <a:rect l="l" t="t" r="r" b="b"/>
+            <a:pathLst>
+              <a:path w="283464" h="245363">
+                <a:moveTo>
+                  <a:pt x="213106" y="0"/>
+                </a:moveTo>
+                <a:lnTo>
+                  <a:pt x="70358" y="0"/>
+                </a:lnTo>
+                <a:lnTo>
+                  <a:pt x="0" y="122682"/>
+                </a:lnTo>
+                <a:lnTo>
+                  <a:pt x="70358" y="245364"/>
+                </a:lnTo>
+                <a:lnTo>
+                  <a:pt x="213106" y="245364"/>
+                </a:lnTo>
+                <a:lnTo>
+                  <a:pt x="283464" y="122682"/>
+                </a:lnTo>
+                <a:lnTo>
+                  <a:pt x="213106" y="0"/>
+                </a:lnTo>
+                <a:close/>
+              </a:path>
+            </a:pathLst>
+          </a:custGeom>
+          <a:solidFill>
+            <a:srgbClr val="3192E0"/>
+          </a:solidFill>
+        </p:spPr>
+        <p:txBody>
+          <a:bodyPr wrap="square" lIns="0" tIns="0" rIns="0" bIns="0" rtlCol="0">
+            <a:noAutofit/>
+          </a:bodyPr>
+          <a:lstStyle/>
+          <a:p>
+            <a:endParaRPr dirty="0"/>
+          </a:p>
+        </p:txBody>
+      </p:sp>
+      <p:sp>
+        <p:nvSpPr>
+          <p:cNvPr id="12" name="object 12"/>
+          <p:cNvSpPr/>
+          <p:nvPr/>
+        </p:nvSpPr>
+        <p:spPr>
+          <a:xfrm>
+            <a:off x="8322565" y="4485894"/>
+            <a:ext cx="542543" cy="469392"/>
+          </a:xfrm>
+          <a:custGeom>
+            <a:avLst/>
+            <a:gdLst/>
+            <a:ahLst/>
+            <a:cxnLst/>
+            <a:rect l="l" t="t" r="r" b="b"/>
+            <a:pathLst>
+              <a:path w="542543" h="469392">
+                <a:moveTo>
+                  <a:pt x="407924" y="0"/>
+                </a:moveTo>
+                <a:lnTo>
+                  <a:pt x="134619" y="0"/>
+                </a:lnTo>
+                <a:lnTo>
+                  <a:pt x="0" y="234695"/>
+                </a:lnTo>
+                <a:lnTo>
+                  <a:pt x="134619" y="469391"/>
+                </a:lnTo>
+                <a:lnTo>
+                  <a:pt x="407924" y="469391"/>
+                </a:lnTo>
+                <a:lnTo>
+                  <a:pt x="542543" y="234695"/>
+                </a:lnTo>
+                <a:lnTo>
+                  <a:pt x="407924" y="0"/>
+                </a:lnTo>
+                <a:close/>
+              </a:path>
+            </a:pathLst>
+          </a:custGeom>
+          <a:solidFill>
+            <a:srgbClr val="174669"/>
+          </a:solidFill>
+        </p:spPr>
+        <p:txBody>
+          <a:bodyPr wrap="square" lIns="0" tIns="0" rIns="0" bIns="0" rtlCol="0">
+            <a:noAutofit/>
+          </a:bodyPr>
+          <a:lstStyle/>
+          <a:p>
+            <a:endParaRPr dirty="0"/>
+          </a:p>
+        </p:txBody>
+      </p:sp>
+      <p:sp>
+        <p:nvSpPr>
+          <p:cNvPr id="13" name="object 13"/>
+          <p:cNvSpPr/>
+          <p:nvPr/>
+        </p:nvSpPr>
+        <p:spPr>
+          <a:xfrm>
+            <a:off x="8763761" y="4867655"/>
+            <a:ext cx="237744" cy="205740"/>
+          </a:xfrm>
+          <a:custGeom>
+            <a:avLst/>
+            <a:gdLst/>
+            <a:ahLst/>
+            <a:cxnLst/>
+            <a:rect l="l" t="t" r="r" b="b"/>
+            <a:pathLst>
+              <a:path w="237744" h="205739">
+                <a:moveTo>
+                  <a:pt x="0" y="102870"/>
+                </a:moveTo>
+                <a:lnTo>
+                  <a:pt x="59055" y="205740"/>
+                </a:lnTo>
+                <a:lnTo>
+                  <a:pt x="178689" y="205740"/>
+                </a:lnTo>
+                <a:lnTo>
+                  <a:pt x="237744" y="102870"/>
+                </a:lnTo>
+                <a:lnTo>
+                  <a:pt x="178689" y="0"/>
+                </a:lnTo>
+                <a:lnTo>
+                  <a:pt x="59055" y="0"/>
+                </a:lnTo>
+                <a:lnTo>
+                  <a:pt x="0" y="102870"/>
+                </a:lnTo>
+                <a:close/>
+              </a:path>
+            </a:pathLst>
+          </a:custGeom>
+          <a:ln w="19811">
+            <a:solidFill>
+              <a:srgbClr val="00E0C5"/>
+            </a:solidFill>
+          </a:ln>
+        </p:spPr>
+        <p:txBody>
+          <a:bodyPr wrap="square" lIns="0" tIns="0" rIns="0" bIns="0" rtlCol="0">
+            <a:noAutofit/>
+          </a:bodyPr>
+          <a:lstStyle/>
+          <a:p>
+            <a:endParaRPr dirty="0"/>
+          </a:p>
+        </p:txBody>
+      </p:sp>
+      <p:sp>
+        <p:nvSpPr>
+          <p:cNvPr id="14" name="object 14"/>
+          <p:cNvSpPr/>
+          <p:nvPr/>
+        </p:nvSpPr>
+        <p:spPr>
+          <a:xfrm>
+            <a:off x="909827" y="1533905"/>
+            <a:ext cx="2142744" cy="1856232"/>
+          </a:xfrm>
+          <a:prstGeom prst="rect">
+            <a:avLst/>
+          </a:prstGeom>
+          <a:blipFill>
+            <a:blip r:embed="rId4" cstate="print"/>
+            <a:stretch>
+              <a:fillRect/>
+            </a:stretch>
+          </a:blipFill>
+        </p:spPr>
+        <p:txBody>
+          <a:bodyPr wrap="square" lIns="0" tIns="0" rIns="0" bIns="0" rtlCol="0">
+            <a:noAutofit/>
+          </a:bodyPr>
+          <a:lstStyle/>
+          <a:p>
+            <a:endParaRPr dirty="0"/>
+          </a:p>
+        </p:txBody>
+      </p:sp>
+      <p:sp>
+        <p:nvSpPr>
+          <p:cNvPr id="15" name="object 15"/>
+          <p:cNvSpPr txBox="1"/>
+          <p:nvPr/>
+        </p:nvSpPr>
+        <p:spPr>
+          <a:xfrm>
+            <a:off x="3232150" y="1996821"/>
+            <a:ext cx="3932138" cy="1283335"/>
+          </a:xfrm>
+          <a:prstGeom prst="rect">
+            <a:avLst/>
+          </a:prstGeom>
+        </p:spPr>
+        <p:txBody>
+          <a:bodyPr vert="horz" wrap="square" lIns="0" tIns="0" rIns="0" bIns="0" rtlCol="0">
+            <a:noAutofit/>
+          </a:bodyPr>
+          <a:lstStyle/>
+          <a:p>
+            <a:pPr marL="12700"/>
+            <a:r>
+              <a:rPr sz="8000" b="1" dirty="0">
+                <a:solidFill>
+                  <a:srgbClr val="002060"/>
+                </a:solidFill>
+                <a:latin typeface="Calibri"/>
+                <a:cs typeface="Calibri"/>
+              </a:rPr>
+              <a:t>Gracias</a:t>
+            </a:r>
+          </a:p>
+        </p:txBody>
+      </p:sp>
+      <p:sp>
+        <p:nvSpPr>
+          <p:cNvPr id="16" name="object 16"/>
+          <p:cNvSpPr/>
+          <p:nvPr/>
+        </p:nvSpPr>
+        <p:spPr>
+          <a:xfrm>
+            <a:off x="1591055" y="2070353"/>
+            <a:ext cx="780288" cy="778764"/>
+          </a:xfrm>
+          <a:custGeom>
+            <a:avLst/>
+            <a:gdLst/>
+            <a:ahLst/>
+            <a:cxnLst/>
+            <a:rect l="l" t="t" r="r" b="b"/>
+            <a:pathLst>
+              <a:path w="780288" h="778764">
+                <a:moveTo>
+                  <a:pt x="410082" y="0"/>
+                </a:moveTo>
+                <a:lnTo>
+                  <a:pt x="370205" y="0"/>
+                </a:lnTo>
+                <a:lnTo>
+                  <a:pt x="311657" y="7493"/>
+                </a:lnTo>
+                <a:lnTo>
+                  <a:pt x="274193" y="17525"/>
+                </a:lnTo>
+                <a:lnTo>
+                  <a:pt x="255524" y="23622"/>
+                </a:lnTo>
+                <a:lnTo>
+                  <a:pt x="220599" y="38608"/>
+                </a:lnTo>
+                <a:lnTo>
+                  <a:pt x="204469" y="47371"/>
+                </a:lnTo>
+                <a:lnTo>
+                  <a:pt x="188213" y="56007"/>
+                </a:lnTo>
+                <a:lnTo>
+                  <a:pt x="142112" y="88392"/>
+                </a:lnTo>
+                <a:lnTo>
+                  <a:pt x="100964" y="128143"/>
+                </a:lnTo>
+                <a:lnTo>
+                  <a:pt x="66039" y="171704"/>
+                </a:lnTo>
+                <a:lnTo>
+                  <a:pt x="38735" y="220218"/>
+                </a:lnTo>
+                <a:lnTo>
+                  <a:pt x="17399" y="273685"/>
+                </a:lnTo>
+                <a:lnTo>
+                  <a:pt x="7493" y="311023"/>
+                </a:lnTo>
+                <a:lnTo>
+                  <a:pt x="2540" y="349631"/>
+                </a:lnTo>
+                <a:lnTo>
+                  <a:pt x="0" y="369570"/>
+                </a:lnTo>
+                <a:lnTo>
+                  <a:pt x="0" y="409321"/>
+                </a:lnTo>
+                <a:lnTo>
+                  <a:pt x="2540" y="429260"/>
+                </a:lnTo>
+                <a:lnTo>
+                  <a:pt x="4953" y="449072"/>
+                </a:lnTo>
+                <a:lnTo>
+                  <a:pt x="17399" y="505079"/>
+                </a:lnTo>
+                <a:lnTo>
+                  <a:pt x="38735" y="558546"/>
+                </a:lnTo>
+                <a:lnTo>
+                  <a:pt x="66039" y="607060"/>
+                </a:lnTo>
+                <a:lnTo>
+                  <a:pt x="100964" y="650621"/>
+                </a:lnTo>
+                <a:lnTo>
+                  <a:pt x="128396" y="677926"/>
+                </a:lnTo>
+                <a:lnTo>
+                  <a:pt x="172085" y="712851"/>
+                </a:lnTo>
+                <a:lnTo>
+                  <a:pt x="220599" y="740156"/>
+                </a:lnTo>
+                <a:lnTo>
+                  <a:pt x="274193" y="761365"/>
+                </a:lnTo>
+                <a:lnTo>
+                  <a:pt x="311657" y="771271"/>
+                </a:lnTo>
+                <a:lnTo>
+                  <a:pt x="370205" y="778764"/>
+                </a:lnTo>
+                <a:lnTo>
+                  <a:pt x="410082" y="778764"/>
+                </a:lnTo>
+                <a:lnTo>
+                  <a:pt x="449961" y="773811"/>
+                </a:lnTo>
+                <a:lnTo>
+                  <a:pt x="506094" y="761365"/>
+                </a:lnTo>
+                <a:lnTo>
+                  <a:pt x="559562" y="740156"/>
+                </a:lnTo>
+                <a:lnTo>
+                  <a:pt x="608202" y="712851"/>
+                </a:lnTo>
+                <a:lnTo>
+                  <a:pt x="651891" y="677926"/>
+                </a:lnTo>
+                <a:lnTo>
+                  <a:pt x="679323" y="650621"/>
+                </a:lnTo>
+                <a:lnTo>
+                  <a:pt x="682664" y="646938"/>
+                </a:lnTo>
+                <a:lnTo>
+                  <a:pt x="390144" y="646938"/>
+                </a:lnTo>
+                <a:lnTo>
+                  <a:pt x="361442" y="645668"/>
+                </a:lnTo>
+                <a:lnTo>
+                  <a:pt x="306705" y="634492"/>
+                </a:lnTo>
+                <a:lnTo>
+                  <a:pt x="254254" y="613283"/>
+                </a:lnTo>
+                <a:lnTo>
+                  <a:pt x="206882" y="582168"/>
+                </a:lnTo>
+                <a:lnTo>
+                  <a:pt x="183261" y="558546"/>
+                </a:lnTo>
+                <a:lnTo>
+                  <a:pt x="180720" y="554863"/>
+                </a:lnTo>
+                <a:lnTo>
+                  <a:pt x="179450" y="549910"/>
+                </a:lnTo>
+                <a:lnTo>
+                  <a:pt x="178307" y="544830"/>
+                </a:lnTo>
+                <a:lnTo>
+                  <a:pt x="179450" y="541147"/>
+                </a:lnTo>
+                <a:lnTo>
+                  <a:pt x="180720" y="536194"/>
+                </a:lnTo>
+                <a:lnTo>
+                  <a:pt x="203200" y="520065"/>
+                </a:lnTo>
+                <a:lnTo>
+                  <a:pt x="757766" y="520065"/>
+                </a:lnTo>
+                <a:lnTo>
+                  <a:pt x="762762" y="505079"/>
+                </a:lnTo>
+                <a:lnTo>
+                  <a:pt x="767842" y="486410"/>
+                </a:lnTo>
+                <a:lnTo>
+                  <a:pt x="772794" y="467741"/>
+                </a:lnTo>
+                <a:lnTo>
+                  <a:pt x="775335" y="449072"/>
+                </a:lnTo>
+                <a:lnTo>
+                  <a:pt x="775938" y="444119"/>
+                </a:lnTo>
+                <a:lnTo>
+                  <a:pt x="230631" y="444119"/>
+                </a:lnTo>
+                <a:lnTo>
+                  <a:pt x="221869" y="442849"/>
+                </a:lnTo>
+                <a:lnTo>
+                  <a:pt x="189483" y="414274"/>
+                </a:lnTo>
+                <a:lnTo>
+                  <a:pt x="185800" y="395605"/>
+                </a:lnTo>
+                <a:lnTo>
+                  <a:pt x="186944" y="385699"/>
+                </a:lnTo>
+                <a:lnTo>
+                  <a:pt x="213106" y="350774"/>
+                </a:lnTo>
+                <a:lnTo>
+                  <a:pt x="230631" y="347091"/>
+                </a:lnTo>
+                <a:lnTo>
+                  <a:pt x="777440" y="347091"/>
+                </a:lnTo>
+                <a:lnTo>
+                  <a:pt x="775335" y="329692"/>
+                </a:lnTo>
+                <a:lnTo>
+                  <a:pt x="762762" y="273685"/>
+                </a:lnTo>
+                <a:lnTo>
+                  <a:pt x="741552" y="220218"/>
+                </a:lnTo>
+                <a:lnTo>
+                  <a:pt x="714248" y="171704"/>
+                </a:lnTo>
+                <a:lnTo>
+                  <a:pt x="679323" y="128143"/>
+                </a:lnTo>
+                <a:lnTo>
+                  <a:pt x="651891" y="100837"/>
+                </a:lnTo>
+                <a:lnTo>
+                  <a:pt x="608202" y="65912"/>
+                </a:lnTo>
+                <a:lnTo>
+                  <a:pt x="559562" y="38608"/>
+                </a:lnTo>
+                <a:lnTo>
+                  <a:pt x="506094" y="17525"/>
+                </a:lnTo>
+                <a:lnTo>
+                  <a:pt x="468630" y="7493"/>
+                </a:lnTo>
+                <a:lnTo>
+                  <a:pt x="410082" y="0"/>
+                </a:lnTo>
+                <a:close/>
+              </a:path>
+              <a:path w="780288" h="778764">
+                <a:moveTo>
+                  <a:pt x="757766" y="520065"/>
+                </a:moveTo>
+                <a:lnTo>
+                  <a:pt x="577088" y="520065"/>
+                </a:lnTo>
+                <a:lnTo>
+                  <a:pt x="582041" y="521208"/>
+                </a:lnTo>
+                <a:lnTo>
+                  <a:pt x="585851" y="522478"/>
+                </a:lnTo>
+                <a:lnTo>
+                  <a:pt x="600710" y="541147"/>
+                </a:lnTo>
+                <a:lnTo>
+                  <a:pt x="601980" y="544830"/>
+                </a:lnTo>
+                <a:lnTo>
+                  <a:pt x="600710" y="549910"/>
+                </a:lnTo>
+                <a:lnTo>
+                  <a:pt x="599567" y="554863"/>
+                </a:lnTo>
+                <a:lnTo>
+                  <a:pt x="597026" y="558546"/>
+                </a:lnTo>
+                <a:lnTo>
+                  <a:pt x="550926" y="599694"/>
+                </a:lnTo>
+                <a:lnTo>
+                  <a:pt x="501142" y="625729"/>
+                </a:lnTo>
+                <a:lnTo>
+                  <a:pt x="447420" y="641858"/>
+                </a:lnTo>
+                <a:lnTo>
+                  <a:pt x="390144" y="646938"/>
+                </a:lnTo>
+                <a:lnTo>
+                  <a:pt x="682664" y="646938"/>
+                </a:lnTo>
+                <a:lnTo>
+                  <a:pt x="714248" y="607060"/>
+                </a:lnTo>
+                <a:lnTo>
+                  <a:pt x="741552" y="558546"/>
+                </a:lnTo>
+                <a:lnTo>
+                  <a:pt x="756538" y="523748"/>
+                </a:lnTo>
+                <a:lnTo>
+                  <a:pt x="757766" y="520065"/>
+                </a:lnTo>
+                <a:close/>
+              </a:path>
+              <a:path w="780288" h="778764">
+                <a:moveTo>
+                  <a:pt x="577088" y="520065"/>
+                </a:moveTo>
+                <a:lnTo>
+                  <a:pt x="203200" y="520065"/>
+                </a:lnTo>
+                <a:lnTo>
+                  <a:pt x="208152" y="521208"/>
+                </a:lnTo>
+                <a:lnTo>
+                  <a:pt x="213106" y="522478"/>
+                </a:lnTo>
+                <a:lnTo>
+                  <a:pt x="216916" y="525018"/>
+                </a:lnTo>
+                <a:lnTo>
+                  <a:pt x="220599" y="527431"/>
+                </a:lnTo>
+                <a:lnTo>
+                  <a:pt x="239394" y="543687"/>
+                </a:lnTo>
+                <a:lnTo>
+                  <a:pt x="278002" y="569849"/>
+                </a:lnTo>
+                <a:lnTo>
+                  <a:pt x="320294" y="587248"/>
+                </a:lnTo>
+                <a:lnTo>
+                  <a:pt x="366521" y="595884"/>
+                </a:lnTo>
+                <a:lnTo>
+                  <a:pt x="390144" y="597154"/>
+                </a:lnTo>
+                <a:lnTo>
+                  <a:pt x="413766" y="595884"/>
+                </a:lnTo>
+                <a:lnTo>
+                  <a:pt x="459994" y="587248"/>
+                </a:lnTo>
+                <a:lnTo>
+                  <a:pt x="502285" y="569849"/>
+                </a:lnTo>
+                <a:lnTo>
+                  <a:pt x="540893" y="543687"/>
+                </a:lnTo>
+                <a:lnTo>
+                  <a:pt x="559562" y="527431"/>
+                </a:lnTo>
+                <a:lnTo>
+                  <a:pt x="563371" y="525018"/>
+                </a:lnTo>
+                <a:lnTo>
+                  <a:pt x="567182" y="522478"/>
+                </a:lnTo>
+                <a:lnTo>
+                  <a:pt x="572135" y="521208"/>
+                </a:lnTo>
+                <a:lnTo>
+                  <a:pt x="577088" y="520065"/>
+                </a:lnTo>
+                <a:close/>
+              </a:path>
+              <a:path w="780288" h="778764">
+                <a:moveTo>
+                  <a:pt x="549656" y="347091"/>
+                </a:moveTo>
+                <a:lnTo>
+                  <a:pt x="230631" y="347091"/>
+                </a:lnTo>
+                <a:lnTo>
+                  <a:pt x="239394" y="348361"/>
+                </a:lnTo>
+                <a:lnTo>
+                  <a:pt x="248031" y="350774"/>
+                </a:lnTo>
+                <a:lnTo>
+                  <a:pt x="255524" y="355854"/>
+                </a:lnTo>
+                <a:lnTo>
+                  <a:pt x="263017" y="360807"/>
+                </a:lnTo>
+                <a:lnTo>
+                  <a:pt x="267969" y="368300"/>
+                </a:lnTo>
+                <a:lnTo>
+                  <a:pt x="271780" y="376936"/>
+                </a:lnTo>
+                <a:lnTo>
+                  <a:pt x="274193" y="385699"/>
+                </a:lnTo>
+                <a:lnTo>
+                  <a:pt x="275463" y="395605"/>
+                </a:lnTo>
+                <a:lnTo>
+                  <a:pt x="274193" y="405638"/>
+                </a:lnTo>
+                <a:lnTo>
+                  <a:pt x="248031" y="440436"/>
+                </a:lnTo>
+                <a:lnTo>
+                  <a:pt x="230631" y="444119"/>
+                </a:lnTo>
+                <a:lnTo>
+                  <a:pt x="549656" y="444119"/>
+                </a:lnTo>
+                <a:lnTo>
+                  <a:pt x="512318" y="423037"/>
+                </a:lnTo>
+                <a:lnTo>
+                  <a:pt x="504825" y="395605"/>
+                </a:lnTo>
+                <a:lnTo>
+                  <a:pt x="506094" y="385699"/>
+                </a:lnTo>
+                <a:lnTo>
+                  <a:pt x="508507" y="376936"/>
+                </a:lnTo>
+                <a:lnTo>
+                  <a:pt x="512318" y="368300"/>
+                </a:lnTo>
+                <a:lnTo>
+                  <a:pt x="517270" y="360807"/>
+                </a:lnTo>
+                <a:lnTo>
+                  <a:pt x="524763" y="355854"/>
+                </a:lnTo>
+                <a:lnTo>
+                  <a:pt x="532257" y="350774"/>
+                </a:lnTo>
+                <a:lnTo>
+                  <a:pt x="540893" y="348361"/>
+                </a:lnTo>
+                <a:lnTo>
+                  <a:pt x="549656" y="347091"/>
+                </a:lnTo>
+                <a:close/>
+              </a:path>
+              <a:path w="780288" h="778764">
+                <a:moveTo>
+                  <a:pt x="777440" y="347091"/>
+                </a:moveTo>
+                <a:lnTo>
+                  <a:pt x="549656" y="347091"/>
+                </a:lnTo>
+                <a:lnTo>
+                  <a:pt x="558419" y="348361"/>
+                </a:lnTo>
+                <a:lnTo>
+                  <a:pt x="567182" y="350774"/>
+                </a:lnTo>
+                <a:lnTo>
+                  <a:pt x="593344" y="385699"/>
+                </a:lnTo>
+                <a:lnTo>
+                  <a:pt x="594487" y="395605"/>
+                </a:lnTo>
+                <a:lnTo>
+                  <a:pt x="593344" y="405638"/>
+                </a:lnTo>
+                <a:lnTo>
+                  <a:pt x="567182" y="440436"/>
+                </a:lnTo>
+                <a:lnTo>
+                  <a:pt x="549656" y="444119"/>
+                </a:lnTo>
+                <a:lnTo>
+                  <a:pt x="775938" y="444119"/>
+                </a:lnTo>
+                <a:lnTo>
+                  <a:pt x="777748" y="429260"/>
+                </a:lnTo>
+                <a:lnTo>
+                  <a:pt x="780288" y="409321"/>
+                </a:lnTo>
+                <a:lnTo>
+                  <a:pt x="780288" y="369570"/>
+                </a:lnTo>
+                <a:lnTo>
+                  <a:pt x="777748" y="349631"/>
+                </a:lnTo>
+                <a:lnTo>
+                  <a:pt x="777440" y="347091"/>
+                </a:lnTo>
+                <a:close/>
+              </a:path>
+            </a:pathLst>
+          </a:custGeom>
+          <a:solidFill>
+            <a:srgbClr val="FFFFFF"/>
+          </a:solidFill>
+        </p:spPr>
+        <p:txBody>
+          <a:bodyPr wrap="square" lIns="0" tIns="0" rIns="0" bIns="0" rtlCol="0">
+            <a:noAutofit/>
+          </a:bodyPr>
+          <a:lstStyle/>
+          <a:p>
+            <a:endParaRPr dirty="0"/>
+          </a:p>
+        </p:txBody>
+      </p:sp>
+      <p:sp>
+        <p:nvSpPr>
+          <p:cNvPr id="17" name="object 17"/>
+          <p:cNvSpPr txBox="1">
+            <a:spLocks noGrp="1"/>
+          </p:cNvSpPr>
+          <p:nvPr>
+            <p:ph type="sldNum" sz="quarter" idx="7"/>
+          </p:nvPr>
+        </p:nvSpPr>
+        <p:spPr>
+          <a:xfrm>
+            <a:off x="79756" y="5726429"/>
+            <a:ext cx="423163" cy="224029"/>
+          </a:xfrm>
+          <a:prstGeom prst="rect">
+            <a:avLst/>
+          </a:prstGeom>
+        </p:spPr>
+        <p:txBody>
+          <a:bodyPr vert="horz" wrap="square" lIns="0" tIns="0" rIns="0" bIns="0" rtlCol="0" anchor="ctr">
+            <a:noAutofit/>
+          </a:bodyPr>
+          <a:lstStyle/>
+          <a:p>
+            <a:pPr marL="25400"/>
+            <a:fld id="{81D60167-4931-47E6-BA6A-407CBD079E47}" type="slidenum">
+              <a:rPr spc="-10" dirty="0">
+                <a:solidFill>
+                  <a:srgbClr val="18BAD4"/>
+                </a:solidFill>
+                <a:latin typeface="Calibri"/>
+                <a:cs typeface="Calibri"/>
+              </a:rPr>
+              <a:pPr marL="25400"/>
+              <a:t>12</a:t>
+            </a:fld>
+            <a:endParaRPr dirty="0">
+              <a:latin typeface="Calibri"/>
+              <a:cs typeface="Calibri"/>
+            </a:endParaRPr>
+          </a:p>
+        </p:txBody>
+      </p:sp>
+    </p:spTree>
+  </p:cSld>
+  <p:clrMapOvr>
+    <a:masterClrMapping/>
+  </p:clrMapOvr>
+</p:sld>
+</file>
+
 <file path=ppt/slides/slide2.xml><?xml version="1.0" encoding="utf-8"?>
 <p:sld xmlns:a="http://schemas.openxmlformats.org/drawingml/2006/main" xmlns:r="http://schemas.openxmlformats.org/officeDocument/2006/relationships" xmlns:p="http://schemas.openxmlformats.org/presentationml/2006/main">
   <p:cSld>
@@ -5136,6 +8975,1003 @@
   <p:cSld>
     <p:spTree>
       <p:nvGrpSpPr>
+        <p:cNvPr id="1" name="">
+          <a:extLst>
+            <a:ext uri="{FF2B5EF4-FFF2-40B4-BE49-F238E27FC236}">
+              <a16:creationId xmlns:a16="http://schemas.microsoft.com/office/drawing/2014/main" id="{80ACC0E9-2FB3-A450-A476-7680B3B6F00F}"/>
+            </a:ext>
+          </a:extLst>
+        </p:cNvPr>
+        <p:cNvGrpSpPr/>
+        <p:nvPr/>
+      </p:nvGrpSpPr>
+      <p:grpSpPr>
+        <a:xfrm>
+          <a:off x="0" y="0"/>
+          <a:ext cx="0" cy="0"/>
+          <a:chOff x="0" y="0"/>
+          <a:chExt cx="0" cy="0"/>
+        </a:xfrm>
+      </p:grpSpPr>
+      <p:sp>
+        <p:nvSpPr>
+          <p:cNvPr id="4" name="Rectangle 2">
+            <a:extLst>
+              <a:ext uri="{FF2B5EF4-FFF2-40B4-BE49-F238E27FC236}">
+                <a16:creationId xmlns:a16="http://schemas.microsoft.com/office/drawing/2014/main" id="{8002B5CF-3BA5-7C25-67AE-23E40842CFD5}"/>
+              </a:ext>
+            </a:extLst>
+          </p:cNvPr>
+          <p:cNvSpPr txBox="1">
+            <a:spLocks noChangeArrowheads="1"/>
+          </p:cNvSpPr>
+          <p:nvPr/>
+        </p:nvSpPr>
+        <p:spPr>
+          <a:xfrm>
+            <a:off x="0" y="164141"/>
+            <a:ext cx="9144000" cy="1008112"/>
+          </a:xfrm>
+          <a:prstGeom prst="rect">
+            <a:avLst/>
+          </a:prstGeom>
+        </p:spPr>
+        <p:txBody>
+          <a:bodyPr vert="horz" lIns="91440" tIns="45720" rIns="91440" bIns="45720" rtlCol="0" anchor="ctr">
+            <a:normAutofit/>
+          </a:bodyPr>
+          <a:lstStyle>
+            <a:lvl1pPr algn="ctr" defTabSz="914400" rtl="0" eaLnBrk="1" latinLnBrk="0" hangingPunct="1">
+              <a:spcBef>
+                <a:spcPct val="0"/>
+              </a:spcBef>
+              <a:buNone/>
+              <a:defRPr sz="4400" kern="1200">
+                <a:solidFill>
+                  <a:schemeClr val="tx1"/>
+                </a:solidFill>
+                <a:latin typeface="+mj-lt"/>
+                <a:ea typeface="+mj-ea"/>
+                <a:cs typeface="+mj-cs"/>
+              </a:defRPr>
+            </a:lvl1pPr>
+          </a:lstStyle>
+          <a:p>
+            <a:r>
+              <a:rPr lang="es-ES_tradnl" altLang="es-MX" sz="3200" b="1" dirty="0">
+                <a:solidFill>
+                  <a:schemeClr val="accent4">
+                    <a:lumMod val="50000"/>
+                  </a:schemeClr>
+                </a:solidFill>
+                <a:effectLst>
+                  <a:outerShdw blurRad="38100" dist="38100" dir="2700000" algn="tl">
+                    <a:srgbClr val="C0C0C0"/>
+                  </a:outerShdw>
+                </a:effectLst>
+                <a:latin typeface="Dom Casual" charset="0"/>
+              </a:rPr>
+              <a:t>Atributos públicos</a:t>
+            </a:r>
+          </a:p>
+        </p:txBody>
+      </p:sp>
+      <p:sp>
+        <p:nvSpPr>
+          <p:cNvPr id="3" name="CuadroTexto 2">
+            <a:extLst>
+              <a:ext uri="{FF2B5EF4-FFF2-40B4-BE49-F238E27FC236}">
+                <a16:creationId xmlns:a16="http://schemas.microsoft.com/office/drawing/2014/main" id="{59A1954C-0BF7-91D6-7C5F-2205CBAB48D5}"/>
+              </a:ext>
+            </a:extLst>
+          </p:cNvPr>
+          <p:cNvSpPr txBox="1"/>
+          <p:nvPr/>
+        </p:nvSpPr>
+        <p:spPr>
+          <a:xfrm>
+            <a:off x="827584" y="1340768"/>
+            <a:ext cx="7488832" cy="2762295"/>
+          </a:xfrm>
+          <a:prstGeom prst="rect">
+            <a:avLst/>
+          </a:prstGeom>
+          <a:noFill/>
+        </p:spPr>
+        <p:txBody>
+          <a:bodyPr wrap="square">
+            <a:spAutoFit/>
+          </a:bodyPr>
+          <a:lstStyle/>
+          <a:p>
+            <a:pPr rtl="0">
+              <a:lnSpc>
+                <a:spcPts val="1500"/>
+              </a:lnSpc>
+              <a:spcBef>
+                <a:spcPts val="2100"/>
+              </a:spcBef>
+              <a:spcAft>
+                <a:spcPts val="600"/>
+              </a:spcAft>
+              <a:buNone/>
+            </a:pPr>
+            <a:r>
+              <a:rPr lang="es-MX" b="1" dirty="0">
+                <a:solidFill>
+                  <a:schemeClr val="accent6">
+                    <a:lumMod val="75000"/>
+                  </a:schemeClr>
+                </a:solidFill>
+                <a:effectLst/>
+                <a:latin typeface="Google Sans Flex"/>
+              </a:rPr>
+              <a:t>1. Atributo Público (</a:t>
+            </a:r>
+            <a:r>
+              <a:rPr lang="es-MX" b="0" dirty="0" err="1">
+                <a:solidFill>
+                  <a:schemeClr val="accent6">
+                    <a:lumMod val="75000"/>
+                  </a:schemeClr>
+                </a:solidFill>
+                <a:effectLst/>
+                <a:latin typeface="Google Sans Mono"/>
+              </a:rPr>
+              <a:t>public</a:t>
+            </a:r>
+            <a:r>
+              <a:rPr lang="es-MX" b="1" dirty="0">
+                <a:solidFill>
+                  <a:schemeClr val="accent6">
+                    <a:lumMod val="75000"/>
+                  </a:schemeClr>
+                </a:solidFill>
+                <a:effectLst/>
+                <a:latin typeface="Google Sans Flex"/>
+              </a:rPr>
+              <a:t>)</a:t>
+            </a:r>
+          </a:p>
+          <a:p>
+            <a:pPr algn="just" rtl="0">
+              <a:spcAft>
+                <a:spcPts val="600"/>
+              </a:spcAft>
+              <a:buNone/>
+            </a:pPr>
+            <a:r>
+              <a:rPr lang="es-MX" b="0" dirty="0">
+                <a:solidFill>
+                  <a:srgbClr val="1F1F1F"/>
+                </a:solidFill>
+                <a:effectLst/>
+                <a:latin typeface="Google Sans Flex"/>
+              </a:rPr>
+              <a:t>Es un atributo accesible desde </a:t>
+            </a:r>
+            <a:r>
+              <a:rPr lang="es-MX" b="1" dirty="0">
+                <a:solidFill>
+                  <a:srgbClr val="1F1F1F"/>
+                </a:solidFill>
+                <a:effectLst/>
+                <a:latin typeface="Google Sans Flex"/>
+              </a:rPr>
+              <a:t>cualquier lugar</a:t>
+            </a:r>
+            <a:r>
+              <a:rPr lang="es-MX" b="0" dirty="0">
+                <a:solidFill>
+                  <a:srgbClr val="1F1F1F"/>
+                </a:solidFill>
+                <a:effectLst/>
+                <a:latin typeface="Google Sans Flex"/>
+              </a:rPr>
+              <a:t> del programa.</a:t>
+            </a:r>
+          </a:p>
+          <a:p>
+            <a:pPr marL="285750" indent="-285750" algn="just" rtl="0">
+              <a:spcBef>
+                <a:spcPts val="600"/>
+              </a:spcBef>
+              <a:spcAft>
+                <a:spcPts val="600"/>
+              </a:spcAft>
+              <a:buFont typeface="Arial" panose="020B0604020202020204" pitchFamily="34" charset="0"/>
+              <a:buChar char="•"/>
+            </a:pPr>
+            <a:r>
+              <a:rPr lang="es-MX" b="1" dirty="0">
+                <a:solidFill>
+                  <a:srgbClr val="1F1F1F"/>
+                </a:solidFill>
+                <a:effectLst/>
+                <a:latin typeface="Google Sans Flex"/>
+              </a:rPr>
+              <a:t>Acceso:</a:t>
+            </a:r>
+            <a:r>
+              <a:rPr lang="es-MX" b="0" dirty="0">
+                <a:solidFill>
+                  <a:srgbClr val="1F1F1F"/>
+                </a:solidFill>
+                <a:effectLst/>
+                <a:latin typeface="Google Sans Flex"/>
+              </a:rPr>
+              <a:t> Directo desde la propia clase, desde clases heredadas y desde instancias (objetos) externas.</a:t>
+            </a:r>
+          </a:p>
+          <a:p>
+            <a:pPr marL="285750" indent="-285750" algn="just" rtl="0">
+              <a:spcBef>
+                <a:spcPts val="600"/>
+              </a:spcBef>
+              <a:spcAft>
+                <a:spcPts val="600"/>
+              </a:spcAft>
+              <a:buFont typeface="Arial" panose="020B0604020202020204" pitchFamily="34" charset="0"/>
+              <a:buChar char="•"/>
+            </a:pPr>
+            <a:r>
+              <a:rPr lang="es-MX" b="1" dirty="0">
+                <a:solidFill>
+                  <a:srgbClr val="1F1F1F"/>
+                </a:solidFill>
+                <a:effectLst/>
+                <a:latin typeface="Google Sans Flex"/>
+              </a:rPr>
+              <a:t>Seguridad:</a:t>
+            </a:r>
+            <a:r>
+              <a:rPr lang="es-MX" b="0" dirty="0">
+                <a:solidFill>
+                  <a:srgbClr val="1F1F1F"/>
+                </a:solidFill>
+                <a:effectLst/>
+                <a:latin typeface="Google Sans Flex"/>
+              </a:rPr>
+              <a:t> Baja. Cualquier parte del código puede modificar el valor sin restricciones.</a:t>
+            </a:r>
+          </a:p>
+          <a:p>
+            <a:pPr marL="285750" indent="-285750" algn="just" rtl="0">
+              <a:spcBef>
+                <a:spcPts val="600"/>
+              </a:spcBef>
+              <a:spcAft>
+                <a:spcPts val="600"/>
+              </a:spcAft>
+              <a:buFont typeface="Arial" panose="020B0604020202020204" pitchFamily="34" charset="0"/>
+              <a:buChar char="•"/>
+            </a:pPr>
+            <a:r>
+              <a:rPr lang="es-MX" b="1" dirty="0">
+                <a:solidFill>
+                  <a:srgbClr val="1F1F1F"/>
+                </a:solidFill>
+                <a:effectLst/>
+                <a:latin typeface="Google Sans Flex"/>
+              </a:rPr>
+              <a:t>Uso:</a:t>
+            </a:r>
+            <a:r>
+              <a:rPr lang="es-MX" b="0" dirty="0">
+                <a:solidFill>
+                  <a:srgbClr val="1F1F1F"/>
+                </a:solidFill>
+                <a:effectLst/>
+                <a:latin typeface="Google Sans Flex"/>
+              </a:rPr>
+              <a:t> Para datos que son seguros de exponer o que necesitan ser modificados frecuentemente por otros objetos.</a:t>
+            </a:r>
+          </a:p>
+        </p:txBody>
+      </p:sp>
+      <p:pic>
+        <p:nvPicPr>
+          <p:cNvPr id="5" name="Imagen 4">
+            <a:extLst>
+              <a:ext uri="{FF2B5EF4-FFF2-40B4-BE49-F238E27FC236}">
+                <a16:creationId xmlns:a16="http://schemas.microsoft.com/office/drawing/2014/main" id="{8D1CA2F1-2096-D714-9F93-38A5237E0AC8}"/>
+              </a:ext>
+            </a:extLst>
+          </p:cNvPr>
+          <p:cNvPicPr>
+            <a:picLocks noChangeAspect="1"/>
+          </p:cNvPicPr>
+          <p:nvPr/>
+        </p:nvPicPr>
+        <p:blipFill>
+          <a:blip r:embed="rId2"/>
+          <a:stretch>
+            <a:fillRect/>
+          </a:stretch>
+        </p:blipFill>
+        <p:spPr>
+          <a:xfrm>
+            <a:off x="5148064" y="4221088"/>
+            <a:ext cx="2981741" cy="2343477"/>
+          </a:xfrm>
+          <a:prstGeom prst="rect">
+            <a:avLst/>
+          </a:prstGeom>
+        </p:spPr>
+      </p:pic>
+    </p:spTree>
+    <p:extLst>
+      <p:ext uri="{BB962C8B-B14F-4D97-AF65-F5344CB8AC3E}">
+        <p14:creationId xmlns:p14="http://schemas.microsoft.com/office/powerpoint/2010/main" val="118615350"/>
+      </p:ext>
+    </p:extLst>
+  </p:cSld>
+  <p:clrMapOvr>
+    <a:masterClrMapping/>
+  </p:clrMapOvr>
+</p:sld>
+</file>
+
+<file path=ppt/slides/slide5.xml><?xml version="1.0" encoding="utf-8"?>
+<p:sld xmlns:a="http://schemas.openxmlformats.org/drawingml/2006/main" xmlns:r="http://schemas.openxmlformats.org/officeDocument/2006/relationships" xmlns:p="http://schemas.openxmlformats.org/presentationml/2006/main">
+  <p:cSld>
+    <p:spTree>
+      <p:nvGrpSpPr>
+        <p:cNvPr id="1" name="">
+          <a:extLst>
+            <a:ext uri="{FF2B5EF4-FFF2-40B4-BE49-F238E27FC236}">
+              <a16:creationId xmlns:a16="http://schemas.microsoft.com/office/drawing/2014/main" id="{62F946E3-7E8D-D5ED-789F-59D8EA2BB7E4}"/>
+            </a:ext>
+          </a:extLst>
+        </p:cNvPr>
+        <p:cNvGrpSpPr/>
+        <p:nvPr/>
+      </p:nvGrpSpPr>
+      <p:grpSpPr>
+        <a:xfrm>
+          <a:off x="0" y="0"/>
+          <a:ext cx="0" cy="0"/>
+          <a:chOff x="0" y="0"/>
+          <a:chExt cx="0" cy="0"/>
+        </a:xfrm>
+      </p:grpSpPr>
+      <p:sp>
+        <p:nvSpPr>
+          <p:cNvPr id="4" name="Rectangle 2">
+            <a:extLst>
+              <a:ext uri="{FF2B5EF4-FFF2-40B4-BE49-F238E27FC236}">
+                <a16:creationId xmlns:a16="http://schemas.microsoft.com/office/drawing/2014/main" id="{52600C6A-A4CE-782C-1E7B-1F867FBDC852}"/>
+              </a:ext>
+            </a:extLst>
+          </p:cNvPr>
+          <p:cNvSpPr txBox="1">
+            <a:spLocks noChangeArrowheads="1"/>
+          </p:cNvSpPr>
+          <p:nvPr/>
+        </p:nvSpPr>
+        <p:spPr>
+          <a:xfrm>
+            <a:off x="0" y="88043"/>
+            <a:ext cx="9144000" cy="1008112"/>
+          </a:xfrm>
+          <a:prstGeom prst="rect">
+            <a:avLst/>
+          </a:prstGeom>
+        </p:spPr>
+        <p:txBody>
+          <a:bodyPr vert="horz" lIns="91440" tIns="45720" rIns="91440" bIns="45720" rtlCol="0" anchor="ctr">
+            <a:normAutofit/>
+          </a:bodyPr>
+          <a:lstStyle>
+            <a:lvl1pPr algn="ctr" defTabSz="914400" rtl="0" eaLnBrk="1" latinLnBrk="0" hangingPunct="1">
+              <a:spcBef>
+                <a:spcPct val="0"/>
+              </a:spcBef>
+              <a:buNone/>
+              <a:defRPr sz="4400" kern="1200">
+                <a:solidFill>
+                  <a:schemeClr val="tx1"/>
+                </a:solidFill>
+                <a:latin typeface="+mj-lt"/>
+                <a:ea typeface="+mj-ea"/>
+                <a:cs typeface="+mj-cs"/>
+              </a:defRPr>
+            </a:lvl1pPr>
+          </a:lstStyle>
+          <a:p>
+            <a:r>
+              <a:rPr lang="es-ES_tradnl" altLang="es-MX" sz="3200" b="1" dirty="0">
+                <a:solidFill>
+                  <a:schemeClr val="accent4">
+                    <a:lumMod val="50000"/>
+                  </a:schemeClr>
+                </a:solidFill>
+                <a:effectLst>
+                  <a:outerShdw blurRad="38100" dist="38100" dir="2700000" algn="tl">
+                    <a:srgbClr val="C0C0C0"/>
+                  </a:outerShdw>
+                </a:effectLst>
+                <a:latin typeface="Dom Casual" charset="0"/>
+              </a:rPr>
+              <a:t>Encapsulación : atributos privados</a:t>
+            </a:r>
+          </a:p>
+        </p:txBody>
+      </p:sp>
+      <p:sp>
+        <p:nvSpPr>
+          <p:cNvPr id="3" name="CuadroTexto 2">
+            <a:extLst>
+              <a:ext uri="{FF2B5EF4-FFF2-40B4-BE49-F238E27FC236}">
+                <a16:creationId xmlns:a16="http://schemas.microsoft.com/office/drawing/2014/main" id="{18BA93F3-3CAF-D4BE-8698-F39F2D6F93B8}"/>
+              </a:ext>
+            </a:extLst>
+          </p:cNvPr>
+          <p:cNvSpPr txBox="1"/>
+          <p:nvPr/>
+        </p:nvSpPr>
+        <p:spPr>
+          <a:xfrm>
+            <a:off x="1043608" y="1415033"/>
+            <a:ext cx="7344816" cy="1304203"/>
+          </a:xfrm>
+          <a:prstGeom prst="rect">
+            <a:avLst/>
+          </a:prstGeom>
+          <a:noFill/>
+        </p:spPr>
+        <p:txBody>
+          <a:bodyPr wrap="square">
+            <a:spAutoFit/>
+          </a:bodyPr>
+          <a:lstStyle/>
+          <a:p>
+            <a:pPr rtl="0">
+              <a:lnSpc>
+                <a:spcPts val="1500"/>
+              </a:lnSpc>
+              <a:spcBef>
+                <a:spcPts val="2100"/>
+              </a:spcBef>
+              <a:spcAft>
+                <a:spcPts val="600"/>
+              </a:spcAft>
+              <a:buNone/>
+            </a:pPr>
+            <a:r>
+              <a:rPr lang="es-MX" b="1" dirty="0">
+                <a:solidFill>
+                  <a:schemeClr val="accent6">
+                    <a:lumMod val="75000"/>
+                  </a:schemeClr>
+                </a:solidFill>
+                <a:effectLst/>
+                <a:latin typeface="Google Sans Flex"/>
+              </a:rPr>
+              <a:t>2. Atributo Privado (</a:t>
+            </a:r>
+            <a:r>
+              <a:rPr lang="es-MX" b="0" dirty="0" err="1">
+                <a:solidFill>
+                  <a:schemeClr val="accent6">
+                    <a:lumMod val="75000"/>
+                  </a:schemeClr>
+                </a:solidFill>
+                <a:effectLst/>
+                <a:latin typeface="Google Sans Mono"/>
+              </a:rPr>
+              <a:t>private</a:t>
+            </a:r>
+            <a:r>
+              <a:rPr lang="es-MX" b="1" dirty="0">
+                <a:solidFill>
+                  <a:schemeClr val="accent6">
+                    <a:lumMod val="75000"/>
+                  </a:schemeClr>
+                </a:solidFill>
+                <a:effectLst/>
+                <a:latin typeface="Google Sans Flex"/>
+              </a:rPr>
+              <a:t>)</a:t>
+            </a:r>
+          </a:p>
+          <a:p>
+            <a:pPr algn="just">
+              <a:lnSpc>
+                <a:spcPts val="2500"/>
+              </a:lnSpc>
+              <a:spcAft>
+                <a:spcPts val="600"/>
+              </a:spcAft>
+            </a:pPr>
+            <a:r>
+              <a:rPr lang="es-MX" b="1" dirty="0">
+                <a:solidFill>
+                  <a:srgbClr val="1F1F1F"/>
+                </a:solidFill>
+                <a:latin typeface="Google Sans Flex"/>
+              </a:rPr>
+              <a:t>(_atributo): </a:t>
+            </a:r>
+            <a:r>
+              <a:rPr lang="es-MX" dirty="0">
+                <a:solidFill>
+                  <a:srgbClr val="1F1F1F"/>
+                </a:solidFill>
+                <a:latin typeface="Google Sans Flex"/>
+              </a:rPr>
+              <a:t>Un guion bajo al principio indica a otros programadores: "Este atributo es interno, no lo uses fuera de la clase". Python no te impedirá acceder a él, pero es una norma de cortesía entre desarrolladores.</a:t>
+            </a:r>
+            <a:endParaRPr lang="es-MX" b="0" dirty="0">
+              <a:solidFill>
+                <a:srgbClr val="1F1F1F"/>
+              </a:solidFill>
+              <a:effectLst/>
+              <a:latin typeface="Google Sans Flex"/>
+            </a:endParaRPr>
+          </a:p>
+        </p:txBody>
+      </p:sp>
+      <p:pic>
+        <p:nvPicPr>
+          <p:cNvPr id="6" name="Imagen 5">
+            <a:extLst>
+              <a:ext uri="{FF2B5EF4-FFF2-40B4-BE49-F238E27FC236}">
+                <a16:creationId xmlns:a16="http://schemas.microsoft.com/office/drawing/2014/main" id="{9D373540-466E-D9F9-F3FA-1460FE691F98}"/>
+              </a:ext>
+            </a:extLst>
+          </p:cNvPr>
+          <p:cNvPicPr>
+            <a:picLocks noChangeAspect="1"/>
+          </p:cNvPicPr>
+          <p:nvPr/>
+        </p:nvPicPr>
+        <p:blipFill>
+          <a:blip r:embed="rId2"/>
+          <a:stretch>
+            <a:fillRect/>
+          </a:stretch>
+        </p:blipFill>
+        <p:spPr>
+          <a:xfrm>
+            <a:off x="2699792" y="3038114"/>
+            <a:ext cx="3963109" cy="3059025"/>
+          </a:xfrm>
+          <a:prstGeom prst="rect">
+            <a:avLst/>
+          </a:prstGeom>
+        </p:spPr>
+      </p:pic>
+    </p:spTree>
+    <p:extLst>
+      <p:ext uri="{BB962C8B-B14F-4D97-AF65-F5344CB8AC3E}">
+        <p14:creationId xmlns:p14="http://schemas.microsoft.com/office/powerpoint/2010/main" val="712346558"/>
+      </p:ext>
+    </p:extLst>
+  </p:cSld>
+  <p:clrMapOvr>
+    <a:masterClrMapping/>
+  </p:clrMapOvr>
+</p:sld>
+</file>
+
+<file path=ppt/slides/slide6.xml><?xml version="1.0" encoding="utf-8"?>
+<p:sld xmlns:a="http://schemas.openxmlformats.org/drawingml/2006/main" xmlns:r="http://schemas.openxmlformats.org/officeDocument/2006/relationships" xmlns:p="http://schemas.openxmlformats.org/presentationml/2006/main">
+  <p:cSld>
+    <p:spTree>
+      <p:nvGrpSpPr>
+        <p:cNvPr id="1" name="">
+          <a:extLst>
+            <a:ext uri="{FF2B5EF4-FFF2-40B4-BE49-F238E27FC236}">
+              <a16:creationId xmlns:a16="http://schemas.microsoft.com/office/drawing/2014/main" id="{A318386C-A429-2889-CACB-E0C586661941}"/>
+            </a:ext>
+          </a:extLst>
+        </p:cNvPr>
+        <p:cNvGrpSpPr/>
+        <p:nvPr/>
+      </p:nvGrpSpPr>
+      <p:grpSpPr>
+        <a:xfrm>
+          <a:off x="0" y="0"/>
+          <a:ext cx="0" cy="0"/>
+          <a:chOff x="0" y="0"/>
+          <a:chExt cx="0" cy="0"/>
+        </a:xfrm>
+      </p:grpSpPr>
+      <p:sp>
+        <p:nvSpPr>
+          <p:cNvPr id="4" name="Rectangle 2">
+            <a:extLst>
+              <a:ext uri="{FF2B5EF4-FFF2-40B4-BE49-F238E27FC236}">
+                <a16:creationId xmlns:a16="http://schemas.microsoft.com/office/drawing/2014/main" id="{DBE63BE9-3012-EA71-30D0-9910634A8C1E}"/>
+              </a:ext>
+            </a:extLst>
+          </p:cNvPr>
+          <p:cNvSpPr txBox="1">
+            <a:spLocks noChangeArrowheads="1"/>
+          </p:cNvSpPr>
+          <p:nvPr/>
+        </p:nvSpPr>
+        <p:spPr>
+          <a:xfrm>
+            <a:off x="0" y="116632"/>
+            <a:ext cx="9144000" cy="1008112"/>
+          </a:xfrm>
+          <a:prstGeom prst="rect">
+            <a:avLst/>
+          </a:prstGeom>
+        </p:spPr>
+        <p:txBody>
+          <a:bodyPr vert="horz" lIns="91440" tIns="45720" rIns="91440" bIns="45720" rtlCol="0" anchor="ctr">
+            <a:normAutofit/>
+          </a:bodyPr>
+          <a:lstStyle>
+            <a:lvl1pPr algn="ctr" defTabSz="914400" rtl="0" eaLnBrk="1" latinLnBrk="0" hangingPunct="1">
+              <a:spcBef>
+                <a:spcPct val="0"/>
+              </a:spcBef>
+              <a:buNone/>
+              <a:defRPr sz="4400" kern="1200">
+                <a:solidFill>
+                  <a:schemeClr val="tx1"/>
+                </a:solidFill>
+                <a:latin typeface="+mj-lt"/>
+                <a:ea typeface="+mj-ea"/>
+                <a:cs typeface="+mj-cs"/>
+              </a:defRPr>
+            </a:lvl1pPr>
+          </a:lstStyle>
+          <a:p>
+            <a:r>
+              <a:rPr lang="es-ES_tradnl" altLang="es-MX" sz="3200" b="1" dirty="0">
+                <a:solidFill>
+                  <a:schemeClr val="accent4">
+                    <a:lumMod val="50000"/>
+                  </a:schemeClr>
+                </a:solidFill>
+                <a:effectLst>
+                  <a:outerShdw blurRad="38100" dist="38100" dir="2700000" algn="tl">
+                    <a:srgbClr val="C0C0C0"/>
+                  </a:outerShdw>
+                </a:effectLst>
+                <a:latin typeface="Dom Casual" charset="0"/>
+              </a:rPr>
+              <a:t>Encapsulación : atributos privados</a:t>
+            </a:r>
+          </a:p>
+        </p:txBody>
+      </p:sp>
+      <p:sp>
+        <p:nvSpPr>
+          <p:cNvPr id="3" name="CuadroTexto 2">
+            <a:extLst>
+              <a:ext uri="{FF2B5EF4-FFF2-40B4-BE49-F238E27FC236}">
+                <a16:creationId xmlns:a16="http://schemas.microsoft.com/office/drawing/2014/main" id="{2BD8B9D4-F869-089C-B7A4-FD7DAF5A7711}"/>
+              </a:ext>
+            </a:extLst>
+          </p:cNvPr>
+          <p:cNvSpPr txBox="1"/>
+          <p:nvPr/>
+        </p:nvSpPr>
+        <p:spPr>
+          <a:xfrm>
+            <a:off x="1115616" y="1340768"/>
+            <a:ext cx="7200800" cy="4398640"/>
+          </a:xfrm>
+          <a:prstGeom prst="rect">
+            <a:avLst/>
+          </a:prstGeom>
+          <a:noFill/>
+        </p:spPr>
+        <p:txBody>
+          <a:bodyPr wrap="square">
+            <a:spAutoFit/>
+          </a:bodyPr>
+          <a:lstStyle/>
+          <a:p>
+            <a:pPr rtl="0">
+              <a:lnSpc>
+                <a:spcPts val="1500"/>
+              </a:lnSpc>
+              <a:spcBef>
+                <a:spcPts val="2100"/>
+              </a:spcBef>
+              <a:spcAft>
+                <a:spcPts val="600"/>
+              </a:spcAft>
+              <a:buNone/>
+            </a:pPr>
+            <a:r>
+              <a:rPr lang="es-MX" b="1" dirty="0">
+                <a:solidFill>
+                  <a:schemeClr val="accent6">
+                    <a:lumMod val="75000"/>
+                  </a:schemeClr>
+                </a:solidFill>
+                <a:effectLst/>
+                <a:latin typeface="Google Sans Flex"/>
+              </a:rPr>
+              <a:t>2. Atributo Privado (</a:t>
+            </a:r>
+            <a:r>
+              <a:rPr lang="es-MX" b="0" dirty="0" err="1">
+                <a:solidFill>
+                  <a:schemeClr val="accent6">
+                    <a:lumMod val="75000"/>
+                  </a:schemeClr>
+                </a:solidFill>
+                <a:effectLst/>
+                <a:latin typeface="Google Sans Mono"/>
+              </a:rPr>
+              <a:t>private</a:t>
+            </a:r>
+            <a:r>
+              <a:rPr lang="es-MX" b="1" dirty="0">
+                <a:solidFill>
+                  <a:schemeClr val="accent6">
+                    <a:lumMod val="75000"/>
+                  </a:schemeClr>
+                </a:solidFill>
+                <a:effectLst/>
+                <a:latin typeface="Google Sans Flex"/>
+              </a:rPr>
+              <a:t>)</a:t>
+            </a:r>
+          </a:p>
+          <a:p>
+            <a:pPr algn="just">
+              <a:lnSpc>
+                <a:spcPts val="2500"/>
+              </a:lnSpc>
+              <a:spcAft>
+                <a:spcPts val="600"/>
+              </a:spcAft>
+            </a:pPr>
+            <a:r>
+              <a:rPr lang="es-MX" b="1" dirty="0"/>
+              <a:t>(__atributo):</a:t>
+            </a:r>
+            <a:r>
+              <a:rPr lang="es-MX" dirty="0"/>
+              <a:t> Dos guiones bajos al principio hacen que Python </a:t>
+            </a:r>
+            <a:r>
+              <a:rPr lang="es-MX" b="1" dirty="0"/>
+              <a:t>cambie internamente el nombre</a:t>
+            </a:r>
+            <a:r>
+              <a:rPr lang="es-MX" dirty="0"/>
+              <a:t> del atributo. Si tienes una clase </a:t>
+            </a:r>
+            <a:r>
+              <a:rPr lang="es-MX" b="1" dirty="0"/>
+              <a:t>Persona</a:t>
+            </a:r>
+            <a:r>
+              <a:rPr lang="es-MX" dirty="0"/>
+              <a:t> y un atributo </a:t>
+            </a:r>
+            <a:r>
+              <a:rPr lang="es-MX" b="1" dirty="0"/>
+              <a:t>__edad</a:t>
+            </a:r>
+            <a:r>
+              <a:rPr lang="es-MX" dirty="0"/>
+              <a:t>, Python lo renombrará a </a:t>
+            </a:r>
+            <a:r>
+              <a:rPr lang="es-MX" b="1" dirty="0"/>
+              <a:t>_</a:t>
+            </a:r>
+            <a:r>
+              <a:rPr lang="es-MX" b="1" dirty="0" err="1"/>
+              <a:t>Persona__edad</a:t>
+            </a:r>
+            <a:r>
+              <a:rPr lang="es-MX" dirty="0"/>
+              <a:t>. Esto hace más difícil acceder a él por error desde fuera o desde subclases.</a:t>
+            </a:r>
+            <a:endParaRPr lang="es-MX" dirty="0">
+              <a:solidFill>
+                <a:srgbClr val="1F1F1F"/>
+              </a:solidFill>
+              <a:latin typeface="Google Sans Flex"/>
+            </a:endParaRPr>
+          </a:p>
+          <a:p>
+            <a:pPr algn="just" rtl="0">
+              <a:spcAft>
+                <a:spcPts val="600"/>
+              </a:spcAft>
+              <a:buNone/>
+            </a:pPr>
+            <a:r>
+              <a:rPr lang="es-MX" b="0" dirty="0">
+                <a:solidFill>
+                  <a:srgbClr val="1F1F1F"/>
+                </a:solidFill>
+                <a:effectLst/>
+                <a:latin typeface="Google Sans Flex"/>
+              </a:rPr>
+              <a:t>Es un atributo accesible </a:t>
+            </a:r>
+            <a:r>
+              <a:rPr lang="es-MX" b="1" dirty="0">
+                <a:solidFill>
+                  <a:srgbClr val="1F1F1F"/>
+                </a:solidFill>
+                <a:effectLst/>
+                <a:latin typeface="Google Sans Flex"/>
+              </a:rPr>
+              <a:t>únicamente dentro de la clase</a:t>
+            </a:r>
+            <a:r>
+              <a:rPr lang="es-MX" b="0" dirty="0">
+                <a:solidFill>
+                  <a:srgbClr val="1F1F1F"/>
+                </a:solidFill>
+                <a:effectLst/>
+                <a:latin typeface="Google Sans Flex"/>
+              </a:rPr>
+              <a:t> que lo define.</a:t>
+            </a:r>
+          </a:p>
+          <a:p>
+            <a:pPr marL="285750" indent="-285750" algn="just" rtl="0">
+              <a:spcBef>
+                <a:spcPts val="600"/>
+              </a:spcBef>
+              <a:spcAft>
+                <a:spcPts val="600"/>
+              </a:spcAft>
+              <a:buFont typeface="Arial" panose="020B0604020202020204" pitchFamily="34" charset="0"/>
+              <a:buChar char="•"/>
+            </a:pPr>
+            <a:r>
+              <a:rPr lang="es-MX" b="1" dirty="0">
+                <a:solidFill>
+                  <a:srgbClr val="1F1F1F"/>
+                </a:solidFill>
+                <a:effectLst/>
+                <a:latin typeface="Google Sans Flex"/>
+              </a:rPr>
+              <a:t>Acceso:</a:t>
+            </a:r>
+            <a:r>
+              <a:rPr lang="es-MX" b="0" dirty="0">
+                <a:solidFill>
+                  <a:srgbClr val="1F1F1F"/>
+                </a:solidFill>
+                <a:effectLst/>
+                <a:latin typeface="Google Sans Flex"/>
+              </a:rPr>
+              <a:t> Directo solo por los métodos internos de la propia clase.</a:t>
+            </a:r>
+          </a:p>
+          <a:p>
+            <a:pPr marL="285750" indent="-285750" algn="just" rtl="0">
+              <a:spcBef>
+                <a:spcPts val="600"/>
+              </a:spcBef>
+              <a:spcAft>
+                <a:spcPts val="600"/>
+              </a:spcAft>
+              <a:buFont typeface="Arial" panose="020B0604020202020204" pitchFamily="34" charset="0"/>
+              <a:buChar char="•"/>
+            </a:pPr>
+            <a:r>
+              <a:rPr lang="es-MX" b="1" dirty="0">
+                <a:solidFill>
+                  <a:srgbClr val="1F1F1F"/>
+                </a:solidFill>
+                <a:effectLst/>
+                <a:latin typeface="Google Sans Flex"/>
+              </a:rPr>
+              <a:t>Seguridad:</a:t>
+            </a:r>
+            <a:r>
+              <a:rPr lang="es-MX" b="0" dirty="0">
+                <a:solidFill>
+                  <a:srgbClr val="1F1F1F"/>
+                </a:solidFill>
+                <a:effectLst/>
+                <a:latin typeface="Google Sans Flex"/>
+              </a:rPr>
+              <a:t> Alta. Protege la integridad de los datos, impidiendo que el exterior modifique el estado interno del objeto de forma inesperada.</a:t>
+            </a:r>
+          </a:p>
+          <a:p>
+            <a:pPr marL="285750" indent="-285750" algn="just" rtl="0">
+              <a:spcBef>
+                <a:spcPts val="600"/>
+              </a:spcBef>
+              <a:spcAft>
+                <a:spcPts val="600"/>
+              </a:spcAft>
+              <a:buFont typeface="Arial" panose="020B0604020202020204" pitchFamily="34" charset="0"/>
+              <a:buChar char="•"/>
+            </a:pPr>
+            <a:r>
+              <a:rPr lang="es-MX" b="1" dirty="0">
+                <a:solidFill>
+                  <a:srgbClr val="1F1F1F"/>
+                </a:solidFill>
+                <a:effectLst/>
+                <a:latin typeface="Google Sans Flex"/>
+              </a:rPr>
+              <a:t>Uso:</a:t>
+            </a:r>
+            <a:r>
+              <a:rPr lang="es-MX" b="0" dirty="0">
+                <a:solidFill>
+                  <a:srgbClr val="1F1F1F"/>
+                </a:solidFill>
+                <a:effectLst/>
+                <a:latin typeface="Google Sans Flex"/>
+              </a:rPr>
+              <a:t> Para datos sensibles o internos que no deben ser manipulados directamente desde fuera. Para interactuar con ellos, se suelen utilizar métodos públicos especiales llamados </a:t>
+            </a:r>
+            <a:r>
+              <a:rPr lang="es-MX" b="1" i="1" dirty="0" err="1">
+                <a:solidFill>
+                  <a:srgbClr val="1F1F1F"/>
+                </a:solidFill>
+                <a:effectLst/>
+                <a:latin typeface="Google Sans Flex"/>
+              </a:rPr>
+              <a:t>Getters</a:t>
+            </a:r>
+            <a:r>
+              <a:rPr lang="es-MX" b="0" dirty="0">
+                <a:solidFill>
+                  <a:srgbClr val="1F1F1F"/>
+                </a:solidFill>
+                <a:effectLst/>
+                <a:latin typeface="Google Sans Flex"/>
+              </a:rPr>
+              <a:t> (para leer) y </a:t>
+            </a:r>
+            <a:r>
+              <a:rPr lang="es-MX" b="1" i="1" dirty="0" err="1">
+                <a:solidFill>
+                  <a:srgbClr val="1F1F1F"/>
+                </a:solidFill>
+                <a:effectLst/>
+                <a:latin typeface="Google Sans Flex"/>
+              </a:rPr>
+              <a:t>Setters</a:t>
+            </a:r>
+            <a:r>
+              <a:rPr lang="es-MX" b="0" dirty="0">
+                <a:solidFill>
+                  <a:srgbClr val="1F1F1F"/>
+                </a:solidFill>
+                <a:effectLst/>
+                <a:latin typeface="Google Sans Flex"/>
+              </a:rPr>
+              <a:t> (para modificar).</a:t>
+            </a:r>
+          </a:p>
+        </p:txBody>
+      </p:sp>
+    </p:spTree>
+    <p:extLst>
+      <p:ext uri="{BB962C8B-B14F-4D97-AF65-F5344CB8AC3E}">
+        <p14:creationId xmlns:p14="http://schemas.microsoft.com/office/powerpoint/2010/main" val="2485710823"/>
+      </p:ext>
+    </p:extLst>
+  </p:cSld>
+  <p:clrMapOvr>
+    <a:masterClrMapping/>
+  </p:clrMapOvr>
+</p:sld>
+</file>
+
+<file path=ppt/slides/slide7.xml><?xml version="1.0" encoding="utf-8"?>
+<p:sld xmlns:a="http://schemas.openxmlformats.org/drawingml/2006/main" xmlns:r="http://schemas.openxmlformats.org/officeDocument/2006/relationships" xmlns:p="http://schemas.openxmlformats.org/presentationml/2006/main">
+  <p:cSld>
+    <p:spTree>
+      <p:nvGrpSpPr>
         <p:cNvPr id="1" name=""/>
         <p:cNvGrpSpPr/>
         <p:nvPr/>
@@ -5462,7 +10298,7 @@
 </p:sld>
 </file>
 
-<file path=ppt/slides/slide5.xml><?xml version="1.0" encoding="utf-8"?>
+<file path=ppt/slides/slide8.xml><?xml version="1.0" encoding="utf-8"?>
 <p:sld xmlns:a="http://schemas.openxmlformats.org/drawingml/2006/main" xmlns:r="http://schemas.openxmlformats.org/officeDocument/2006/relationships" xmlns:p="http://schemas.openxmlformats.org/presentationml/2006/main">
   <p:cSld>
     <p:spTree>
@@ -5929,7 +10765,7 @@
 </p:sld>
 </file>
 
-<file path=ppt/slides/slide6.xml><?xml version="1.0" encoding="utf-8"?>
+<file path=ppt/slides/slide9.xml><?xml version="1.0" encoding="utf-8"?>
 <p:sld xmlns:a="http://schemas.openxmlformats.org/drawingml/2006/main" xmlns:r="http://schemas.openxmlformats.org/officeDocument/2006/relationships" xmlns:p="http://schemas.openxmlformats.org/presentationml/2006/main">
   <p:cSld>
     <p:spTree>
@@ -6474,3812 +11310,6 @@
         <p14:creationId xmlns:p14="http://schemas.microsoft.com/office/powerpoint/2010/main" val="2179863281"/>
       </p:ext>
     </p:extLst>
-  </p:cSld>
-  <p:clrMapOvr>
-    <a:masterClrMapping/>
-  </p:clrMapOvr>
-</p:sld>
-</file>
-
-<file path=ppt/slides/slide7.xml><?xml version="1.0" encoding="utf-8"?>
-<p:sld xmlns:a="http://schemas.openxmlformats.org/drawingml/2006/main" xmlns:r="http://schemas.openxmlformats.org/officeDocument/2006/relationships" xmlns:p="http://schemas.openxmlformats.org/presentationml/2006/main">
-  <p:cSld>
-    <p:spTree>
-      <p:nvGrpSpPr>
-        <p:cNvPr id="1" name=""/>
-        <p:cNvGrpSpPr/>
-        <p:nvPr/>
-      </p:nvGrpSpPr>
-      <p:grpSpPr>
-        <a:xfrm>
-          <a:off x="0" y="0"/>
-          <a:ext cx="0" cy="0"/>
-          <a:chOff x="0" y="0"/>
-          <a:chExt cx="0" cy="0"/>
-        </a:xfrm>
-      </p:grpSpPr>
-      <p:sp>
-        <p:nvSpPr>
-          <p:cNvPr id="4" name="Rectangle 2">
-            <a:extLst>
-              <a:ext uri="{FF2B5EF4-FFF2-40B4-BE49-F238E27FC236}">
-                <a16:creationId xmlns:a16="http://schemas.microsoft.com/office/drawing/2014/main" id="{7CE40F4F-E91D-42FD-B661-EAA8BC18ABC8}"/>
-              </a:ext>
-            </a:extLst>
-          </p:cNvPr>
-          <p:cNvSpPr txBox="1">
-            <a:spLocks noChangeArrowheads="1"/>
-          </p:cNvSpPr>
-          <p:nvPr/>
-        </p:nvSpPr>
-        <p:spPr>
-          <a:xfrm>
-            <a:off x="0" y="-27383"/>
-            <a:ext cx="9144000" cy="1008112"/>
-          </a:xfrm>
-          <a:prstGeom prst="rect">
-            <a:avLst/>
-          </a:prstGeom>
-        </p:spPr>
-        <p:txBody>
-          <a:bodyPr vert="horz" lIns="91440" tIns="45720" rIns="91440" bIns="45720" rtlCol="0" anchor="ctr">
-            <a:normAutofit/>
-          </a:bodyPr>
-          <a:lstStyle>
-            <a:lvl1pPr algn="ctr" defTabSz="914400" rtl="0" eaLnBrk="1" latinLnBrk="0" hangingPunct="1">
-              <a:spcBef>
-                <a:spcPct val="0"/>
-              </a:spcBef>
-              <a:buNone/>
-              <a:defRPr sz="4400" kern="1200">
-                <a:solidFill>
-                  <a:schemeClr val="tx1"/>
-                </a:solidFill>
-                <a:latin typeface="+mj-lt"/>
-                <a:ea typeface="+mj-ea"/>
-                <a:cs typeface="+mj-cs"/>
-              </a:defRPr>
-            </a:lvl1pPr>
-          </a:lstStyle>
-          <a:p>
-            <a:r>
-              <a:rPr lang="es-ES_tradnl" altLang="es-MX" sz="3200" b="1" dirty="0">
-                <a:solidFill>
-                  <a:schemeClr val="accent4">
-                    <a:lumMod val="50000"/>
-                  </a:schemeClr>
-                </a:solidFill>
-                <a:effectLst>
-                  <a:outerShdw blurRad="38100" dist="38100" dir="2700000" algn="tl">
-                    <a:srgbClr val="C0C0C0"/>
-                  </a:outerShdw>
-                </a:effectLst>
-                <a:latin typeface="Dom Casual" charset="0"/>
-              </a:rPr>
-              <a:t>Encapsulación : atributos privados</a:t>
-            </a:r>
-          </a:p>
-        </p:txBody>
-      </p:sp>
-      <p:sp>
-        <p:nvSpPr>
-          <p:cNvPr id="10" name="CuadroTexto 9">
-            <a:extLst>
-              <a:ext uri="{FF2B5EF4-FFF2-40B4-BE49-F238E27FC236}">
-                <a16:creationId xmlns:a16="http://schemas.microsoft.com/office/drawing/2014/main" id="{B73C42C7-85D9-4D9B-B558-211E4812A4BA}"/>
-              </a:ext>
-            </a:extLst>
-          </p:cNvPr>
-          <p:cNvSpPr txBox="1"/>
-          <p:nvPr/>
-        </p:nvSpPr>
-        <p:spPr>
-          <a:xfrm>
-            <a:off x="467544" y="1071605"/>
-            <a:ext cx="7992888" cy="1989904"/>
-          </a:xfrm>
-          <a:prstGeom prst="rect">
-            <a:avLst/>
-          </a:prstGeom>
-          <a:noFill/>
-        </p:spPr>
-        <p:txBody>
-          <a:bodyPr wrap="square" rtlCol="0">
-            <a:spAutoFit/>
-          </a:bodyPr>
-          <a:lstStyle/>
-          <a:p>
-            <a:pPr algn="just">
-              <a:lnSpc>
-                <a:spcPts val="2500"/>
-              </a:lnSpc>
-            </a:pPr>
-            <a:r>
-              <a:rPr lang="es-ES" sz="1600" dirty="0">
-                <a:solidFill>
-                  <a:schemeClr val="tx1">
-                    <a:lumMod val="95000"/>
-                    <a:lumOff val="5000"/>
-                  </a:schemeClr>
-                </a:solidFill>
-              </a:rPr>
-              <a:t>Los </a:t>
-            </a:r>
-            <a:r>
-              <a:rPr lang="es-ES" sz="1600" b="1" dirty="0">
-                <a:solidFill>
-                  <a:srgbClr val="0070C0"/>
-                </a:solidFill>
-              </a:rPr>
-              <a:t>atributos de clase </a:t>
-            </a:r>
-            <a:r>
-              <a:rPr lang="es-ES" sz="1600" dirty="0">
-                <a:solidFill>
-                  <a:schemeClr val="tx1">
-                    <a:lumMod val="95000"/>
-                    <a:lumOff val="5000"/>
-                  </a:schemeClr>
-                </a:solidFill>
-              </a:rPr>
-              <a:t>pueden ocultarse para que no sean accedidos desde fuera de la definición de una clase. Para ello, es necesario nombrar los atributos con un prefijo de doble subrayado: </a:t>
-            </a:r>
-            <a:r>
-              <a:rPr lang="es-ES" sz="1600" b="1" dirty="0">
-                <a:solidFill>
-                  <a:schemeClr val="accent6">
-                    <a:lumMod val="75000"/>
-                  </a:schemeClr>
-                </a:solidFill>
-              </a:rPr>
-              <a:t>__atributo</a:t>
-            </a:r>
-          </a:p>
-          <a:p>
-            <a:pPr algn="just">
-              <a:lnSpc>
-                <a:spcPts val="2500"/>
-              </a:lnSpc>
-            </a:pPr>
-            <a:endParaRPr lang="es-ES" sz="1600" b="1" dirty="0">
-              <a:solidFill>
-                <a:schemeClr val="accent6">
-                  <a:lumMod val="75000"/>
-                </a:schemeClr>
-              </a:solidFill>
-            </a:endParaRPr>
-          </a:p>
-          <a:p>
-            <a:pPr algn="just">
-              <a:lnSpc>
-                <a:spcPts val="2500"/>
-              </a:lnSpc>
-            </a:pPr>
-            <a:endParaRPr lang="es-ES" sz="1600" b="1" dirty="0">
-              <a:solidFill>
-                <a:schemeClr val="accent6">
-                  <a:lumMod val="75000"/>
-                </a:schemeClr>
-              </a:solidFill>
-            </a:endParaRPr>
-          </a:p>
-          <a:p>
-            <a:pPr algn="just">
-              <a:lnSpc>
-                <a:spcPts val="2500"/>
-              </a:lnSpc>
-            </a:pPr>
-            <a:endParaRPr lang="es-ES" sz="1600" b="1" dirty="0">
-              <a:solidFill>
-                <a:schemeClr val="accent6">
-                  <a:lumMod val="75000"/>
-                </a:schemeClr>
-              </a:solidFill>
-            </a:endParaRPr>
-          </a:p>
-        </p:txBody>
-      </p:sp>
-      <p:sp>
-        <p:nvSpPr>
-          <p:cNvPr id="5" name="Rectangle 3">
-            <a:extLst>
-              <a:ext uri="{FF2B5EF4-FFF2-40B4-BE49-F238E27FC236}">
-                <a16:creationId xmlns:a16="http://schemas.microsoft.com/office/drawing/2014/main" id="{1288C872-2009-4CB2-825E-4AA3461EF388}"/>
-              </a:ext>
-            </a:extLst>
-          </p:cNvPr>
-          <p:cNvSpPr>
-            <a:spLocks noChangeArrowheads="1"/>
-          </p:cNvSpPr>
-          <p:nvPr/>
-        </p:nvSpPr>
-        <p:spPr bwMode="auto">
-          <a:xfrm>
-            <a:off x="467544" y="2348880"/>
-            <a:ext cx="4887566" cy="3647152"/>
-          </a:xfrm>
-          <a:prstGeom prst="rect">
-            <a:avLst/>
-          </a:prstGeom>
-          <a:solidFill>
-            <a:srgbClr val="FFFFFF"/>
-          </a:solidFill>
-          <a:ln>
-            <a:noFill/>
-          </a:ln>
-          <a:effectLst/>
-          <a:extLst>
-            <a:ext uri="{91240B29-F687-4F45-9708-019B960494DF}">
-              <a14:hiddenLine xmlns:a14="http://schemas.microsoft.com/office/drawing/2010/main" w="9525">
-                <a:solidFill>
-                  <a:schemeClr val="tx1"/>
-                </a:solidFill>
-                <a:miter lim="800000"/>
-                <a:headEnd/>
-                <a:tailEnd/>
-              </a14:hiddenLine>
-            </a:ext>
-            <a:ext uri="{AF507438-7753-43E0-B8FC-AC1667EBCBE1}">
-              <a14:hiddenEffects xmlns:a14="http://schemas.microsoft.com/office/drawing/2010/main">
-                <a:effectLst>
-                  <a:outerShdw dist="35921" dir="2700000" algn="ctr" rotWithShape="0">
-                    <a:schemeClr val="bg2"/>
-                  </a:outerShdw>
-                </a:effectLst>
-              </a14:hiddenEffects>
-            </a:ext>
-          </a:extLst>
-        </p:spPr>
-        <p:txBody>
-          <a:bodyPr vert="horz" wrap="square" lIns="91440" tIns="45720" rIns="91440" bIns="45720" numCol="1" anchor="ctr" anchorCtr="0" compatLnSpc="1">
-            <a:prstTxWarp prst="textNoShape">
-              <a:avLst/>
-            </a:prstTxWarp>
-            <a:spAutoFit/>
-          </a:bodyPr>
-          <a:lstStyle/>
-          <a:p>
-            <a:pPr marL="0" marR="0" lvl="0" indent="0" algn="l" defTabSz="914400" rtl="0" eaLnBrk="0" fontAlgn="base" latinLnBrk="0" hangingPunct="0">
-              <a:lnSpc>
-                <a:spcPct val="100000"/>
-              </a:lnSpc>
-              <a:spcBef>
-                <a:spcPct val="0"/>
-              </a:spcBef>
-              <a:spcAft>
-                <a:spcPct val="0"/>
-              </a:spcAft>
-              <a:buClrTx/>
-              <a:buSzTx/>
-              <a:buFontTx/>
-              <a:buNone/>
-              <a:tabLst/>
-            </a:pPr>
-            <a:r>
-              <a:rPr kumimoji="0" lang="es-MX" altLang="es-MX" sz="1200" i="0" u="none" strike="noStrike" cap="none" normalizeH="0" baseline="0" dirty="0">
-                <a:ln>
-                  <a:noFill/>
-                </a:ln>
-                <a:solidFill>
-                  <a:srgbClr val="000088"/>
-                </a:solidFill>
-                <a:effectLst/>
-                <a:latin typeface="Courier New" panose="02070309020205020404" pitchFamily="49" charset="0"/>
-                <a:cs typeface="Courier New" panose="02070309020205020404" pitchFamily="49" charset="0"/>
-              </a:rPr>
-              <a:t>class</a:t>
-            </a:r>
-            <a:r>
-              <a:rPr kumimoji="0" lang="es-MX" altLang="es-MX" sz="1200" i="0" u="none" strike="noStrike" cap="none" normalizeH="0" baseline="0" dirty="0">
-                <a:ln>
-                  <a:noFill/>
-                </a:ln>
-                <a:solidFill>
-                  <a:srgbClr val="000000"/>
-                </a:solidFill>
-                <a:effectLst/>
-                <a:latin typeface="Courier New" panose="02070309020205020404" pitchFamily="49" charset="0"/>
-                <a:cs typeface="Courier New" panose="02070309020205020404" pitchFamily="49" charset="0"/>
-              </a:rPr>
-              <a:t> </a:t>
-            </a:r>
-            <a:r>
-              <a:rPr kumimoji="0" lang="es-MX" altLang="es-MX" sz="1200" i="0" u="none" strike="noStrike" cap="none" normalizeH="0" baseline="0" dirty="0">
-                <a:ln>
-                  <a:noFill/>
-                </a:ln>
-                <a:solidFill>
-                  <a:srgbClr val="660066"/>
-                </a:solidFill>
-                <a:effectLst/>
-                <a:latin typeface="Courier New" panose="02070309020205020404" pitchFamily="49" charset="0"/>
-                <a:cs typeface="Courier New" panose="02070309020205020404" pitchFamily="49" charset="0"/>
-              </a:rPr>
-              <a:t>Factura</a:t>
-            </a:r>
-            <a:r>
-              <a:rPr kumimoji="0" lang="es-MX" altLang="es-MX" sz="1200" i="0" u="none" strike="noStrike" cap="none" normalizeH="0" baseline="0" dirty="0">
-                <a:ln>
-                  <a:noFill/>
-                </a:ln>
-                <a:solidFill>
-                  <a:srgbClr val="666600"/>
-                </a:solidFill>
-                <a:effectLst/>
-                <a:latin typeface="Courier New" panose="02070309020205020404" pitchFamily="49" charset="0"/>
-                <a:cs typeface="Courier New" panose="02070309020205020404" pitchFamily="49" charset="0"/>
-              </a:rPr>
-              <a:t>:</a:t>
-            </a:r>
-            <a:r>
-              <a:rPr kumimoji="0" lang="es-MX" altLang="es-MX" sz="1200" i="0" u="none" strike="noStrike" cap="none" normalizeH="0" baseline="0" dirty="0">
-                <a:ln>
-                  <a:noFill/>
-                </a:ln>
-                <a:solidFill>
-                  <a:srgbClr val="000000"/>
-                </a:solidFill>
-                <a:effectLst/>
-                <a:latin typeface="Courier New" panose="02070309020205020404" pitchFamily="49" charset="0"/>
-                <a:cs typeface="Courier New" panose="02070309020205020404" pitchFamily="49" charset="0"/>
-              </a:rPr>
-              <a:t> </a:t>
-            </a:r>
-          </a:p>
-          <a:p>
-            <a:pPr marL="0" marR="0" lvl="0" indent="0" algn="l" defTabSz="914400" rtl="0" eaLnBrk="0" fontAlgn="base" latinLnBrk="0" hangingPunct="0">
-              <a:lnSpc>
-                <a:spcPct val="100000"/>
-              </a:lnSpc>
-              <a:spcBef>
-                <a:spcPct val="0"/>
-              </a:spcBef>
-              <a:spcAft>
-                <a:spcPct val="0"/>
-              </a:spcAft>
-              <a:buClrTx/>
-              <a:buSzTx/>
-              <a:buFontTx/>
-              <a:buNone/>
-              <a:tabLst/>
-            </a:pPr>
-            <a:r>
-              <a:rPr lang="es-MX" altLang="es-MX" sz="1200" dirty="0">
-                <a:solidFill>
-                  <a:srgbClr val="000000"/>
-                </a:solidFill>
-                <a:latin typeface="Courier New" panose="02070309020205020404" pitchFamily="49" charset="0"/>
-                <a:cs typeface="Courier New" panose="02070309020205020404" pitchFamily="49" charset="0"/>
-              </a:rPr>
-              <a:t>      </a:t>
-            </a:r>
-            <a:r>
-              <a:rPr kumimoji="0" lang="es-MX" altLang="es-MX" sz="1200" i="0" u="none" strike="noStrike" cap="none" normalizeH="0" baseline="0" dirty="0">
-                <a:ln>
-                  <a:noFill/>
-                </a:ln>
-                <a:solidFill>
-                  <a:srgbClr val="000000"/>
-                </a:solidFill>
-                <a:effectLst/>
-                <a:highlight>
-                  <a:srgbClr val="FFFF00"/>
-                </a:highlight>
-                <a:latin typeface="Courier New" panose="02070309020205020404" pitchFamily="49" charset="0"/>
-                <a:cs typeface="Courier New" panose="02070309020205020404" pitchFamily="49" charset="0"/>
-              </a:rPr>
-              <a:t>__tasa </a:t>
-            </a:r>
-            <a:r>
-              <a:rPr kumimoji="0" lang="es-MX" altLang="es-MX" sz="1200" i="0" u="none" strike="noStrike" cap="none" normalizeH="0" baseline="0" dirty="0">
-                <a:ln>
-                  <a:noFill/>
-                </a:ln>
-                <a:solidFill>
-                  <a:srgbClr val="666600"/>
-                </a:solidFill>
-                <a:effectLst/>
-                <a:highlight>
-                  <a:srgbClr val="FFFF00"/>
-                </a:highlight>
-                <a:latin typeface="Courier New" panose="02070309020205020404" pitchFamily="49" charset="0"/>
-                <a:cs typeface="Courier New" panose="02070309020205020404" pitchFamily="49" charset="0"/>
-              </a:rPr>
-              <a:t>=</a:t>
-            </a:r>
-            <a:r>
-              <a:rPr kumimoji="0" lang="es-MX" altLang="es-MX" sz="1200" i="0" u="none" strike="noStrike" cap="none" normalizeH="0" baseline="0" dirty="0">
-                <a:ln>
-                  <a:noFill/>
-                </a:ln>
-                <a:solidFill>
-                  <a:srgbClr val="000000"/>
-                </a:solidFill>
-                <a:effectLst/>
-                <a:highlight>
-                  <a:srgbClr val="FFFF00"/>
-                </a:highlight>
-                <a:latin typeface="Courier New" panose="02070309020205020404" pitchFamily="49" charset="0"/>
-                <a:cs typeface="Courier New" panose="02070309020205020404" pitchFamily="49" charset="0"/>
-              </a:rPr>
-              <a:t> </a:t>
-            </a:r>
-            <a:r>
-              <a:rPr kumimoji="0" lang="es-MX" altLang="es-MX" sz="1200" i="0" u="none" strike="noStrike" cap="none" normalizeH="0" baseline="0" dirty="0">
-                <a:ln>
-                  <a:noFill/>
-                </a:ln>
-                <a:solidFill>
-                  <a:srgbClr val="006666"/>
-                </a:solidFill>
-                <a:effectLst/>
-                <a:highlight>
-                  <a:srgbClr val="FFFF00"/>
-                </a:highlight>
-                <a:latin typeface="Courier New" panose="02070309020205020404" pitchFamily="49" charset="0"/>
-                <a:cs typeface="Courier New" panose="02070309020205020404" pitchFamily="49" charset="0"/>
-              </a:rPr>
-              <a:t>19</a:t>
-            </a:r>
-            <a:r>
-              <a:rPr kumimoji="0" lang="es-MX" altLang="es-MX" sz="1200" i="0" u="none" strike="noStrike" cap="none" normalizeH="0" baseline="0" dirty="0">
-                <a:ln>
-                  <a:noFill/>
-                </a:ln>
-                <a:solidFill>
-                  <a:srgbClr val="000000"/>
-                </a:solidFill>
-                <a:effectLst/>
-                <a:highlight>
-                  <a:srgbClr val="FFFF00"/>
-                </a:highlight>
-                <a:latin typeface="Courier New" panose="02070309020205020404" pitchFamily="49" charset="0"/>
-                <a:cs typeface="Courier New" panose="02070309020205020404" pitchFamily="49" charset="0"/>
-              </a:rPr>
-              <a:t> </a:t>
-            </a:r>
-          </a:p>
-          <a:p>
-            <a:pPr marL="0" marR="0" lvl="0" indent="0" algn="l" defTabSz="914400" rtl="0" eaLnBrk="0" fontAlgn="base" latinLnBrk="0" hangingPunct="0">
-              <a:lnSpc>
-                <a:spcPct val="100000"/>
-              </a:lnSpc>
-              <a:spcBef>
-                <a:spcPct val="0"/>
-              </a:spcBef>
-              <a:spcAft>
-                <a:spcPct val="0"/>
-              </a:spcAft>
-              <a:buClrTx/>
-              <a:buSzTx/>
-              <a:buFontTx/>
-              <a:buNone/>
-              <a:tabLst/>
-            </a:pPr>
-            <a:r>
-              <a:rPr kumimoji="0" lang="es-MX" altLang="es-MX" sz="1200" i="0" u="none" strike="noStrike" cap="none" normalizeH="0" baseline="0" dirty="0">
-                <a:ln>
-                  <a:noFill/>
-                </a:ln>
-                <a:solidFill>
-                  <a:srgbClr val="000088"/>
-                </a:solidFill>
-                <a:effectLst/>
-                <a:latin typeface="Courier New" panose="02070309020205020404" pitchFamily="49" charset="0"/>
-                <a:cs typeface="Courier New" panose="02070309020205020404" pitchFamily="49" charset="0"/>
-              </a:rPr>
-              <a:t>      </a:t>
-            </a:r>
-          </a:p>
-          <a:p>
-            <a:pPr marL="0" marR="0" lvl="0" indent="0" algn="l" defTabSz="914400" rtl="0" eaLnBrk="0" fontAlgn="base" latinLnBrk="0" hangingPunct="0">
-              <a:lnSpc>
-                <a:spcPct val="100000"/>
-              </a:lnSpc>
-              <a:spcBef>
-                <a:spcPct val="0"/>
-              </a:spcBef>
-              <a:spcAft>
-                <a:spcPct val="0"/>
-              </a:spcAft>
-              <a:buClrTx/>
-              <a:buSzTx/>
-              <a:buFontTx/>
-              <a:buNone/>
-              <a:tabLst/>
-            </a:pPr>
-            <a:r>
-              <a:rPr lang="es-MX" altLang="es-MX" sz="1200" dirty="0">
-                <a:solidFill>
-                  <a:srgbClr val="000088"/>
-                </a:solidFill>
-                <a:latin typeface="Courier New" panose="02070309020205020404" pitchFamily="49" charset="0"/>
-                <a:cs typeface="Courier New" panose="02070309020205020404" pitchFamily="49" charset="0"/>
-              </a:rPr>
-              <a:t>      </a:t>
-            </a:r>
-            <a:r>
-              <a:rPr kumimoji="0" lang="es-MX" altLang="es-MX" sz="1200" i="0" u="none" strike="noStrike" cap="none" normalizeH="0" baseline="0" dirty="0">
-                <a:ln>
-                  <a:noFill/>
-                </a:ln>
-                <a:solidFill>
-                  <a:srgbClr val="000088"/>
-                </a:solidFill>
-                <a:effectLst/>
-                <a:latin typeface="Courier New" panose="02070309020205020404" pitchFamily="49" charset="0"/>
-                <a:cs typeface="Courier New" panose="02070309020205020404" pitchFamily="49" charset="0"/>
-              </a:rPr>
-              <a:t>def</a:t>
-            </a:r>
-            <a:r>
-              <a:rPr kumimoji="0" lang="es-MX" altLang="es-MX" sz="1200" i="0" u="none" strike="noStrike" cap="none" normalizeH="0" baseline="0" dirty="0">
-                <a:ln>
-                  <a:noFill/>
-                </a:ln>
-                <a:solidFill>
-                  <a:srgbClr val="000000"/>
-                </a:solidFill>
-                <a:effectLst/>
-                <a:latin typeface="Courier New" panose="02070309020205020404" pitchFamily="49" charset="0"/>
-                <a:cs typeface="Courier New" panose="02070309020205020404" pitchFamily="49" charset="0"/>
-              </a:rPr>
-              <a:t> __init__</a:t>
-            </a:r>
-            <a:r>
-              <a:rPr kumimoji="0" lang="es-MX" altLang="es-MX" sz="1200" i="0" u="none" strike="noStrike" cap="none" normalizeH="0" baseline="0" dirty="0">
-                <a:ln>
-                  <a:noFill/>
-                </a:ln>
-                <a:solidFill>
-                  <a:srgbClr val="666600"/>
-                </a:solidFill>
-                <a:effectLst/>
-                <a:latin typeface="Courier New" panose="02070309020205020404" pitchFamily="49" charset="0"/>
-                <a:cs typeface="Courier New" panose="02070309020205020404" pitchFamily="49" charset="0"/>
-              </a:rPr>
-              <a:t>(</a:t>
-            </a:r>
-            <a:r>
-              <a:rPr kumimoji="0" lang="es-MX" altLang="es-MX" sz="1200" i="0" u="none" strike="noStrike" cap="none" normalizeH="0" baseline="0" dirty="0">
-                <a:ln>
-                  <a:noFill/>
-                </a:ln>
-                <a:solidFill>
-                  <a:srgbClr val="000088"/>
-                </a:solidFill>
-                <a:effectLst/>
-                <a:latin typeface="Courier New" panose="02070309020205020404" pitchFamily="49" charset="0"/>
-                <a:cs typeface="Courier New" panose="02070309020205020404" pitchFamily="49" charset="0"/>
-              </a:rPr>
-              <a:t>self</a:t>
-            </a:r>
-            <a:r>
-              <a:rPr kumimoji="0" lang="es-MX" altLang="es-MX" sz="1200" i="0" u="none" strike="noStrike" cap="none" normalizeH="0" baseline="0" dirty="0">
-                <a:ln>
-                  <a:noFill/>
-                </a:ln>
-                <a:solidFill>
-                  <a:srgbClr val="666600"/>
-                </a:solidFill>
-                <a:effectLst/>
-                <a:latin typeface="Courier New" panose="02070309020205020404" pitchFamily="49" charset="0"/>
-                <a:cs typeface="Courier New" panose="02070309020205020404" pitchFamily="49" charset="0"/>
-              </a:rPr>
-              <a:t>,</a:t>
-            </a:r>
-            <a:r>
-              <a:rPr kumimoji="0" lang="es-MX" altLang="es-MX" sz="1200" i="0" u="none" strike="noStrike" cap="none" normalizeH="0" baseline="0" dirty="0">
-                <a:ln>
-                  <a:noFill/>
-                </a:ln>
-                <a:solidFill>
-                  <a:srgbClr val="000000"/>
-                </a:solidFill>
-                <a:effectLst/>
-                <a:latin typeface="Courier New" panose="02070309020205020404" pitchFamily="49" charset="0"/>
-                <a:cs typeface="Courier New" panose="02070309020205020404" pitchFamily="49" charset="0"/>
-              </a:rPr>
-              <a:t> unidad</a:t>
-            </a:r>
-            <a:r>
-              <a:rPr kumimoji="0" lang="es-MX" altLang="es-MX" sz="1200" i="0" u="none" strike="noStrike" cap="none" normalizeH="0" baseline="0" dirty="0">
-                <a:ln>
-                  <a:noFill/>
-                </a:ln>
-                <a:solidFill>
-                  <a:srgbClr val="666600"/>
-                </a:solidFill>
-                <a:effectLst/>
-                <a:latin typeface="Courier New" panose="02070309020205020404" pitchFamily="49" charset="0"/>
-                <a:cs typeface="Courier New" panose="02070309020205020404" pitchFamily="49" charset="0"/>
-              </a:rPr>
-              <a:t>,</a:t>
-            </a:r>
-            <a:r>
-              <a:rPr kumimoji="0" lang="es-MX" altLang="es-MX" sz="1200" i="0" u="none" strike="noStrike" cap="none" normalizeH="0" baseline="0" dirty="0">
-                <a:ln>
-                  <a:noFill/>
-                </a:ln>
-                <a:solidFill>
-                  <a:srgbClr val="000000"/>
-                </a:solidFill>
-                <a:effectLst/>
-                <a:latin typeface="Courier New" panose="02070309020205020404" pitchFamily="49" charset="0"/>
-                <a:cs typeface="Courier New" panose="02070309020205020404" pitchFamily="49" charset="0"/>
-              </a:rPr>
-              <a:t> precio</a:t>
-            </a:r>
-            <a:r>
-              <a:rPr kumimoji="0" lang="es-MX" altLang="es-MX" sz="1200" i="0" u="none" strike="noStrike" cap="none" normalizeH="0" baseline="0" dirty="0">
-                <a:ln>
-                  <a:noFill/>
-                </a:ln>
-                <a:solidFill>
-                  <a:srgbClr val="666600"/>
-                </a:solidFill>
-                <a:effectLst/>
-                <a:latin typeface="Courier New" panose="02070309020205020404" pitchFamily="49" charset="0"/>
-                <a:cs typeface="Courier New" panose="02070309020205020404" pitchFamily="49" charset="0"/>
-              </a:rPr>
-              <a:t>):</a:t>
-            </a:r>
-            <a:r>
-              <a:rPr kumimoji="0" lang="es-MX" altLang="es-MX" sz="1200" i="0" u="none" strike="noStrike" cap="none" normalizeH="0" baseline="0" dirty="0">
-                <a:ln>
-                  <a:noFill/>
-                </a:ln>
-                <a:solidFill>
-                  <a:srgbClr val="000000"/>
-                </a:solidFill>
-                <a:effectLst/>
-                <a:latin typeface="Courier New" panose="02070309020205020404" pitchFamily="49" charset="0"/>
-                <a:cs typeface="Courier New" panose="02070309020205020404" pitchFamily="49" charset="0"/>
-              </a:rPr>
-              <a:t> </a:t>
-            </a:r>
-          </a:p>
-          <a:p>
-            <a:pPr marL="0" marR="0" lvl="0" indent="0" algn="l" defTabSz="914400" rtl="0" eaLnBrk="0" fontAlgn="base" latinLnBrk="0" hangingPunct="0">
-              <a:lnSpc>
-                <a:spcPct val="100000"/>
-              </a:lnSpc>
-              <a:spcBef>
-                <a:spcPct val="0"/>
-              </a:spcBef>
-              <a:spcAft>
-                <a:spcPct val="0"/>
-              </a:spcAft>
-              <a:buClrTx/>
-              <a:buSzTx/>
-              <a:buFontTx/>
-              <a:buNone/>
-              <a:tabLst/>
-            </a:pPr>
-            <a:r>
-              <a:rPr kumimoji="0" lang="es-MX" altLang="es-MX" sz="1200" i="0" u="none" strike="noStrike" cap="none" normalizeH="0" baseline="0" dirty="0">
-                <a:ln>
-                  <a:noFill/>
-                </a:ln>
-                <a:solidFill>
-                  <a:srgbClr val="000000"/>
-                </a:solidFill>
-                <a:effectLst/>
-                <a:latin typeface="Courier New" panose="02070309020205020404" pitchFamily="49" charset="0"/>
-                <a:cs typeface="Courier New" panose="02070309020205020404" pitchFamily="49" charset="0"/>
-              </a:rPr>
-              <a:t>            </a:t>
-            </a:r>
-            <a:r>
-              <a:rPr kumimoji="0" lang="es-MX" altLang="es-MX" sz="1200" i="0" u="none" strike="noStrike" cap="none" normalizeH="0" baseline="0" dirty="0">
-                <a:ln>
-                  <a:noFill/>
-                </a:ln>
-                <a:solidFill>
-                  <a:srgbClr val="000088"/>
-                </a:solidFill>
-                <a:effectLst/>
-                <a:latin typeface="Courier New" panose="02070309020205020404" pitchFamily="49" charset="0"/>
-                <a:cs typeface="Courier New" panose="02070309020205020404" pitchFamily="49" charset="0"/>
-              </a:rPr>
-              <a:t>self</a:t>
-            </a:r>
-            <a:r>
-              <a:rPr kumimoji="0" lang="es-MX" altLang="es-MX" sz="1200" i="0" u="none" strike="noStrike" cap="none" normalizeH="0" baseline="0" dirty="0">
-                <a:ln>
-                  <a:noFill/>
-                </a:ln>
-                <a:solidFill>
-                  <a:srgbClr val="666600"/>
-                </a:solidFill>
-                <a:effectLst/>
-                <a:latin typeface="Courier New" panose="02070309020205020404" pitchFamily="49" charset="0"/>
-                <a:cs typeface="Courier New" panose="02070309020205020404" pitchFamily="49" charset="0"/>
-              </a:rPr>
-              <a:t>.</a:t>
-            </a:r>
-            <a:r>
-              <a:rPr kumimoji="0" lang="es-MX" altLang="es-MX" sz="1200" i="0" u="none" strike="noStrike" cap="none" normalizeH="0" baseline="0" dirty="0">
-                <a:ln>
-                  <a:noFill/>
-                </a:ln>
-                <a:solidFill>
-                  <a:srgbClr val="000000"/>
-                </a:solidFill>
-                <a:effectLst/>
-                <a:latin typeface="Courier New" panose="02070309020205020404" pitchFamily="49" charset="0"/>
-                <a:cs typeface="Courier New" panose="02070309020205020404" pitchFamily="49" charset="0"/>
-              </a:rPr>
-              <a:t>unidad </a:t>
-            </a:r>
-            <a:r>
-              <a:rPr kumimoji="0" lang="es-MX" altLang="es-MX" sz="1200" i="0" u="none" strike="noStrike" cap="none" normalizeH="0" baseline="0" dirty="0">
-                <a:ln>
-                  <a:noFill/>
-                </a:ln>
-                <a:solidFill>
-                  <a:srgbClr val="666600"/>
-                </a:solidFill>
-                <a:effectLst/>
-                <a:latin typeface="Courier New" panose="02070309020205020404" pitchFamily="49" charset="0"/>
-                <a:cs typeface="Courier New" panose="02070309020205020404" pitchFamily="49" charset="0"/>
-              </a:rPr>
-              <a:t>=</a:t>
-            </a:r>
-            <a:r>
-              <a:rPr kumimoji="0" lang="es-MX" altLang="es-MX" sz="1200" i="0" u="none" strike="noStrike" cap="none" normalizeH="0" baseline="0" dirty="0">
-                <a:ln>
-                  <a:noFill/>
-                </a:ln>
-                <a:solidFill>
-                  <a:srgbClr val="000000"/>
-                </a:solidFill>
-                <a:effectLst/>
-                <a:latin typeface="Courier New" panose="02070309020205020404" pitchFamily="49" charset="0"/>
-                <a:cs typeface="Courier New" panose="02070309020205020404" pitchFamily="49" charset="0"/>
-              </a:rPr>
-              <a:t> unidad </a:t>
-            </a:r>
-          </a:p>
-          <a:p>
-            <a:pPr marL="0" marR="0" lvl="0" indent="0" algn="l" defTabSz="914400" rtl="0" eaLnBrk="0" fontAlgn="base" latinLnBrk="0" hangingPunct="0">
-              <a:lnSpc>
-                <a:spcPct val="100000"/>
-              </a:lnSpc>
-              <a:spcBef>
-                <a:spcPct val="0"/>
-              </a:spcBef>
-              <a:spcAft>
-                <a:spcPct val="0"/>
-              </a:spcAft>
-              <a:buClrTx/>
-              <a:buSzTx/>
-              <a:buFontTx/>
-              <a:buNone/>
-              <a:tabLst/>
-            </a:pPr>
-            <a:r>
-              <a:rPr lang="es-MX" altLang="es-MX" sz="1200" dirty="0">
-                <a:solidFill>
-                  <a:srgbClr val="000000"/>
-                </a:solidFill>
-                <a:latin typeface="Courier New" panose="02070309020205020404" pitchFamily="49" charset="0"/>
-                <a:cs typeface="Courier New" panose="02070309020205020404" pitchFamily="49" charset="0"/>
-              </a:rPr>
-              <a:t>            </a:t>
-            </a:r>
-            <a:r>
-              <a:rPr kumimoji="0" lang="es-MX" altLang="es-MX" sz="1200" i="0" u="none" strike="noStrike" cap="none" normalizeH="0" baseline="0" dirty="0">
-                <a:ln>
-                  <a:noFill/>
-                </a:ln>
-                <a:solidFill>
-                  <a:srgbClr val="000088"/>
-                </a:solidFill>
-                <a:effectLst/>
-                <a:latin typeface="Courier New" panose="02070309020205020404" pitchFamily="49" charset="0"/>
-                <a:cs typeface="Courier New" panose="02070309020205020404" pitchFamily="49" charset="0"/>
-              </a:rPr>
-              <a:t>self</a:t>
-            </a:r>
-            <a:r>
-              <a:rPr kumimoji="0" lang="es-MX" altLang="es-MX" sz="1200" i="0" u="none" strike="noStrike" cap="none" normalizeH="0" baseline="0" dirty="0">
-                <a:ln>
-                  <a:noFill/>
-                </a:ln>
-                <a:solidFill>
-                  <a:srgbClr val="666600"/>
-                </a:solidFill>
-                <a:effectLst/>
-                <a:latin typeface="Courier New" panose="02070309020205020404" pitchFamily="49" charset="0"/>
-                <a:cs typeface="Courier New" panose="02070309020205020404" pitchFamily="49" charset="0"/>
-              </a:rPr>
-              <a:t>.</a:t>
-            </a:r>
-            <a:r>
-              <a:rPr kumimoji="0" lang="es-MX" altLang="es-MX" sz="1200" i="0" u="none" strike="noStrike" cap="none" normalizeH="0" baseline="0" dirty="0">
-                <a:ln>
-                  <a:noFill/>
-                </a:ln>
-                <a:solidFill>
-                  <a:srgbClr val="000000"/>
-                </a:solidFill>
-                <a:effectLst/>
-                <a:latin typeface="Courier New" panose="02070309020205020404" pitchFamily="49" charset="0"/>
-                <a:cs typeface="Courier New" panose="02070309020205020404" pitchFamily="49" charset="0"/>
-              </a:rPr>
-              <a:t>precio </a:t>
-            </a:r>
-            <a:r>
-              <a:rPr kumimoji="0" lang="es-MX" altLang="es-MX" sz="1200" i="0" u="none" strike="noStrike" cap="none" normalizeH="0" baseline="0" dirty="0">
-                <a:ln>
-                  <a:noFill/>
-                </a:ln>
-                <a:solidFill>
-                  <a:srgbClr val="666600"/>
-                </a:solidFill>
-                <a:effectLst/>
-                <a:latin typeface="Courier New" panose="02070309020205020404" pitchFamily="49" charset="0"/>
-                <a:cs typeface="Courier New" panose="02070309020205020404" pitchFamily="49" charset="0"/>
-              </a:rPr>
-              <a:t>=</a:t>
-            </a:r>
-            <a:r>
-              <a:rPr kumimoji="0" lang="es-MX" altLang="es-MX" sz="1200" i="0" u="none" strike="noStrike" cap="none" normalizeH="0" baseline="0" dirty="0">
-                <a:ln>
-                  <a:noFill/>
-                </a:ln>
-                <a:solidFill>
-                  <a:srgbClr val="000000"/>
-                </a:solidFill>
-                <a:effectLst/>
-                <a:latin typeface="Courier New" panose="02070309020205020404" pitchFamily="49" charset="0"/>
-                <a:cs typeface="Courier New" panose="02070309020205020404" pitchFamily="49" charset="0"/>
-              </a:rPr>
-              <a:t> precio </a:t>
-            </a:r>
-          </a:p>
-          <a:p>
-            <a:pPr marL="0" marR="0" lvl="0" indent="0" algn="l" defTabSz="914400" rtl="0" eaLnBrk="0" fontAlgn="base" latinLnBrk="0" hangingPunct="0">
-              <a:lnSpc>
-                <a:spcPct val="100000"/>
-              </a:lnSpc>
-              <a:spcBef>
-                <a:spcPct val="0"/>
-              </a:spcBef>
-              <a:spcAft>
-                <a:spcPct val="0"/>
-              </a:spcAft>
-              <a:buClrTx/>
-              <a:buSzTx/>
-              <a:buFontTx/>
-              <a:buNone/>
-              <a:tabLst/>
-            </a:pPr>
-            <a:r>
-              <a:rPr lang="es-MX" altLang="es-MX" sz="1200" dirty="0">
-                <a:solidFill>
-                  <a:srgbClr val="000000"/>
-                </a:solidFill>
-                <a:latin typeface="Courier New" panose="02070309020205020404" pitchFamily="49" charset="0"/>
-                <a:cs typeface="Courier New" panose="02070309020205020404" pitchFamily="49" charset="0"/>
-              </a:rPr>
-              <a:t>      </a:t>
-            </a:r>
-          </a:p>
-          <a:p>
-            <a:pPr marL="0" marR="0" lvl="0" indent="0" algn="l" defTabSz="914400" rtl="0" eaLnBrk="0" fontAlgn="base" latinLnBrk="0" hangingPunct="0">
-              <a:lnSpc>
-                <a:spcPct val="100000"/>
-              </a:lnSpc>
-              <a:spcBef>
-                <a:spcPct val="0"/>
-              </a:spcBef>
-              <a:spcAft>
-                <a:spcPct val="0"/>
-              </a:spcAft>
-              <a:buClrTx/>
-              <a:buSzTx/>
-              <a:buFontTx/>
-              <a:buNone/>
-              <a:tabLst/>
-            </a:pPr>
-            <a:r>
-              <a:rPr kumimoji="0" lang="es-MX" altLang="es-MX" sz="1200" i="0" u="none" strike="noStrike" cap="none" normalizeH="0" baseline="0" dirty="0">
-                <a:ln>
-                  <a:noFill/>
-                </a:ln>
-                <a:solidFill>
-                  <a:srgbClr val="000000"/>
-                </a:solidFill>
-                <a:effectLst/>
-                <a:latin typeface="Courier New" panose="02070309020205020404" pitchFamily="49" charset="0"/>
-                <a:cs typeface="Courier New" panose="02070309020205020404" pitchFamily="49" charset="0"/>
-              </a:rPr>
-              <a:t>      </a:t>
-            </a:r>
-            <a:r>
-              <a:rPr kumimoji="0" lang="es-MX" altLang="es-MX" sz="1200" i="0" u="none" strike="noStrike" cap="none" normalizeH="0" baseline="0" dirty="0">
-                <a:ln>
-                  <a:noFill/>
-                </a:ln>
-                <a:solidFill>
-                  <a:srgbClr val="000088"/>
-                </a:solidFill>
-                <a:effectLst/>
-                <a:latin typeface="Courier New" panose="02070309020205020404" pitchFamily="49" charset="0"/>
-                <a:cs typeface="Courier New" panose="02070309020205020404" pitchFamily="49" charset="0"/>
-              </a:rPr>
-              <a:t>def</a:t>
-            </a:r>
-            <a:r>
-              <a:rPr kumimoji="0" lang="es-MX" altLang="es-MX" sz="1200" i="0" u="none" strike="noStrike" cap="none" normalizeH="0" baseline="0" dirty="0">
-                <a:ln>
-                  <a:noFill/>
-                </a:ln>
-                <a:solidFill>
-                  <a:srgbClr val="000000"/>
-                </a:solidFill>
-                <a:effectLst/>
-                <a:latin typeface="Courier New" panose="02070309020205020404" pitchFamily="49" charset="0"/>
-                <a:cs typeface="Courier New" panose="02070309020205020404" pitchFamily="49" charset="0"/>
-              </a:rPr>
-              <a:t> a_pagar</a:t>
-            </a:r>
-            <a:r>
-              <a:rPr kumimoji="0" lang="es-MX" altLang="es-MX" sz="1200" i="0" u="none" strike="noStrike" cap="none" normalizeH="0" baseline="0" dirty="0">
-                <a:ln>
-                  <a:noFill/>
-                </a:ln>
-                <a:solidFill>
-                  <a:srgbClr val="666600"/>
-                </a:solidFill>
-                <a:effectLst/>
-                <a:latin typeface="Courier New" panose="02070309020205020404" pitchFamily="49" charset="0"/>
-                <a:cs typeface="Courier New" panose="02070309020205020404" pitchFamily="49" charset="0"/>
-              </a:rPr>
-              <a:t>(</a:t>
-            </a:r>
-            <a:r>
-              <a:rPr kumimoji="0" lang="es-MX" altLang="es-MX" sz="1200" i="0" u="none" strike="noStrike" cap="none" normalizeH="0" baseline="0" dirty="0">
-                <a:ln>
-                  <a:noFill/>
-                </a:ln>
-                <a:solidFill>
-                  <a:srgbClr val="000088"/>
-                </a:solidFill>
-                <a:effectLst/>
-                <a:latin typeface="Courier New" panose="02070309020205020404" pitchFamily="49" charset="0"/>
-                <a:cs typeface="Courier New" panose="02070309020205020404" pitchFamily="49" charset="0"/>
-              </a:rPr>
-              <a:t>self</a:t>
-            </a:r>
-            <a:r>
-              <a:rPr kumimoji="0" lang="es-MX" altLang="es-MX" sz="1200" i="0" u="none" strike="noStrike" cap="none" normalizeH="0" baseline="0" dirty="0">
-                <a:ln>
-                  <a:noFill/>
-                </a:ln>
-                <a:solidFill>
-                  <a:srgbClr val="666600"/>
-                </a:solidFill>
-                <a:effectLst/>
-                <a:latin typeface="Courier New" panose="02070309020205020404" pitchFamily="49" charset="0"/>
-                <a:cs typeface="Courier New" panose="02070309020205020404" pitchFamily="49" charset="0"/>
-              </a:rPr>
-              <a:t>):</a:t>
-            </a:r>
-          </a:p>
-          <a:p>
-            <a:pPr marL="0" marR="0" lvl="0" indent="0" algn="l" defTabSz="914400" rtl="0" eaLnBrk="0" fontAlgn="base" latinLnBrk="0" hangingPunct="0">
-              <a:lnSpc>
-                <a:spcPct val="100000"/>
-              </a:lnSpc>
-              <a:spcBef>
-                <a:spcPct val="0"/>
-              </a:spcBef>
-              <a:spcAft>
-                <a:spcPct val="0"/>
-              </a:spcAft>
-              <a:buClrTx/>
-              <a:buSzTx/>
-              <a:buFontTx/>
-              <a:buNone/>
-              <a:tabLst/>
-            </a:pPr>
-            <a:r>
-              <a:rPr lang="es-MX" altLang="es-MX" sz="1200" dirty="0">
-                <a:solidFill>
-                  <a:srgbClr val="666600"/>
-                </a:solidFill>
-                <a:latin typeface="Courier New" panose="02070309020205020404" pitchFamily="49" charset="0"/>
-                <a:cs typeface="Courier New" panose="02070309020205020404" pitchFamily="49" charset="0"/>
-              </a:rPr>
-              <a:t>           </a:t>
-            </a:r>
-            <a:r>
-              <a:rPr kumimoji="0" lang="es-MX" altLang="es-MX" sz="1200" i="0" u="none" strike="noStrike" cap="none" normalizeH="0" baseline="0" dirty="0">
-                <a:ln>
-                  <a:noFill/>
-                </a:ln>
-                <a:solidFill>
-                  <a:srgbClr val="000000"/>
-                </a:solidFill>
-                <a:effectLst/>
-                <a:latin typeface="Courier New" panose="02070309020205020404" pitchFamily="49" charset="0"/>
-                <a:cs typeface="Courier New" panose="02070309020205020404" pitchFamily="49" charset="0"/>
-              </a:rPr>
-              <a:t> total </a:t>
-            </a:r>
-            <a:r>
-              <a:rPr kumimoji="0" lang="es-MX" altLang="es-MX" sz="1200" i="0" u="none" strike="noStrike" cap="none" normalizeH="0" baseline="0" dirty="0">
-                <a:ln>
-                  <a:noFill/>
-                </a:ln>
-                <a:solidFill>
-                  <a:srgbClr val="666600"/>
-                </a:solidFill>
-                <a:effectLst/>
-                <a:latin typeface="Courier New" panose="02070309020205020404" pitchFamily="49" charset="0"/>
-                <a:cs typeface="Courier New" panose="02070309020205020404" pitchFamily="49" charset="0"/>
-              </a:rPr>
-              <a:t>=</a:t>
-            </a:r>
-            <a:r>
-              <a:rPr kumimoji="0" lang="es-MX" altLang="es-MX" sz="1200" i="0" u="none" strike="noStrike" cap="none" normalizeH="0" baseline="0" dirty="0">
-                <a:ln>
-                  <a:noFill/>
-                </a:ln>
-                <a:solidFill>
-                  <a:srgbClr val="000000"/>
-                </a:solidFill>
-                <a:effectLst/>
-                <a:latin typeface="Courier New" panose="02070309020205020404" pitchFamily="49" charset="0"/>
-                <a:cs typeface="Courier New" panose="02070309020205020404" pitchFamily="49" charset="0"/>
-              </a:rPr>
-              <a:t> </a:t>
-            </a:r>
-            <a:r>
-              <a:rPr kumimoji="0" lang="es-MX" altLang="es-MX" sz="1200" i="0" u="none" strike="noStrike" cap="none" normalizeH="0" baseline="0" dirty="0">
-                <a:ln>
-                  <a:noFill/>
-                </a:ln>
-                <a:solidFill>
-                  <a:srgbClr val="000088"/>
-                </a:solidFill>
-                <a:effectLst/>
-                <a:latin typeface="Courier New" panose="02070309020205020404" pitchFamily="49" charset="0"/>
-                <a:cs typeface="Courier New" panose="02070309020205020404" pitchFamily="49" charset="0"/>
-              </a:rPr>
-              <a:t>self</a:t>
-            </a:r>
-            <a:r>
-              <a:rPr kumimoji="0" lang="es-MX" altLang="es-MX" sz="1200" i="0" u="none" strike="noStrike" cap="none" normalizeH="0" baseline="0" dirty="0">
-                <a:ln>
-                  <a:noFill/>
-                </a:ln>
-                <a:solidFill>
-                  <a:srgbClr val="666600"/>
-                </a:solidFill>
-                <a:effectLst/>
-                <a:latin typeface="Courier New" panose="02070309020205020404" pitchFamily="49" charset="0"/>
-                <a:cs typeface="Courier New" panose="02070309020205020404" pitchFamily="49" charset="0"/>
-              </a:rPr>
-              <a:t>.</a:t>
-            </a:r>
-            <a:r>
-              <a:rPr kumimoji="0" lang="es-MX" altLang="es-MX" sz="1200" i="0" u="none" strike="noStrike" cap="none" normalizeH="0" baseline="0" dirty="0">
-                <a:ln>
-                  <a:noFill/>
-                </a:ln>
-                <a:solidFill>
-                  <a:srgbClr val="000000"/>
-                </a:solidFill>
-                <a:effectLst/>
-                <a:latin typeface="Courier New" panose="02070309020205020404" pitchFamily="49" charset="0"/>
-                <a:cs typeface="Courier New" panose="02070309020205020404" pitchFamily="49" charset="0"/>
-              </a:rPr>
-              <a:t>unidad </a:t>
-            </a:r>
-            <a:r>
-              <a:rPr kumimoji="0" lang="es-MX" altLang="es-MX" sz="1200" i="0" u="none" strike="noStrike" cap="none" normalizeH="0" baseline="0" dirty="0">
-                <a:ln>
-                  <a:noFill/>
-                </a:ln>
-                <a:solidFill>
-                  <a:srgbClr val="666600"/>
-                </a:solidFill>
-                <a:effectLst/>
-                <a:latin typeface="Courier New" panose="02070309020205020404" pitchFamily="49" charset="0"/>
-                <a:cs typeface="Courier New" panose="02070309020205020404" pitchFamily="49" charset="0"/>
-              </a:rPr>
-              <a:t>*</a:t>
-            </a:r>
-            <a:r>
-              <a:rPr kumimoji="0" lang="es-MX" altLang="es-MX" sz="1200" i="0" u="none" strike="noStrike" cap="none" normalizeH="0" baseline="0" dirty="0">
-                <a:ln>
-                  <a:noFill/>
-                </a:ln>
-                <a:solidFill>
-                  <a:srgbClr val="000000"/>
-                </a:solidFill>
-                <a:effectLst/>
-                <a:latin typeface="Courier New" panose="02070309020205020404" pitchFamily="49" charset="0"/>
-                <a:cs typeface="Courier New" panose="02070309020205020404" pitchFamily="49" charset="0"/>
-              </a:rPr>
-              <a:t> </a:t>
-            </a:r>
-            <a:r>
-              <a:rPr kumimoji="0" lang="es-MX" altLang="es-MX" sz="1200" i="0" u="none" strike="noStrike" cap="none" normalizeH="0" baseline="0" dirty="0">
-                <a:ln>
-                  <a:noFill/>
-                </a:ln>
-                <a:solidFill>
-                  <a:srgbClr val="000088"/>
-                </a:solidFill>
-                <a:effectLst/>
-                <a:latin typeface="Courier New" panose="02070309020205020404" pitchFamily="49" charset="0"/>
-                <a:cs typeface="Courier New" panose="02070309020205020404" pitchFamily="49" charset="0"/>
-              </a:rPr>
-              <a:t>self</a:t>
-            </a:r>
-            <a:r>
-              <a:rPr kumimoji="0" lang="es-MX" altLang="es-MX" sz="1200" i="0" u="none" strike="noStrike" cap="none" normalizeH="0" baseline="0" dirty="0">
-                <a:ln>
-                  <a:noFill/>
-                </a:ln>
-                <a:solidFill>
-                  <a:srgbClr val="666600"/>
-                </a:solidFill>
-                <a:effectLst/>
-                <a:latin typeface="Courier New" panose="02070309020205020404" pitchFamily="49" charset="0"/>
-                <a:cs typeface="Courier New" panose="02070309020205020404" pitchFamily="49" charset="0"/>
-              </a:rPr>
-              <a:t>.</a:t>
-            </a:r>
-            <a:r>
-              <a:rPr kumimoji="0" lang="es-MX" altLang="es-MX" sz="1200" i="0" u="none" strike="noStrike" cap="none" normalizeH="0" baseline="0" dirty="0">
-                <a:ln>
-                  <a:noFill/>
-                </a:ln>
-                <a:solidFill>
-                  <a:srgbClr val="000000"/>
-                </a:solidFill>
-                <a:effectLst/>
-                <a:latin typeface="Courier New" panose="02070309020205020404" pitchFamily="49" charset="0"/>
-                <a:cs typeface="Courier New" panose="02070309020205020404" pitchFamily="49" charset="0"/>
-              </a:rPr>
-              <a:t>precio </a:t>
-            </a:r>
-          </a:p>
-          <a:p>
-            <a:pPr marL="0" marR="0" lvl="0" indent="0" algn="l" defTabSz="914400" rtl="0" eaLnBrk="0" fontAlgn="base" latinLnBrk="0" hangingPunct="0">
-              <a:lnSpc>
-                <a:spcPct val="100000"/>
-              </a:lnSpc>
-              <a:spcBef>
-                <a:spcPct val="0"/>
-              </a:spcBef>
-              <a:spcAft>
-                <a:spcPct val="0"/>
-              </a:spcAft>
-              <a:buClrTx/>
-              <a:buSzTx/>
-              <a:buFontTx/>
-              <a:buNone/>
-              <a:tabLst/>
-            </a:pPr>
-            <a:r>
-              <a:rPr lang="es-MX" altLang="es-MX" sz="1200" dirty="0">
-                <a:solidFill>
-                  <a:srgbClr val="000000"/>
-                </a:solidFill>
-                <a:latin typeface="Courier New" panose="02070309020205020404" pitchFamily="49" charset="0"/>
-                <a:cs typeface="Courier New" panose="02070309020205020404" pitchFamily="49" charset="0"/>
-              </a:rPr>
-              <a:t>            </a:t>
-            </a:r>
-            <a:r>
-              <a:rPr kumimoji="0" lang="es-MX" altLang="es-MX" sz="1200" i="0" u="none" strike="noStrike" cap="none" normalizeH="0" baseline="0" dirty="0">
-                <a:ln>
-                  <a:noFill/>
-                </a:ln>
-                <a:solidFill>
-                  <a:srgbClr val="000000"/>
-                </a:solidFill>
-                <a:effectLst/>
-                <a:latin typeface="Courier New" panose="02070309020205020404" pitchFamily="49" charset="0"/>
-                <a:cs typeface="Courier New" panose="02070309020205020404" pitchFamily="49" charset="0"/>
-              </a:rPr>
-              <a:t>impuesto </a:t>
-            </a:r>
-            <a:r>
-              <a:rPr kumimoji="0" lang="es-MX" altLang="es-MX" sz="1200" i="0" u="none" strike="noStrike" cap="none" normalizeH="0" baseline="0" dirty="0">
-                <a:ln>
-                  <a:noFill/>
-                </a:ln>
-                <a:solidFill>
-                  <a:srgbClr val="666600"/>
-                </a:solidFill>
-                <a:effectLst/>
-                <a:latin typeface="Courier New" panose="02070309020205020404" pitchFamily="49" charset="0"/>
-                <a:cs typeface="Courier New" panose="02070309020205020404" pitchFamily="49" charset="0"/>
-              </a:rPr>
-              <a:t>=</a:t>
-            </a:r>
-            <a:r>
-              <a:rPr kumimoji="0" lang="es-MX" altLang="es-MX" sz="1200" i="0" u="none" strike="noStrike" cap="none" normalizeH="0" baseline="0" dirty="0">
-                <a:ln>
-                  <a:noFill/>
-                </a:ln>
-                <a:solidFill>
-                  <a:srgbClr val="000000"/>
-                </a:solidFill>
-                <a:effectLst/>
-                <a:latin typeface="Courier New" panose="02070309020205020404" pitchFamily="49" charset="0"/>
-                <a:cs typeface="Courier New" panose="02070309020205020404" pitchFamily="49" charset="0"/>
-              </a:rPr>
-              <a:t> total </a:t>
-            </a:r>
-            <a:r>
-              <a:rPr kumimoji="0" lang="es-MX" altLang="es-MX" sz="1200" i="0" u="none" strike="noStrike" cap="none" normalizeH="0" baseline="0" dirty="0">
-                <a:ln>
-                  <a:noFill/>
-                </a:ln>
-                <a:solidFill>
-                  <a:srgbClr val="666600"/>
-                </a:solidFill>
-                <a:effectLst/>
-                <a:latin typeface="Courier New" panose="02070309020205020404" pitchFamily="49" charset="0"/>
-                <a:cs typeface="Courier New" panose="02070309020205020404" pitchFamily="49" charset="0"/>
-              </a:rPr>
-              <a:t>*</a:t>
-            </a:r>
-            <a:r>
-              <a:rPr kumimoji="0" lang="es-MX" altLang="es-MX" sz="1200" i="0" u="none" strike="noStrike" cap="none" normalizeH="0" baseline="0" dirty="0">
-                <a:ln>
-                  <a:noFill/>
-                </a:ln>
-                <a:solidFill>
-                  <a:srgbClr val="000000"/>
-                </a:solidFill>
-                <a:effectLst/>
-                <a:latin typeface="Courier New" panose="02070309020205020404" pitchFamily="49" charset="0"/>
-                <a:cs typeface="Courier New" panose="02070309020205020404" pitchFamily="49" charset="0"/>
-              </a:rPr>
-              <a:t> </a:t>
-            </a:r>
-            <a:r>
-              <a:rPr kumimoji="0" lang="es-MX" altLang="es-MX" sz="1200" i="0" u="none" strike="noStrike" cap="none" normalizeH="0" baseline="0" dirty="0">
-                <a:ln>
-                  <a:noFill/>
-                </a:ln>
-                <a:solidFill>
-                  <a:srgbClr val="660066"/>
-                </a:solidFill>
-                <a:effectLst/>
-                <a:latin typeface="Courier New" panose="02070309020205020404" pitchFamily="49" charset="0"/>
-                <a:cs typeface="Courier New" panose="02070309020205020404" pitchFamily="49" charset="0"/>
-              </a:rPr>
-              <a:t>Factura</a:t>
-            </a:r>
-            <a:r>
-              <a:rPr kumimoji="0" lang="es-MX" altLang="es-MX" sz="1200" i="0" u="none" strike="noStrike" cap="none" normalizeH="0" baseline="0" dirty="0">
-                <a:ln>
-                  <a:noFill/>
-                </a:ln>
-                <a:solidFill>
-                  <a:srgbClr val="666600"/>
-                </a:solidFill>
-                <a:effectLst/>
-                <a:latin typeface="Courier New" panose="02070309020205020404" pitchFamily="49" charset="0"/>
-                <a:cs typeface="Courier New" panose="02070309020205020404" pitchFamily="49" charset="0"/>
-              </a:rPr>
-              <a:t>.</a:t>
-            </a:r>
-            <a:r>
-              <a:rPr kumimoji="0" lang="es-MX" altLang="es-MX" sz="1200" i="0" u="none" strike="noStrike" cap="none" normalizeH="0" baseline="0" dirty="0">
-                <a:ln>
-                  <a:noFill/>
-                </a:ln>
-                <a:solidFill>
-                  <a:srgbClr val="000000"/>
-                </a:solidFill>
-                <a:effectLst/>
-                <a:latin typeface="Courier New" panose="02070309020205020404" pitchFamily="49" charset="0"/>
-                <a:cs typeface="Courier New" panose="02070309020205020404" pitchFamily="49" charset="0"/>
-              </a:rPr>
-              <a:t>__tasa </a:t>
-            </a:r>
-            <a:r>
-              <a:rPr kumimoji="0" lang="es-MX" altLang="es-MX" sz="1200" i="0" u="none" strike="noStrike" cap="none" normalizeH="0" baseline="0" dirty="0">
-                <a:ln>
-                  <a:noFill/>
-                </a:ln>
-                <a:solidFill>
-                  <a:srgbClr val="666600"/>
-                </a:solidFill>
-                <a:effectLst/>
-                <a:latin typeface="Courier New" panose="02070309020205020404" pitchFamily="49" charset="0"/>
-                <a:cs typeface="Courier New" panose="02070309020205020404" pitchFamily="49" charset="0"/>
-              </a:rPr>
-              <a:t>/</a:t>
-            </a:r>
-            <a:r>
-              <a:rPr kumimoji="0" lang="es-MX" altLang="es-MX" sz="1200" i="0" u="none" strike="noStrike" cap="none" normalizeH="0" baseline="0" dirty="0">
-                <a:ln>
-                  <a:noFill/>
-                </a:ln>
-                <a:solidFill>
-                  <a:srgbClr val="000000"/>
-                </a:solidFill>
-                <a:effectLst/>
-                <a:latin typeface="Courier New" panose="02070309020205020404" pitchFamily="49" charset="0"/>
-                <a:cs typeface="Courier New" panose="02070309020205020404" pitchFamily="49" charset="0"/>
-              </a:rPr>
-              <a:t> </a:t>
-            </a:r>
-            <a:r>
-              <a:rPr kumimoji="0" lang="es-MX" altLang="es-MX" sz="1200" i="0" u="none" strike="noStrike" cap="none" normalizeH="0" baseline="0" dirty="0">
-                <a:ln>
-                  <a:noFill/>
-                </a:ln>
-                <a:solidFill>
-                  <a:srgbClr val="006666"/>
-                </a:solidFill>
-                <a:effectLst/>
-                <a:latin typeface="Courier New" panose="02070309020205020404" pitchFamily="49" charset="0"/>
-                <a:cs typeface="Courier New" panose="02070309020205020404" pitchFamily="49" charset="0"/>
-              </a:rPr>
-              <a:t>100</a:t>
-            </a:r>
-          </a:p>
-          <a:p>
-            <a:pPr marL="0" marR="0" lvl="0" indent="0" algn="l" defTabSz="914400" rtl="0" eaLnBrk="0" fontAlgn="base" latinLnBrk="0" hangingPunct="0">
-              <a:lnSpc>
-                <a:spcPct val="100000"/>
-              </a:lnSpc>
-              <a:spcBef>
-                <a:spcPct val="0"/>
-              </a:spcBef>
-              <a:spcAft>
-                <a:spcPct val="0"/>
-              </a:spcAft>
-              <a:buClrTx/>
-              <a:buSzTx/>
-              <a:buFontTx/>
-              <a:buNone/>
-              <a:tabLst/>
-            </a:pPr>
-            <a:r>
-              <a:rPr lang="es-MX" altLang="es-MX" sz="1200" dirty="0">
-                <a:solidFill>
-                  <a:srgbClr val="006666"/>
-                </a:solidFill>
-                <a:latin typeface="Courier New" panose="02070309020205020404" pitchFamily="49" charset="0"/>
-                <a:cs typeface="Courier New" panose="02070309020205020404" pitchFamily="49" charset="0"/>
-              </a:rPr>
-              <a:t>           </a:t>
-            </a:r>
-            <a:r>
-              <a:rPr kumimoji="0" lang="es-MX" altLang="es-MX" sz="1200" i="0" u="none" strike="noStrike" cap="none" normalizeH="0" baseline="0" dirty="0">
-                <a:ln>
-                  <a:noFill/>
-                </a:ln>
-                <a:solidFill>
-                  <a:srgbClr val="000000"/>
-                </a:solidFill>
-                <a:effectLst/>
-                <a:latin typeface="Courier New" panose="02070309020205020404" pitchFamily="49" charset="0"/>
-                <a:cs typeface="Courier New" panose="02070309020205020404" pitchFamily="49" charset="0"/>
-              </a:rPr>
-              <a:t> </a:t>
-            </a:r>
-            <a:r>
-              <a:rPr kumimoji="0" lang="es-MX" altLang="es-MX" sz="1200" i="0" u="none" strike="noStrike" cap="none" normalizeH="0" baseline="0" dirty="0">
-                <a:ln>
-                  <a:noFill/>
-                </a:ln>
-                <a:solidFill>
-                  <a:srgbClr val="000088"/>
-                </a:solidFill>
-                <a:effectLst/>
-                <a:latin typeface="Courier New" panose="02070309020205020404" pitchFamily="49" charset="0"/>
-                <a:cs typeface="Courier New" panose="02070309020205020404" pitchFamily="49" charset="0"/>
-              </a:rPr>
-              <a:t>return</a:t>
-            </a:r>
-            <a:r>
-              <a:rPr kumimoji="0" lang="es-MX" altLang="es-MX" sz="1200" i="0" u="none" strike="noStrike" cap="none" normalizeH="0" baseline="0" dirty="0">
-                <a:ln>
-                  <a:noFill/>
-                </a:ln>
-                <a:solidFill>
-                  <a:srgbClr val="666600"/>
-                </a:solidFill>
-                <a:effectLst/>
-                <a:latin typeface="Courier New" panose="02070309020205020404" pitchFamily="49" charset="0"/>
-                <a:cs typeface="Courier New" panose="02070309020205020404" pitchFamily="49" charset="0"/>
-              </a:rPr>
-              <a:t>(</a:t>
-            </a:r>
-            <a:r>
-              <a:rPr kumimoji="0" lang="es-MX" altLang="es-MX" sz="1200" i="0" u="none" strike="noStrike" cap="none" normalizeH="0" baseline="0" dirty="0">
-                <a:ln>
-                  <a:noFill/>
-                </a:ln>
-                <a:solidFill>
-                  <a:srgbClr val="000000"/>
-                </a:solidFill>
-                <a:effectLst/>
-                <a:latin typeface="Courier New" panose="02070309020205020404" pitchFamily="49" charset="0"/>
-                <a:cs typeface="Courier New" panose="02070309020205020404" pitchFamily="49" charset="0"/>
-              </a:rPr>
-              <a:t>total </a:t>
-            </a:r>
-            <a:r>
-              <a:rPr kumimoji="0" lang="es-MX" altLang="es-MX" sz="1200" i="0" u="none" strike="noStrike" cap="none" normalizeH="0" baseline="0" dirty="0">
-                <a:ln>
-                  <a:noFill/>
-                </a:ln>
-                <a:solidFill>
-                  <a:srgbClr val="666600"/>
-                </a:solidFill>
-                <a:effectLst/>
-                <a:latin typeface="Courier New" panose="02070309020205020404" pitchFamily="49" charset="0"/>
-                <a:cs typeface="Courier New" panose="02070309020205020404" pitchFamily="49" charset="0"/>
-              </a:rPr>
-              <a:t>+</a:t>
-            </a:r>
-            <a:r>
-              <a:rPr kumimoji="0" lang="es-MX" altLang="es-MX" sz="1200" i="0" u="none" strike="noStrike" cap="none" normalizeH="0" baseline="0" dirty="0">
-                <a:ln>
-                  <a:noFill/>
-                </a:ln>
-                <a:solidFill>
-                  <a:srgbClr val="000000"/>
-                </a:solidFill>
-                <a:effectLst/>
-                <a:latin typeface="Courier New" panose="02070309020205020404" pitchFamily="49" charset="0"/>
-                <a:cs typeface="Courier New" panose="02070309020205020404" pitchFamily="49" charset="0"/>
-              </a:rPr>
-              <a:t> impuesto</a:t>
-            </a:r>
-            <a:r>
-              <a:rPr kumimoji="0" lang="es-MX" altLang="es-MX" sz="1200" i="0" u="none" strike="noStrike" cap="none" normalizeH="0" baseline="0" dirty="0">
-                <a:ln>
-                  <a:noFill/>
-                </a:ln>
-                <a:solidFill>
-                  <a:srgbClr val="666600"/>
-                </a:solidFill>
-                <a:effectLst/>
-                <a:latin typeface="Courier New" panose="02070309020205020404" pitchFamily="49" charset="0"/>
-                <a:cs typeface="Courier New" panose="02070309020205020404" pitchFamily="49" charset="0"/>
-              </a:rPr>
-              <a:t>)</a:t>
-            </a:r>
-            <a:r>
-              <a:rPr kumimoji="0" lang="es-MX" altLang="es-MX" sz="1200" i="0" u="none" strike="noStrike" cap="none" normalizeH="0" baseline="0" dirty="0">
-                <a:ln>
-                  <a:noFill/>
-                </a:ln>
-                <a:solidFill>
-                  <a:srgbClr val="000000"/>
-                </a:solidFill>
-                <a:effectLst/>
-                <a:latin typeface="Courier New" panose="02070309020205020404" pitchFamily="49" charset="0"/>
-                <a:cs typeface="Courier New" panose="02070309020205020404" pitchFamily="49" charset="0"/>
-              </a:rPr>
-              <a:t> </a:t>
-            </a:r>
-          </a:p>
-          <a:p>
-            <a:pPr marL="0" marR="0" lvl="0" indent="0" algn="l" defTabSz="914400" rtl="0" eaLnBrk="0" fontAlgn="base" latinLnBrk="0" hangingPunct="0">
-              <a:lnSpc>
-                <a:spcPct val="100000"/>
-              </a:lnSpc>
-              <a:spcBef>
-                <a:spcPct val="0"/>
-              </a:spcBef>
-              <a:spcAft>
-                <a:spcPct val="0"/>
-              </a:spcAft>
-              <a:buClrTx/>
-              <a:buSzTx/>
-              <a:buFontTx/>
-              <a:buNone/>
-              <a:tabLst/>
-            </a:pPr>
-            <a:endParaRPr lang="es-MX" altLang="es-MX" sz="1200" dirty="0">
-              <a:solidFill>
-                <a:srgbClr val="000000"/>
-              </a:solidFill>
-              <a:latin typeface="Courier New" panose="02070309020205020404" pitchFamily="49" charset="0"/>
-              <a:cs typeface="Courier New" panose="02070309020205020404" pitchFamily="49" charset="0"/>
-            </a:endParaRPr>
-          </a:p>
-          <a:p>
-            <a:pPr marL="0" marR="0" lvl="0" indent="0" algn="l" defTabSz="914400" rtl="0" eaLnBrk="0" fontAlgn="base" latinLnBrk="0" hangingPunct="0">
-              <a:lnSpc>
-                <a:spcPct val="100000"/>
-              </a:lnSpc>
-              <a:spcBef>
-                <a:spcPct val="0"/>
-              </a:spcBef>
-              <a:spcAft>
-                <a:spcPct val="0"/>
-              </a:spcAft>
-              <a:buClrTx/>
-              <a:buSzTx/>
-              <a:buFontTx/>
-              <a:buNone/>
-              <a:tabLst/>
-            </a:pPr>
-            <a:r>
-              <a:rPr kumimoji="0" lang="es-MX" altLang="es-MX" sz="1200" i="0" u="none" strike="noStrike" cap="none" normalizeH="0" baseline="0" dirty="0">
-                <a:ln>
-                  <a:noFill/>
-                </a:ln>
-                <a:solidFill>
-                  <a:srgbClr val="000000"/>
-                </a:solidFill>
-                <a:effectLst/>
-                <a:latin typeface="Courier New" panose="02070309020205020404" pitchFamily="49" charset="0"/>
-                <a:cs typeface="Courier New" panose="02070309020205020404" pitchFamily="49" charset="0"/>
-              </a:rPr>
-              <a:t>compra1 </a:t>
-            </a:r>
-            <a:r>
-              <a:rPr kumimoji="0" lang="es-MX" altLang="es-MX" sz="1200" i="0" u="none" strike="noStrike" cap="none" normalizeH="0" baseline="0" dirty="0">
-                <a:ln>
-                  <a:noFill/>
-                </a:ln>
-                <a:solidFill>
-                  <a:srgbClr val="666600"/>
-                </a:solidFill>
-                <a:effectLst/>
-                <a:latin typeface="Courier New" panose="02070309020205020404" pitchFamily="49" charset="0"/>
-                <a:cs typeface="Courier New" panose="02070309020205020404" pitchFamily="49" charset="0"/>
-              </a:rPr>
-              <a:t>=</a:t>
-            </a:r>
-            <a:r>
-              <a:rPr kumimoji="0" lang="es-MX" altLang="es-MX" sz="1200" i="0" u="none" strike="noStrike" cap="none" normalizeH="0" baseline="0" dirty="0">
-                <a:ln>
-                  <a:noFill/>
-                </a:ln>
-                <a:solidFill>
-                  <a:srgbClr val="000000"/>
-                </a:solidFill>
-                <a:effectLst/>
-                <a:latin typeface="Courier New" panose="02070309020205020404" pitchFamily="49" charset="0"/>
-                <a:cs typeface="Courier New" panose="02070309020205020404" pitchFamily="49" charset="0"/>
-              </a:rPr>
-              <a:t> </a:t>
-            </a:r>
-            <a:r>
-              <a:rPr kumimoji="0" lang="es-MX" altLang="es-MX" sz="1200" i="0" u="none" strike="noStrike" cap="none" normalizeH="0" baseline="0" dirty="0">
-                <a:ln>
-                  <a:noFill/>
-                </a:ln>
-                <a:solidFill>
-                  <a:srgbClr val="660066"/>
-                </a:solidFill>
-                <a:effectLst/>
-                <a:latin typeface="Courier New" panose="02070309020205020404" pitchFamily="49" charset="0"/>
-                <a:cs typeface="Courier New" panose="02070309020205020404" pitchFamily="49" charset="0"/>
-              </a:rPr>
-              <a:t>Factura</a:t>
-            </a:r>
-            <a:r>
-              <a:rPr kumimoji="0" lang="es-MX" altLang="es-MX" sz="1200" i="0" u="none" strike="noStrike" cap="none" normalizeH="0" baseline="0" dirty="0">
-                <a:ln>
-                  <a:noFill/>
-                </a:ln>
-                <a:solidFill>
-                  <a:srgbClr val="666600"/>
-                </a:solidFill>
-                <a:effectLst/>
-                <a:latin typeface="Courier New" panose="02070309020205020404" pitchFamily="49" charset="0"/>
-                <a:cs typeface="Courier New" panose="02070309020205020404" pitchFamily="49" charset="0"/>
-              </a:rPr>
-              <a:t>(</a:t>
-            </a:r>
-            <a:r>
-              <a:rPr kumimoji="0" lang="es-MX" altLang="es-MX" sz="1200" i="0" u="none" strike="noStrike" cap="none" normalizeH="0" baseline="0" dirty="0">
-                <a:ln>
-                  <a:noFill/>
-                </a:ln>
-                <a:solidFill>
-                  <a:srgbClr val="006666"/>
-                </a:solidFill>
-                <a:effectLst/>
-                <a:latin typeface="Courier New" panose="02070309020205020404" pitchFamily="49" charset="0"/>
-                <a:cs typeface="Courier New" panose="02070309020205020404" pitchFamily="49" charset="0"/>
-              </a:rPr>
-              <a:t>12</a:t>
-            </a:r>
-            <a:r>
-              <a:rPr kumimoji="0" lang="es-MX" altLang="es-MX" sz="1200" i="0" u="none" strike="noStrike" cap="none" normalizeH="0" baseline="0" dirty="0">
-                <a:ln>
-                  <a:noFill/>
-                </a:ln>
-                <a:solidFill>
-                  <a:srgbClr val="666600"/>
-                </a:solidFill>
-                <a:effectLst/>
-                <a:latin typeface="Courier New" panose="02070309020205020404" pitchFamily="49" charset="0"/>
-                <a:cs typeface="Courier New" panose="02070309020205020404" pitchFamily="49" charset="0"/>
-              </a:rPr>
-              <a:t>,</a:t>
-            </a:r>
-            <a:r>
-              <a:rPr kumimoji="0" lang="es-MX" altLang="es-MX" sz="1200" i="0" u="none" strike="noStrike" cap="none" normalizeH="0" baseline="0" dirty="0">
-                <a:ln>
-                  <a:noFill/>
-                </a:ln>
-                <a:solidFill>
-                  <a:srgbClr val="000000"/>
-                </a:solidFill>
-                <a:effectLst/>
-                <a:latin typeface="Courier New" panose="02070309020205020404" pitchFamily="49" charset="0"/>
-                <a:cs typeface="Courier New" panose="02070309020205020404" pitchFamily="49" charset="0"/>
-              </a:rPr>
-              <a:t> </a:t>
-            </a:r>
-            <a:r>
-              <a:rPr kumimoji="0" lang="es-MX" altLang="es-MX" sz="1200" i="0" u="none" strike="noStrike" cap="none" normalizeH="0" baseline="0" dirty="0">
-                <a:ln>
-                  <a:noFill/>
-                </a:ln>
-                <a:solidFill>
-                  <a:srgbClr val="006666"/>
-                </a:solidFill>
-                <a:effectLst/>
-                <a:latin typeface="Courier New" panose="02070309020205020404" pitchFamily="49" charset="0"/>
-                <a:cs typeface="Courier New" panose="02070309020205020404" pitchFamily="49" charset="0"/>
-              </a:rPr>
-              <a:t>110</a:t>
-            </a:r>
-            <a:r>
-              <a:rPr kumimoji="0" lang="es-MX" altLang="es-MX" sz="1200" i="0" u="none" strike="noStrike" cap="none" normalizeH="0" baseline="0" dirty="0">
-                <a:ln>
-                  <a:noFill/>
-                </a:ln>
-                <a:solidFill>
-                  <a:srgbClr val="666600"/>
-                </a:solidFill>
-                <a:effectLst/>
-                <a:latin typeface="Courier New" panose="02070309020205020404" pitchFamily="49" charset="0"/>
-                <a:cs typeface="Courier New" panose="02070309020205020404" pitchFamily="49" charset="0"/>
-              </a:rPr>
-              <a:t>)</a:t>
-            </a:r>
-            <a:r>
-              <a:rPr kumimoji="0" lang="es-MX" altLang="es-MX" sz="1200" i="0" u="none" strike="noStrike" cap="none" normalizeH="0" baseline="0" dirty="0">
-                <a:ln>
-                  <a:noFill/>
-                </a:ln>
-                <a:solidFill>
-                  <a:srgbClr val="000000"/>
-                </a:solidFill>
-                <a:effectLst/>
-                <a:latin typeface="Courier New" panose="02070309020205020404" pitchFamily="49" charset="0"/>
-                <a:cs typeface="Courier New" panose="02070309020205020404" pitchFamily="49" charset="0"/>
-              </a:rPr>
-              <a:t> </a:t>
-            </a:r>
-          </a:p>
-          <a:p>
-            <a:pPr marL="0" marR="0" lvl="0" indent="0" algn="l" defTabSz="914400" rtl="0" eaLnBrk="0" fontAlgn="base" latinLnBrk="0" hangingPunct="0">
-              <a:lnSpc>
-                <a:spcPct val="100000"/>
-              </a:lnSpc>
-              <a:spcBef>
-                <a:spcPct val="0"/>
-              </a:spcBef>
-              <a:spcAft>
-                <a:spcPct val="0"/>
-              </a:spcAft>
-              <a:buClrTx/>
-              <a:buSzTx/>
-              <a:buFontTx/>
-              <a:buNone/>
-              <a:tabLst/>
-            </a:pPr>
-            <a:r>
-              <a:rPr kumimoji="0" lang="es-MX" altLang="es-MX" sz="1200" i="0" u="none" strike="noStrike" cap="none" normalizeH="0" baseline="0" dirty="0">
-                <a:ln>
-                  <a:noFill/>
-                </a:ln>
-                <a:solidFill>
-                  <a:srgbClr val="000088"/>
-                </a:solidFill>
-                <a:effectLst/>
-                <a:latin typeface="Courier New" panose="02070309020205020404" pitchFamily="49" charset="0"/>
-                <a:cs typeface="Courier New" panose="02070309020205020404" pitchFamily="49" charset="0"/>
-              </a:rPr>
-              <a:t>print</a:t>
-            </a:r>
-            <a:r>
-              <a:rPr kumimoji="0" lang="es-MX" altLang="es-MX" sz="1200" i="0" u="none" strike="noStrike" cap="none" normalizeH="0" baseline="0" dirty="0">
-                <a:ln>
-                  <a:noFill/>
-                </a:ln>
-                <a:solidFill>
-                  <a:srgbClr val="666600"/>
-                </a:solidFill>
-                <a:effectLst/>
-                <a:latin typeface="Courier New" panose="02070309020205020404" pitchFamily="49" charset="0"/>
-                <a:cs typeface="Courier New" panose="02070309020205020404" pitchFamily="49" charset="0"/>
-              </a:rPr>
-              <a:t>(</a:t>
-            </a:r>
-            <a:r>
-              <a:rPr kumimoji="0" lang="es-MX" altLang="es-MX" sz="1200" i="0" u="none" strike="noStrike" cap="none" normalizeH="0" baseline="0" dirty="0">
-                <a:ln>
-                  <a:noFill/>
-                </a:ln>
-                <a:solidFill>
-                  <a:srgbClr val="000000"/>
-                </a:solidFill>
-                <a:effectLst/>
-                <a:latin typeface="Courier New" panose="02070309020205020404" pitchFamily="49" charset="0"/>
-                <a:cs typeface="Courier New" panose="02070309020205020404" pitchFamily="49" charset="0"/>
-              </a:rPr>
-              <a:t>compra1</a:t>
-            </a:r>
-            <a:r>
-              <a:rPr kumimoji="0" lang="es-MX" altLang="es-MX" sz="1200" i="0" u="none" strike="noStrike" cap="none" normalizeH="0" baseline="0" dirty="0">
-                <a:ln>
-                  <a:noFill/>
-                </a:ln>
-                <a:solidFill>
-                  <a:srgbClr val="666600"/>
-                </a:solidFill>
-                <a:effectLst/>
-                <a:latin typeface="Courier New" panose="02070309020205020404" pitchFamily="49" charset="0"/>
-                <a:cs typeface="Courier New" panose="02070309020205020404" pitchFamily="49" charset="0"/>
-              </a:rPr>
-              <a:t>.</a:t>
-            </a:r>
-            <a:r>
-              <a:rPr kumimoji="0" lang="es-MX" altLang="es-MX" sz="1200" i="0" u="none" strike="noStrike" cap="none" normalizeH="0" baseline="0" dirty="0">
-                <a:ln>
-                  <a:noFill/>
-                </a:ln>
-                <a:solidFill>
-                  <a:srgbClr val="000000"/>
-                </a:solidFill>
-                <a:effectLst/>
-                <a:latin typeface="Courier New" panose="02070309020205020404" pitchFamily="49" charset="0"/>
-                <a:cs typeface="Courier New" panose="02070309020205020404" pitchFamily="49" charset="0"/>
-              </a:rPr>
-              <a:t>unidad</a:t>
-            </a:r>
-            <a:r>
-              <a:rPr kumimoji="0" lang="es-MX" altLang="es-MX" sz="1200" i="0" u="none" strike="noStrike" cap="none" normalizeH="0" baseline="0" dirty="0">
-                <a:ln>
-                  <a:noFill/>
-                </a:ln>
-                <a:solidFill>
-                  <a:srgbClr val="666600"/>
-                </a:solidFill>
-                <a:effectLst/>
-                <a:latin typeface="Courier New" panose="02070309020205020404" pitchFamily="49" charset="0"/>
-                <a:cs typeface="Courier New" panose="02070309020205020404" pitchFamily="49" charset="0"/>
-              </a:rPr>
-              <a:t>)</a:t>
-            </a:r>
-            <a:r>
-              <a:rPr kumimoji="0" lang="es-MX" altLang="es-MX" sz="1200" i="0" u="none" strike="noStrike" cap="none" normalizeH="0" baseline="0" dirty="0">
-                <a:ln>
-                  <a:noFill/>
-                </a:ln>
-                <a:solidFill>
-                  <a:srgbClr val="000000"/>
-                </a:solidFill>
-                <a:effectLst/>
-                <a:latin typeface="Courier New" panose="02070309020205020404" pitchFamily="49" charset="0"/>
-                <a:cs typeface="Courier New" panose="02070309020205020404" pitchFamily="49" charset="0"/>
-              </a:rPr>
-              <a:t> </a:t>
-            </a:r>
-          </a:p>
-          <a:p>
-            <a:pPr marL="0" marR="0" lvl="0" indent="0" algn="l" defTabSz="914400" rtl="0" eaLnBrk="0" fontAlgn="base" latinLnBrk="0" hangingPunct="0">
-              <a:lnSpc>
-                <a:spcPct val="100000"/>
-              </a:lnSpc>
-              <a:spcBef>
-                <a:spcPct val="0"/>
-              </a:spcBef>
-              <a:spcAft>
-                <a:spcPct val="0"/>
-              </a:spcAft>
-              <a:buClrTx/>
-              <a:buSzTx/>
-              <a:buFontTx/>
-              <a:buNone/>
-              <a:tabLst/>
-            </a:pPr>
-            <a:r>
-              <a:rPr kumimoji="0" lang="es-MX" altLang="es-MX" sz="1200" i="0" u="none" strike="noStrike" cap="none" normalizeH="0" baseline="0" dirty="0">
-                <a:ln>
-                  <a:noFill/>
-                </a:ln>
-                <a:solidFill>
-                  <a:srgbClr val="000088"/>
-                </a:solidFill>
-                <a:effectLst/>
-                <a:latin typeface="Courier New" panose="02070309020205020404" pitchFamily="49" charset="0"/>
-                <a:cs typeface="Courier New" panose="02070309020205020404" pitchFamily="49" charset="0"/>
-              </a:rPr>
-              <a:t>print</a:t>
-            </a:r>
-            <a:r>
-              <a:rPr kumimoji="0" lang="es-MX" altLang="es-MX" sz="1200" i="0" u="none" strike="noStrike" cap="none" normalizeH="0" baseline="0" dirty="0">
-                <a:ln>
-                  <a:noFill/>
-                </a:ln>
-                <a:solidFill>
-                  <a:srgbClr val="666600"/>
-                </a:solidFill>
-                <a:effectLst/>
-                <a:latin typeface="Courier New" panose="02070309020205020404" pitchFamily="49" charset="0"/>
-                <a:cs typeface="Courier New" panose="02070309020205020404" pitchFamily="49" charset="0"/>
-              </a:rPr>
-              <a:t>(</a:t>
-            </a:r>
-            <a:r>
-              <a:rPr kumimoji="0" lang="es-MX" altLang="es-MX" sz="1200" i="0" u="none" strike="noStrike" cap="none" normalizeH="0" baseline="0" dirty="0">
-                <a:ln>
-                  <a:noFill/>
-                </a:ln>
-                <a:solidFill>
-                  <a:srgbClr val="000000"/>
-                </a:solidFill>
-                <a:effectLst/>
-                <a:latin typeface="Courier New" panose="02070309020205020404" pitchFamily="49" charset="0"/>
-                <a:cs typeface="Courier New" panose="02070309020205020404" pitchFamily="49" charset="0"/>
-              </a:rPr>
-              <a:t>compra1</a:t>
-            </a:r>
-            <a:r>
-              <a:rPr kumimoji="0" lang="es-MX" altLang="es-MX" sz="1200" i="0" u="none" strike="noStrike" cap="none" normalizeH="0" baseline="0" dirty="0">
-                <a:ln>
-                  <a:noFill/>
-                </a:ln>
-                <a:solidFill>
-                  <a:srgbClr val="666600"/>
-                </a:solidFill>
-                <a:effectLst/>
-                <a:latin typeface="Courier New" panose="02070309020205020404" pitchFamily="49" charset="0"/>
-                <a:cs typeface="Courier New" panose="02070309020205020404" pitchFamily="49" charset="0"/>
-              </a:rPr>
-              <a:t>.</a:t>
-            </a:r>
-            <a:r>
-              <a:rPr kumimoji="0" lang="es-MX" altLang="es-MX" sz="1200" i="0" u="none" strike="noStrike" cap="none" normalizeH="0" baseline="0" dirty="0">
-                <a:ln>
-                  <a:noFill/>
-                </a:ln>
-                <a:solidFill>
-                  <a:srgbClr val="000000"/>
-                </a:solidFill>
-                <a:effectLst/>
-                <a:latin typeface="Courier New" panose="02070309020205020404" pitchFamily="49" charset="0"/>
-                <a:cs typeface="Courier New" panose="02070309020205020404" pitchFamily="49" charset="0"/>
-              </a:rPr>
-              <a:t>precio</a:t>
-            </a:r>
-            <a:r>
-              <a:rPr kumimoji="0" lang="es-MX" altLang="es-MX" sz="1200" i="0" u="none" strike="noStrike" cap="none" normalizeH="0" baseline="0" dirty="0">
-                <a:ln>
-                  <a:noFill/>
-                </a:ln>
-                <a:solidFill>
-                  <a:srgbClr val="666600"/>
-                </a:solidFill>
-                <a:effectLst/>
-                <a:latin typeface="Courier New" panose="02070309020205020404" pitchFamily="49" charset="0"/>
-                <a:cs typeface="Courier New" panose="02070309020205020404" pitchFamily="49" charset="0"/>
-              </a:rPr>
-              <a:t>)</a:t>
-            </a:r>
-            <a:r>
-              <a:rPr kumimoji="0" lang="es-MX" altLang="es-MX" sz="1200" i="0" u="none" strike="noStrike" cap="none" normalizeH="0" baseline="0" dirty="0">
-                <a:ln>
-                  <a:noFill/>
-                </a:ln>
-                <a:solidFill>
-                  <a:srgbClr val="000000"/>
-                </a:solidFill>
-                <a:effectLst/>
-                <a:latin typeface="Courier New" panose="02070309020205020404" pitchFamily="49" charset="0"/>
-                <a:cs typeface="Courier New" panose="02070309020205020404" pitchFamily="49" charset="0"/>
-              </a:rPr>
-              <a:t> </a:t>
-            </a:r>
-          </a:p>
-          <a:p>
-            <a:pPr marL="0" marR="0" lvl="0" indent="0" algn="l" defTabSz="914400" rtl="0" eaLnBrk="0" fontAlgn="base" latinLnBrk="0" hangingPunct="0">
-              <a:lnSpc>
-                <a:spcPct val="100000"/>
-              </a:lnSpc>
-              <a:spcBef>
-                <a:spcPct val="0"/>
-              </a:spcBef>
-              <a:spcAft>
-                <a:spcPct val="0"/>
-              </a:spcAft>
-              <a:buClrTx/>
-              <a:buSzTx/>
-              <a:buFontTx/>
-              <a:buNone/>
-              <a:tabLst/>
-            </a:pPr>
-            <a:r>
-              <a:rPr kumimoji="0" lang="es-MX" altLang="es-MX" sz="1200" i="0" u="none" strike="noStrike" cap="none" normalizeH="0" baseline="0" dirty="0">
-                <a:ln>
-                  <a:noFill/>
-                </a:ln>
-                <a:solidFill>
-                  <a:srgbClr val="000088"/>
-                </a:solidFill>
-                <a:effectLst/>
-                <a:latin typeface="Courier New" panose="02070309020205020404" pitchFamily="49" charset="0"/>
-                <a:cs typeface="Courier New" panose="02070309020205020404" pitchFamily="49" charset="0"/>
-              </a:rPr>
-              <a:t>print</a:t>
-            </a:r>
-            <a:r>
-              <a:rPr kumimoji="0" lang="es-MX" altLang="es-MX" sz="1200" i="0" u="none" strike="noStrike" cap="none" normalizeH="0" baseline="0" dirty="0">
-                <a:ln>
-                  <a:noFill/>
-                </a:ln>
-                <a:solidFill>
-                  <a:srgbClr val="666600"/>
-                </a:solidFill>
-                <a:effectLst/>
-                <a:latin typeface="Courier New" panose="02070309020205020404" pitchFamily="49" charset="0"/>
-                <a:cs typeface="Courier New" panose="02070309020205020404" pitchFamily="49" charset="0"/>
-              </a:rPr>
-              <a:t>(</a:t>
-            </a:r>
-            <a:r>
-              <a:rPr kumimoji="0" lang="es-MX" altLang="es-MX" sz="1200" i="0" u="none" strike="noStrike" cap="none" normalizeH="0" baseline="0" dirty="0">
-                <a:ln>
-                  <a:noFill/>
-                </a:ln>
-                <a:solidFill>
-                  <a:srgbClr val="000000"/>
-                </a:solidFill>
-                <a:effectLst/>
-                <a:latin typeface="Courier New" panose="02070309020205020404" pitchFamily="49" charset="0"/>
-                <a:cs typeface="Courier New" panose="02070309020205020404" pitchFamily="49" charset="0"/>
-              </a:rPr>
-              <a:t>compra1</a:t>
-            </a:r>
-            <a:r>
-              <a:rPr kumimoji="0" lang="es-MX" altLang="es-MX" sz="1200" i="0" u="none" strike="noStrike" cap="none" normalizeH="0" baseline="0" dirty="0">
-                <a:ln>
-                  <a:noFill/>
-                </a:ln>
-                <a:solidFill>
-                  <a:srgbClr val="666600"/>
-                </a:solidFill>
-                <a:effectLst/>
-                <a:latin typeface="Courier New" panose="02070309020205020404" pitchFamily="49" charset="0"/>
-                <a:cs typeface="Courier New" panose="02070309020205020404" pitchFamily="49" charset="0"/>
-              </a:rPr>
-              <a:t>.</a:t>
-            </a:r>
-            <a:r>
-              <a:rPr kumimoji="0" lang="es-MX" altLang="es-MX" sz="1200" i="0" u="none" strike="noStrike" cap="none" normalizeH="0" baseline="0" dirty="0">
-                <a:ln>
-                  <a:noFill/>
-                </a:ln>
-                <a:solidFill>
-                  <a:srgbClr val="000000"/>
-                </a:solidFill>
-                <a:effectLst/>
-                <a:latin typeface="Courier New" panose="02070309020205020404" pitchFamily="49" charset="0"/>
-                <a:cs typeface="Courier New" panose="02070309020205020404" pitchFamily="49" charset="0"/>
-              </a:rPr>
-              <a:t>a_pagar</a:t>
-            </a:r>
-            <a:r>
-              <a:rPr kumimoji="0" lang="es-MX" altLang="es-MX" sz="1200" i="0" u="none" strike="noStrike" cap="none" normalizeH="0" baseline="0" dirty="0">
-                <a:ln>
-                  <a:noFill/>
-                </a:ln>
-                <a:solidFill>
-                  <a:srgbClr val="666600"/>
-                </a:solidFill>
-                <a:effectLst/>
-                <a:latin typeface="Courier New" panose="02070309020205020404" pitchFamily="49" charset="0"/>
-                <a:cs typeface="Courier New" panose="02070309020205020404" pitchFamily="49" charset="0"/>
-              </a:rPr>
-              <a:t>(),</a:t>
-            </a:r>
-            <a:r>
-              <a:rPr kumimoji="0" lang="es-MX" altLang="es-MX" sz="1200" i="0" u="none" strike="noStrike" cap="none" normalizeH="0" baseline="0" dirty="0">
-                <a:ln>
-                  <a:noFill/>
-                </a:ln>
-                <a:solidFill>
-                  <a:srgbClr val="000000"/>
-                </a:solidFill>
-                <a:effectLst/>
-                <a:latin typeface="Courier New" panose="02070309020205020404" pitchFamily="49" charset="0"/>
-                <a:cs typeface="Courier New" panose="02070309020205020404" pitchFamily="49" charset="0"/>
-              </a:rPr>
-              <a:t> </a:t>
-            </a:r>
-            <a:r>
-              <a:rPr kumimoji="0" lang="es-MX" altLang="es-MX" sz="1200" i="0" u="none" strike="noStrike" cap="none" normalizeH="0" baseline="0" dirty="0">
-                <a:ln>
-                  <a:noFill/>
-                </a:ln>
-                <a:solidFill>
-                  <a:srgbClr val="008800"/>
-                </a:solidFill>
-                <a:effectLst/>
-                <a:latin typeface="Courier New" panose="02070309020205020404" pitchFamily="49" charset="0"/>
-                <a:cs typeface="Courier New" panose="02070309020205020404" pitchFamily="49" charset="0"/>
-              </a:rPr>
-              <a:t>"euros"</a:t>
-            </a:r>
-            <a:r>
-              <a:rPr kumimoji="0" lang="es-MX" altLang="es-MX" sz="1200" i="0" u="none" strike="noStrike" cap="none" normalizeH="0" baseline="0" dirty="0">
-                <a:ln>
-                  <a:noFill/>
-                </a:ln>
-                <a:solidFill>
-                  <a:srgbClr val="666600"/>
-                </a:solidFill>
-                <a:effectLst/>
-                <a:latin typeface="Courier New" panose="02070309020205020404" pitchFamily="49" charset="0"/>
-                <a:cs typeface="Courier New" panose="02070309020205020404" pitchFamily="49" charset="0"/>
-              </a:rPr>
-              <a:t>)</a:t>
-            </a:r>
-            <a:r>
-              <a:rPr kumimoji="0" lang="es-MX" altLang="es-MX" sz="1200" i="0" u="none" strike="noStrike" cap="none" normalizeH="0" baseline="0" dirty="0">
-                <a:ln>
-                  <a:noFill/>
-                </a:ln>
-                <a:solidFill>
-                  <a:srgbClr val="000000"/>
-                </a:solidFill>
-                <a:effectLst/>
-                <a:latin typeface="Courier New" panose="02070309020205020404" pitchFamily="49" charset="0"/>
-                <a:cs typeface="Courier New" panose="02070309020205020404" pitchFamily="49" charset="0"/>
-              </a:rPr>
-              <a:t> </a:t>
-            </a:r>
-          </a:p>
-          <a:p>
-            <a:pPr marL="0" marR="0" lvl="0" indent="0" algn="l" defTabSz="914400" rtl="0" eaLnBrk="0" fontAlgn="base" latinLnBrk="0" hangingPunct="0">
-              <a:lnSpc>
-                <a:spcPct val="100000"/>
-              </a:lnSpc>
-              <a:spcBef>
-                <a:spcPct val="0"/>
-              </a:spcBef>
-              <a:spcAft>
-                <a:spcPct val="0"/>
-              </a:spcAft>
-              <a:buClrTx/>
-              <a:buSzTx/>
-              <a:buFontTx/>
-              <a:buNone/>
-              <a:tabLst/>
-            </a:pPr>
-            <a:r>
-              <a:rPr kumimoji="0" lang="es-MX" altLang="es-MX" sz="1200" i="0" u="none" strike="noStrike" cap="none" normalizeH="0" baseline="0" dirty="0">
-                <a:ln>
-                  <a:noFill/>
-                </a:ln>
-                <a:solidFill>
-                  <a:srgbClr val="000088"/>
-                </a:solidFill>
-                <a:effectLst/>
-                <a:highlight>
-                  <a:srgbClr val="FFFF00"/>
-                </a:highlight>
-                <a:latin typeface="Courier New" panose="02070309020205020404" pitchFamily="49" charset="0"/>
-                <a:cs typeface="Courier New" panose="02070309020205020404" pitchFamily="49" charset="0"/>
-              </a:rPr>
-              <a:t>print</a:t>
-            </a:r>
-            <a:r>
-              <a:rPr kumimoji="0" lang="es-MX" altLang="es-MX" sz="1200" i="0" u="none" strike="noStrike" cap="none" normalizeH="0" baseline="0" dirty="0">
-                <a:ln>
-                  <a:noFill/>
-                </a:ln>
-                <a:solidFill>
-                  <a:srgbClr val="666600"/>
-                </a:solidFill>
-                <a:effectLst/>
-                <a:highlight>
-                  <a:srgbClr val="FFFF00"/>
-                </a:highlight>
-                <a:latin typeface="Courier New" panose="02070309020205020404" pitchFamily="49" charset="0"/>
-                <a:cs typeface="Courier New" panose="02070309020205020404" pitchFamily="49" charset="0"/>
-              </a:rPr>
-              <a:t>(</a:t>
-            </a:r>
-            <a:r>
-              <a:rPr kumimoji="0" lang="es-MX" altLang="es-MX" sz="1200" i="0" u="none" strike="noStrike" cap="none" normalizeH="0" baseline="0" dirty="0">
-                <a:ln>
-                  <a:noFill/>
-                </a:ln>
-                <a:solidFill>
-                  <a:srgbClr val="000000"/>
-                </a:solidFill>
-                <a:effectLst/>
-                <a:highlight>
-                  <a:srgbClr val="FFFF00"/>
-                </a:highlight>
-                <a:latin typeface="Courier New" panose="02070309020205020404" pitchFamily="49" charset="0"/>
-                <a:cs typeface="Courier New" panose="02070309020205020404" pitchFamily="49" charset="0"/>
-              </a:rPr>
-              <a:t>compra1</a:t>
-            </a:r>
-            <a:r>
-              <a:rPr kumimoji="0" lang="es-MX" altLang="es-MX" sz="1200" i="0" u="none" strike="noStrike" cap="none" normalizeH="0" baseline="0" dirty="0">
-                <a:ln>
-                  <a:noFill/>
-                </a:ln>
-                <a:solidFill>
-                  <a:srgbClr val="666600"/>
-                </a:solidFill>
-                <a:effectLst/>
-                <a:highlight>
-                  <a:srgbClr val="FFFF00"/>
-                </a:highlight>
-                <a:latin typeface="Courier New" panose="02070309020205020404" pitchFamily="49" charset="0"/>
-                <a:cs typeface="Courier New" panose="02070309020205020404" pitchFamily="49" charset="0"/>
-              </a:rPr>
-              <a:t>.</a:t>
-            </a:r>
-            <a:r>
-              <a:rPr kumimoji="0" lang="es-MX" altLang="es-MX" sz="1200" i="0" u="none" strike="noStrike" cap="none" normalizeH="0" baseline="0" dirty="0">
-                <a:ln>
-                  <a:noFill/>
-                </a:ln>
-                <a:solidFill>
-                  <a:srgbClr val="660066"/>
-                </a:solidFill>
-                <a:effectLst/>
-                <a:highlight>
-                  <a:srgbClr val="FFFF00"/>
-                </a:highlight>
-                <a:latin typeface="Courier New" panose="02070309020205020404" pitchFamily="49" charset="0"/>
-                <a:cs typeface="Courier New" panose="02070309020205020404" pitchFamily="49" charset="0"/>
-              </a:rPr>
-              <a:t>_Factura__tasa</a:t>
-            </a:r>
-            <a:r>
-              <a:rPr kumimoji="0" lang="es-MX" altLang="es-MX" sz="1200" i="0" u="none" strike="noStrike" cap="none" normalizeH="0" baseline="0" dirty="0">
-                <a:ln>
-                  <a:noFill/>
-                </a:ln>
-                <a:solidFill>
-                  <a:srgbClr val="666600"/>
-                </a:solidFill>
-                <a:effectLst/>
-                <a:highlight>
-                  <a:srgbClr val="FFFF00"/>
-                </a:highlight>
-                <a:latin typeface="Courier New" panose="02070309020205020404" pitchFamily="49" charset="0"/>
-                <a:cs typeface="Courier New" panose="02070309020205020404" pitchFamily="49" charset="0"/>
-              </a:rPr>
-              <a:t>)</a:t>
-            </a:r>
-            <a:r>
-              <a:rPr kumimoji="0" lang="es-MX" altLang="es-MX" sz="1200" i="0" u="none" strike="noStrike" cap="none" normalizeH="0" baseline="0" dirty="0">
-                <a:ln>
-                  <a:noFill/>
-                </a:ln>
-                <a:solidFill>
-                  <a:srgbClr val="000000"/>
-                </a:solidFill>
-                <a:effectLst/>
-                <a:highlight>
-                  <a:srgbClr val="FFFF00"/>
-                </a:highlight>
-                <a:latin typeface="Courier New" panose="02070309020205020404" pitchFamily="49" charset="0"/>
-                <a:cs typeface="Courier New" panose="02070309020205020404" pitchFamily="49" charset="0"/>
-              </a:rPr>
-              <a:t> </a:t>
-            </a:r>
-            <a:r>
-              <a:rPr kumimoji="0" lang="es-MX" altLang="es-MX" sz="1200" i="0" u="none" strike="noStrike" cap="none" normalizeH="0" baseline="0" dirty="0">
-                <a:ln>
-                  <a:noFill/>
-                </a:ln>
-                <a:solidFill>
-                  <a:srgbClr val="880000"/>
-                </a:solidFill>
-                <a:effectLst/>
-                <a:highlight>
-                  <a:srgbClr val="FFFF00"/>
-                </a:highlight>
-                <a:latin typeface="Courier New" panose="02070309020205020404" pitchFamily="49" charset="0"/>
-                <a:cs typeface="Courier New" panose="02070309020205020404" pitchFamily="49" charset="0"/>
-              </a:rPr>
-              <a:t># 19</a:t>
-            </a:r>
-            <a:endParaRPr kumimoji="0" lang="es-MX" altLang="es-MX" sz="1200" i="0" u="none" strike="noStrike" cap="none" normalizeH="0" baseline="0" dirty="0">
-              <a:ln>
-                <a:noFill/>
-              </a:ln>
-              <a:solidFill>
-                <a:srgbClr val="000000"/>
-              </a:solidFill>
-              <a:effectLst/>
-              <a:highlight>
-                <a:srgbClr val="FFFF00"/>
-              </a:highlight>
-              <a:latin typeface="Courier New" panose="02070309020205020404" pitchFamily="49" charset="0"/>
-              <a:cs typeface="Courier New" panose="02070309020205020404" pitchFamily="49" charset="0"/>
-            </a:endParaRPr>
-          </a:p>
-          <a:p>
-            <a:pPr marL="0" marR="0" lvl="0" indent="0" algn="l" defTabSz="914400" rtl="0" eaLnBrk="0" fontAlgn="base" latinLnBrk="0" hangingPunct="0">
-              <a:lnSpc>
-                <a:spcPct val="100000"/>
-              </a:lnSpc>
-              <a:spcBef>
-                <a:spcPct val="0"/>
-              </a:spcBef>
-              <a:spcAft>
-                <a:spcPct val="0"/>
-              </a:spcAft>
-              <a:buClrTx/>
-              <a:buSzTx/>
-              <a:buFontTx/>
-              <a:buNone/>
-              <a:tabLst/>
-            </a:pPr>
-            <a:endParaRPr kumimoji="0" lang="es-MX" altLang="es-MX" sz="900" b="0" i="0" u="none" strike="noStrike" cap="none" normalizeH="0" baseline="0" dirty="0">
-              <a:ln>
-                <a:noFill/>
-              </a:ln>
-              <a:solidFill>
-                <a:srgbClr val="000000"/>
-              </a:solidFill>
-              <a:effectLst/>
-              <a:latin typeface="Arial Unicode MS"/>
-            </a:endParaRPr>
-          </a:p>
-          <a:p>
-            <a:pPr marL="0" marR="0" lvl="0" indent="0" algn="l" defTabSz="914400" rtl="0" eaLnBrk="0" fontAlgn="base" latinLnBrk="0" hangingPunct="0">
-              <a:lnSpc>
-                <a:spcPct val="100000"/>
-              </a:lnSpc>
-              <a:spcBef>
-                <a:spcPct val="0"/>
-              </a:spcBef>
-              <a:spcAft>
-                <a:spcPct val="0"/>
-              </a:spcAft>
-              <a:buClrTx/>
-              <a:buSzTx/>
-              <a:buFontTx/>
-              <a:buNone/>
-              <a:tabLst/>
-            </a:pPr>
-            <a:endParaRPr kumimoji="0" lang="es-MX" altLang="es-MX" sz="1800" b="0" i="0" u="none" strike="noStrike" cap="none" normalizeH="0" baseline="0" dirty="0">
-              <a:ln>
-                <a:noFill/>
-              </a:ln>
-              <a:solidFill>
-                <a:schemeClr val="tx1"/>
-              </a:solidFill>
-              <a:effectLst/>
-              <a:latin typeface="Arial" panose="020B0604020202020204" pitchFamily="34" charset="0"/>
-            </a:endParaRPr>
-          </a:p>
-        </p:txBody>
-      </p:sp>
-    </p:spTree>
-    <p:extLst>
-      <p:ext uri="{BB962C8B-B14F-4D97-AF65-F5344CB8AC3E}">
-        <p14:creationId xmlns:p14="http://schemas.microsoft.com/office/powerpoint/2010/main" val="3978711830"/>
-      </p:ext>
-    </p:extLst>
-  </p:cSld>
-  <p:clrMapOvr>
-    <a:masterClrMapping/>
-  </p:clrMapOvr>
-</p:sld>
-</file>
-
-<file path=ppt/slides/slide8.xml><?xml version="1.0" encoding="utf-8"?>
-<p:sld xmlns:a="http://schemas.openxmlformats.org/drawingml/2006/main" xmlns:r="http://schemas.openxmlformats.org/officeDocument/2006/relationships" xmlns:p="http://schemas.openxmlformats.org/presentationml/2006/main">
-  <p:cSld>
-    <p:spTree>
-      <p:nvGrpSpPr>
-        <p:cNvPr id="1" name=""/>
-        <p:cNvGrpSpPr/>
-        <p:nvPr/>
-      </p:nvGrpSpPr>
-      <p:grpSpPr>
-        <a:xfrm>
-          <a:off x="0" y="0"/>
-          <a:ext cx="0" cy="0"/>
-          <a:chOff x="0" y="0"/>
-          <a:chExt cx="0" cy="0"/>
-        </a:xfrm>
-      </p:grpSpPr>
-      <p:sp>
-        <p:nvSpPr>
-          <p:cNvPr id="4" name="Rectangle 2">
-            <a:extLst>
-              <a:ext uri="{FF2B5EF4-FFF2-40B4-BE49-F238E27FC236}">
-                <a16:creationId xmlns:a16="http://schemas.microsoft.com/office/drawing/2014/main" id="{7CE40F4F-E91D-42FD-B661-EAA8BC18ABC8}"/>
-              </a:ext>
-            </a:extLst>
-          </p:cNvPr>
-          <p:cNvSpPr txBox="1">
-            <a:spLocks noChangeArrowheads="1"/>
-          </p:cNvSpPr>
-          <p:nvPr/>
-        </p:nvSpPr>
-        <p:spPr>
-          <a:xfrm>
-            <a:off x="0" y="-27383"/>
-            <a:ext cx="9144000" cy="1008112"/>
-          </a:xfrm>
-          <a:prstGeom prst="rect">
-            <a:avLst/>
-          </a:prstGeom>
-        </p:spPr>
-        <p:txBody>
-          <a:bodyPr vert="horz" lIns="91440" tIns="45720" rIns="91440" bIns="45720" rtlCol="0" anchor="ctr">
-            <a:normAutofit/>
-          </a:bodyPr>
-          <a:lstStyle>
-            <a:lvl1pPr algn="ctr" defTabSz="914400" rtl="0" eaLnBrk="1" latinLnBrk="0" hangingPunct="1">
-              <a:spcBef>
-                <a:spcPct val="0"/>
-              </a:spcBef>
-              <a:buNone/>
-              <a:defRPr sz="4400" kern="1200">
-                <a:solidFill>
-                  <a:schemeClr val="tx1"/>
-                </a:solidFill>
-                <a:latin typeface="+mj-lt"/>
-                <a:ea typeface="+mj-ea"/>
-                <a:cs typeface="+mj-cs"/>
-              </a:defRPr>
-            </a:lvl1pPr>
-          </a:lstStyle>
-          <a:p>
-            <a:r>
-              <a:rPr lang="es-ES_tradnl" altLang="es-MX" sz="3200" b="1" dirty="0">
-                <a:solidFill>
-                  <a:schemeClr val="accent4">
-                    <a:lumMod val="50000"/>
-                  </a:schemeClr>
-                </a:solidFill>
-                <a:effectLst>
-                  <a:outerShdw blurRad="38100" dist="38100" dir="2700000" algn="tl">
-                    <a:srgbClr val="C0C0C0"/>
-                  </a:outerShdw>
-                </a:effectLst>
-                <a:latin typeface="Dom Casual" charset="0"/>
-              </a:rPr>
-              <a:t>Métodos </a:t>
-            </a:r>
-            <a:r>
-              <a:rPr lang="es-ES_tradnl" altLang="es-MX" sz="3200" b="1" dirty="0" err="1">
-                <a:solidFill>
-                  <a:schemeClr val="accent4">
-                    <a:lumMod val="50000"/>
-                  </a:schemeClr>
-                </a:solidFill>
-                <a:effectLst>
-                  <a:outerShdw blurRad="38100" dist="38100" dir="2700000" algn="tl">
-                    <a:srgbClr val="C0C0C0"/>
-                  </a:outerShdw>
-                </a:effectLst>
-                <a:latin typeface="Dom Casual" charset="0"/>
-              </a:rPr>
-              <a:t>get</a:t>
-            </a:r>
-            <a:r>
-              <a:rPr lang="es-ES_tradnl" altLang="es-MX" sz="3200" b="1" dirty="0">
-                <a:solidFill>
-                  <a:schemeClr val="accent4">
-                    <a:lumMod val="50000"/>
-                  </a:schemeClr>
-                </a:solidFill>
-                <a:effectLst>
-                  <a:outerShdw blurRad="38100" dist="38100" dir="2700000" algn="tl">
-                    <a:srgbClr val="C0C0C0"/>
-                  </a:outerShdw>
-                </a:effectLst>
-                <a:latin typeface="Dom Casual" charset="0"/>
-              </a:rPr>
-              <a:t>, set y del</a:t>
-            </a:r>
-          </a:p>
-        </p:txBody>
-      </p:sp>
-      <p:sp>
-        <p:nvSpPr>
-          <p:cNvPr id="10" name="CuadroTexto 9">
-            <a:extLst>
-              <a:ext uri="{FF2B5EF4-FFF2-40B4-BE49-F238E27FC236}">
-                <a16:creationId xmlns:a16="http://schemas.microsoft.com/office/drawing/2014/main" id="{B73C42C7-85D9-4D9B-B558-211E4812A4BA}"/>
-              </a:ext>
-            </a:extLst>
-          </p:cNvPr>
-          <p:cNvSpPr txBox="1"/>
-          <p:nvPr/>
-        </p:nvSpPr>
-        <p:spPr>
-          <a:xfrm>
-            <a:off x="467544" y="1071605"/>
-            <a:ext cx="8208912" cy="707501"/>
-          </a:xfrm>
-          <a:prstGeom prst="rect">
-            <a:avLst/>
-          </a:prstGeom>
-          <a:noFill/>
-        </p:spPr>
-        <p:txBody>
-          <a:bodyPr wrap="square" rtlCol="0">
-            <a:spAutoFit/>
-          </a:bodyPr>
-          <a:lstStyle/>
-          <a:p>
-            <a:pPr algn="just">
-              <a:lnSpc>
-                <a:spcPts val="2500"/>
-              </a:lnSpc>
-            </a:pPr>
-            <a:r>
-              <a:rPr lang="es-ES" sz="1600" dirty="0">
-                <a:solidFill>
-                  <a:schemeClr val="tx1">
-                    <a:lumMod val="95000"/>
-                    <a:lumOff val="5000"/>
-                  </a:schemeClr>
-                </a:solidFill>
-              </a:rPr>
-              <a:t>Cuando se trabajan con clases es recomendable crear </a:t>
-            </a:r>
-            <a:r>
-              <a:rPr lang="es-ES" sz="1600" b="1" dirty="0">
-                <a:solidFill>
-                  <a:srgbClr val="0070C0"/>
-                </a:solidFill>
-              </a:rPr>
-              <a:t>atributos ocultos </a:t>
-            </a:r>
-            <a:r>
-              <a:rPr lang="es-ES" sz="1600" dirty="0">
-                <a:solidFill>
-                  <a:schemeClr val="tx1">
-                    <a:lumMod val="95000"/>
-                    <a:lumOff val="5000"/>
-                  </a:schemeClr>
-                </a:solidFill>
-              </a:rPr>
-              <a:t>y utilizar </a:t>
-            </a:r>
-            <a:r>
-              <a:rPr lang="es-ES" sz="1600" b="1" dirty="0">
-                <a:solidFill>
-                  <a:srgbClr val="0070C0"/>
-                </a:solidFill>
-              </a:rPr>
-              <a:t>métodos</a:t>
-            </a:r>
-            <a:r>
-              <a:rPr lang="es-ES" sz="1600" dirty="0">
-                <a:solidFill>
-                  <a:schemeClr val="tx1">
-                    <a:lumMod val="95000"/>
-                    <a:lumOff val="5000"/>
-                  </a:schemeClr>
-                </a:solidFill>
-              </a:rPr>
-              <a:t> específicos para acceder a los mismos para establecer, obtener o borrar la información:</a:t>
-            </a:r>
-            <a:endParaRPr lang="es-ES" sz="1600" b="1" dirty="0">
-              <a:solidFill>
-                <a:schemeClr val="accent6">
-                  <a:lumMod val="75000"/>
-                </a:schemeClr>
-              </a:solidFill>
-            </a:endParaRPr>
-          </a:p>
-        </p:txBody>
-      </p:sp>
-      <p:pic>
-        <p:nvPicPr>
-          <p:cNvPr id="3" name="Imagen 2">
-            <a:extLst>
-              <a:ext uri="{FF2B5EF4-FFF2-40B4-BE49-F238E27FC236}">
-                <a16:creationId xmlns:a16="http://schemas.microsoft.com/office/drawing/2014/main" id="{66F3A83B-2FA4-4582-BCE0-C9174424F60B}"/>
-              </a:ext>
-            </a:extLst>
-          </p:cNvPr>
-          <p:cNvPicPr>
-            <a:picLocks noChangeAspect="1"/>
-          </p:cNvPicPr>
-          <p:nvPr/>
-        </p:nvPicPr>
-        <p:blipFill>
-          <a:blip r:embed="rId2"/>
-          <a:stretch>
-            <a:fillRect/>
-          </a:stretch>
-        </p:blipFill>
-        <p:spPr>
-          <a:xfrm>
-            <a:off x="611560" y="1970545"/>
-            <a:ext cx="3586201" cy="4293096"/>
-          </a:xfrm>
-          <a:prstGeom prst="rect">
-            <a:avLst/>
-          </a:prstGeom>
-        </p:spPr>
-      </p:pic>
-    </p:spTree>
-    <p:extLst>
-      <p:ext uri="{BB962C8B-B14F-4D97-AF65-F5344CB8AC3E}">
-        <p14:creationId xmlns:p14="http://schemas.microsoft.com/office/powerpoint/2010/main" val="2924426002"/>
-      </p:ext>
-    </p:extLst>
-  </p:cSld>
-  <p:clrMapOvr>
-    <a:masterClrMapping/>
-  </p:clrMapOvr>
-</p:sld>
-</file>
-
-<file path=ppt/slides/slide9.xml><?xml version="1.0" encoding="utf-8"?>
-<p:sld xmlns:a="http://schemas.openxmlformats.org/drawingml/2006/main" xmlns:r="http://schemas.openxmlformats.org/officeDocument/2006/relationships" xmlns:p="http://schemas.openxmlformats.org/presentationml/2006/main">
-  <p:cSld>
-    <p:spTree>
-      <p:nvGrpSpPr>
-        <p:cNvPr id="1" name=""/>
-        <p:cNvGrpSpPr/>
-        <p:nvPr/>
-      </p:nvGrpSpPr>
-      <p:grpSpPr>
-        <a:xfrm>
-          <a:off x="0" y="0"/>
-          <a:ext cx="0" cy="0"/>
-          <a:chOff x="0" y="0"/>
-          <a:chExt cx="0" cy="0"/>
-        </a:xfrm>
-      </p:grpSpPr>
-      <p:sp>
-        <p:nvSpPr>
-          <p:cNvPr id="2" name="object 2"/>
-          <p:cNvSpPr/>
-          <p:nvPr/>
-        </p:nvSpPr>
-        <p:spPr>
-          <a:xfrm>
-            <a:off x="8218931" y="4978146"/>
-            <a:ext cx="684276" cy="594360"/>
-          </a:xfrm>
-          <a:prstGeom prst="rect">
-            <a:avLst/>
-          </a:prstGeom>
-          <a:blipFill>
-            <a:blip r:embed="rId2" cstate="print"/>
-            <a:stretch>
-              <a:fillRect/>
-            </a:stretch>
-          </a:blipFill>
-        </p:spPr>
-        <p:txBody>
-          <a:bodyPr wrap="square" lIns="0" tIns="0" rIns="0" bIns="0" rtlCol="0">
-            <a:noAutofit/>
-          </a:bodyPr>
-          <a:lstStyle/>
-          <a:p>
-            <a:endParaRPr dirty="0"/>
-          </a:p>
-        </p:txBody>
-      </p:sp>
-      <p:sp>
-        <p:nvSpPr>
-          <p:cNvPr id="3" name="object 3"/>
-          <p:cNvSpPr/>
-          <p:nvPr/>
-        </p:nvSpPr>
-        <p:spPr>
-          <a:xfrm>
-            <a:off x="315468" y="1035558"/>
-            <a:ext cx="1089660" cy="943355"/>
-          </a:xfrm>
-          <a:prstGeom prst="rect">
-            <a:avLst/>
-          </a:prstGeom>
-          <a:blipFill>
-            <a:blip r:embed="rId3" cstate="print"/>
-            <a:stretch>
-              <a:fillRect/>
-            </a:stretch>
-          </a:blipFill>
-        </p:spPr>
-        <p:txBody>
-          <a:bodyPr wrap="square" lIns="0" tIns="0" rIns="0" bIns="0" rtlCol="0">
-            <a:noAutofit/>
-          </a:bodyPr>
-          <a:lstStyle/>
-          <a:p>
-            <a:endParaRPr dirty="0"/>
-          </a:p>
-        </p:txBody>
-      </p:sp>
-      <p:sp>
-        <p:nvSpPr>
-          <p:cNvPr id="4" name="object 4"/>
-          <p:cNvSpPr/>
-          <p:nvPr/>
-        </p:nvSpPr>
-        <p:spPr>
-          <a:xfrm>
-            <a:off x="0" y="1704595"/>
-            <a:ext cx="550164" cy="585215"/>
-          </a:xfrm>
-          <a:custGeom>
-            <a:avLst/>
-            <a:gdLst/>
-            <a:ahLst/>
-            <a:cxnLst/>
-            <a:rect l="l" t="t" r="r" b="b"/>
-            <a:pathLst>
-              <a:path w="550164" h="585215">
-                <a:moveTo>
-                  <a:pt x="0" y="507832"/>
-                </a:moveTo>
-                <a:lnTo>
-                  <a:pt x="44383" y="585215"/>
-                </a:lnTo>
-                <a:lnTo>
-                  <a:pt x="382333" y="585215"/>
-                </a:lnTo>
-                <a:lnTo>
-                  <a:pt x="550164" y="292607"/>
-                </a:lnTo>
-                <a:lnTo>
-                  <a:pt x="382333" y="0"/>
-                </a:lnTo>
-                <a:lnTo>
-                  <a:pt x="44383" y="0"/>
-                </a:lnTo>
-                <a:lnTo>
-                  <a:pt x="0" y="77383"/>
-                </a:lnTo>
-              </a:path>
-            </a:pathLst>
-          </a:custGeom>
-          <a:ln w="9144">
-            <a:solidFill>
-              <a:srgbClr val="18BAD4"/>
-            </a:solidFill>
-          </a:ln>
-        </p:spPr>
-        <p:txBody>
-          <a:bodyPr wrap="square" lIns="0" tIns="0" rIns="0" bIns="0" rtlCol="0">
-            <a:noAutofit/>
-          </a:bodyPr>
-          <a:lstStyle/>
-          <a:p>
-            <a:endParaRPr dirty="0"/>
-          </a:p>
-        </p:txBody>
-      </p:sp>
-      <p:sp>
-        <p:nvSpPr>
-          <p:cNvPr id="5" name="object 5"/>
-          <p:cNvSpPr/>
-          <p:nvPr/>
-        </p:nvSpPr>
-        <p:spPr>
-          <a:xfrm>
-            <a:off x="502920" y="2018538"/>
-            <a:ext cx="353567" cy="306324"/>
-          </a:xfrm>
-          <a:custGeom>
-            <a:avLst/>
-            <a:gdLst/>
-            <a:ahLst/>
-            <a:cxnLst/>
-            <a:rect l="l" t="t" r="r" b="b"/>
-            <a:pathLst>
-              <a:path w="353568" h="306324">
-                <a:moveTo>
-                  <a:pt x="265722" y="0"/>
-                </a:moveTo>
-                <a:lnTo>
-                  <a:pt x="87845" y="0"/>
-                </a:lnTo>
-                <a:lnTo>
-                  <a:pt x="0" y="153162"/>
-                </a:lnTo>
-                <a:lnTo>
-                  <a:pt x="87845" y="306324"/>
-                </a:lnTo>
-                <a:lnTo>
-                  <a:pt x="265722" y="306324"/>
-                </a:lnTo>
-                <a:lnTo>
-                  <a:pt x="353567" y="153162"/>
-                </a:lnTo>
-                <a:lnTo>
-                  <a:pt x="265722" y="0"/>
-                </a:lnTo>
-                <a:close/>
-              </a:path>
-            </a:pathLst>
-          </a:custGeom>
-          <a:solidFill>
-            <a:srgbClr val="174669"/>
-          </a:solidFill>
-        </p:spPr>
-        <p:txBody>
-          <a:bodyPr wrap="square" lIns="0" tIns="0" rIns="0" bIns="0" rtlCol="0">
-            <a:noAutofit/>
-          </a:bodyPr>
-          <a:lstStyle/>
-          <a:p>
-            <a:endParaRPr dirty="0"/>
-          </a:p>
-        </p:txBody>
-      </p:sp>
-      <p:sp>
-        <p:nvSpPr>
-          <p:cNvPr id="6" name="object 6"/>
-          <p:cNvSpPr/>
-          <p:nvPr/>
-        </p:nvSpPr>
-        <p:spPr>
-          <a:xfrm>
-            <a:off x="1208533" y="857251"/>
-            <a:ext cx="673607" cy="452627"/>
-          </a:xfrm>
-          <a:custGeom>
-            <a:avLst/>
-            <a:gdLst/>
-            <a:ahLst/>
-            <a:cxnLst/>
-            <a:rect l="l" t="t" r="r" b="b"/>
-            <a:pathLst>
-              <a:path w="673607" h="452627">
-                <a:moveTo>
-                  <a:pt x="0" y="160781"/>
-                </a:moveTo>
-                <a:lnTo>
-                  <a:pt x="167386" y="452627"/>
-                </a:lnTo>
-                <a:lnTo>
-                  <a:pt x="506222" y="452627"/>
-                </a:lnTo>
-                <a:lnTo>
-                  <a:pt x="673607" y="160781"/>
-                </a:lnTo>
-                <a:lnTo>
-                  <a:pt x="581393" y="0"/>
-                </a:lnTo>
-              </a:path>
-            </a:pathLst>
-          </a:custGeom>
-          <a:ln w="76200">
-            <a:solidFill>
-              <a:srgbClr val="174669"/>
-            </a:solidFill>
-          </a:ln>
-        </p:spPr>
-        <p:txBody>
-          <a:bodyPr wrap="square" lIns="0" tIns="0" rIns="0" bIns="0" rtlCol="0">
-            <a:noAutofit/>
-          </a:bodyPr>
-          <a:lstStyle/>
-          <a:p>
-            <a:endParaRPr dirty="0"/>
-          </a:p>
-        </p:txBody>
-      </p:sp>
-      <p:sp>
-        <p:nvSpPr>
-          <p:cNvPr id="7" name="object 7"/>
-          <p:cNvSpPr/>
-          <p:nvPr/>
-        </p:nvSpPr>
-        <p:spPr>
-          <a:xfrm>
-            <a:off x="1208532" y="857251"/>
-            <a:ext cx="92214" cy="160781"/>
-          </a:xfrm>
-          <a:custGeom>
-            <a:avLst/>
-            <a:gdLst/>
-            <a:ahLst/>
-            <a:cxnLst/>
-            <a:rect l="l" t="t" r="r" b="b"/>
-            <a:pathLst>
-              <a:path w="92214" h="160781">
-                <a:moveTo>
-                  <a:pt x="92214" y="0"/>
-                </a:moveTo>
-                <a:lnTo>
-                  <a:pt x="0" y="160781"/>
-                </a:lnTo>
-              </a:path>
-            </a:pathLst>
-          </a:custGeom>
-          <a:ln w="76199">
-            <a:solidFill>
-              <a:srgbClr val="174669"/>
-            </a:solidFill>
-          </a:ln>
-        </p:spPr>
-        <p:txBody>
-          <a:bodyPr wrap="square" lIns="0" tIns="0" rIns="0" bIns="0" rtlCol="0">
-            <a:noAutofit/>
-          </a:bodyPr>
-          <a:lstStyle/>
-          <a:p>
-            <a:endParaRPr dirty="0"/>
-          </a:p>
-        </p:txBody>
-      </p:sp>
-      <p:sp>
-        <p:nvSpPr>
-          <p:cNvPr id="8" name="object 8"/>
-          <p:cNvSpPr/>
-          <p:nvPr/>
-        </p:nvSpPr>
-        <p:spPr>
-          <a:xfrm>
-            <a:off x="248411" y="907542"/>
-            <a:ext cx="294132" cy="254508"/>
-          </a:xfrm>
-          <a:custGeom>
-            <a:avLst/>
-            <a:gdLst/>
-            <a:ahLst/>
-            <a:cxnLst/>
-            <a:rect l="l" t="t" r="r" b="b"/>
-            <a:pathLst>
-              <a:path w="294131" h="254508">
-                <a:moveTo>
-                  <a:pt x="221145" y="0"/>
-                </a:moveTo>
-                <a:lnTo>
-                  <a:pt x="72986" y="0"/>
-                </a:lnTo>
-                <a:lnTo>
-                  <a:pt x="0" y="127254"/>
-                </a:lnTo>
-                <a:lnTo>
-                  <a:pt x="72986" y="254508"/>
-                </a:lnTo>
-                <a:lnTo>
-                  <a:pt x="221145" y="254508"/>
-                </a:lnTo>
-                <a:lnTo>
-                  <a:pt x="294132" y="127254"/>
-                </a:lnTo>
-                <a:lnTo>
-                  <a:pt x="221145" y="0"/>
-                </a:lnTo>
-                <a:close/>
-              </a:path>
-            </a:pathLst>
-          </a:custGeom>
-          <a:solidFill>
-            <a:srgbClr val="00E0C5"/>
-          </a:solidFill>
-        </p:spPr>
-        <p:txBody>
-          <a:bodyPr wrap="square" lIns="0" tIns="0" rIns="0" bIns="0" rtlCol="0">
-            <a:noAutofit/>
-          </a:bodyPr>
-          <a:lstStyle/>
-          <a:p>
-            <a:endParaRPr dirty="0"/>
-          </a:p>
-        </p:txBody>
-      </p:sp>
-      <p:sp>
-        <p:nvSpPr>
-          <p:cNvPr id="9" name="object 9"/>
-          <p:cNvSpPr/>
-          <p:nvPr/>
-        </p:nvSpPr>
-        <p:spPr>
-          <a:xfrm>
-            <a:off x="8763000" y="5578602"/>
-            <a:ext cx="381000" cy="234696"/>
-          </a:xfrm>
-          <a:custGeom>
-            <a:avLst/>
-            <a:gdLst/>
-            <a:ahLst/>
-            <a:cxnLst/>
-            <a:rect l="l" t="t" r="r" b="b"/>
-            <a:pathLst>
-              <a:path w="381000" h="234696">
-                <a:moveTo>
-                  <a:pt x="0" y="0"/>
-                </a:moveTo>
-                <a:lnTo>
-                  <a:pt x="134620" y="234696"/>
-                </a:lnTo>
-                <a:lnTo>
-                  <a:pt x="381000" y="234696"/>
-                </a:lnTo>
-              </a:path>
-            </a:pathLst>
-          </a:custGeom>
-          <a:ln w="9144">
-            <a:solidFill>
-              <a:srgbClr val="174669"/>
-            </a:solidFill>
-          </a:ln>
-        </p:spPr>
-        <p:txBody>
-          <a:bodyPr wrap="square" lIns="0" tIns="0" rIns="0" bIns="0" rtlCol="0">
-            <a:noAutofit/>
-          </a:bodyPr>
-          <a:lstStyle/>
-          <a:p>
-            <a:endParaRPr dirty="0"/>
-          </a:p>
-        </p:txBody>
-      </p:sp>
-      <p:sp>
-        <p:nvSpPr>
-          <p:cNvPr id="10" name="object 10"/>
-          <p:cNvSpPr/>
-          <p:nvPr/>
-        </p:nvSpPr>
-        <p:spPr>
-          <a:xfrm>
-            <a:off x="8763000" y="5343906"/>
-            <a:ext cx="381000" cy="234695"/>
-          </a:xfrm>
-          <a:custGeom>
-            <a:avLst/>
-            <a:gdLst/>
-            <a:ahLst/>
-            <a:cxnLst/>
-            <a:rect l="l" t="t" r="r" b="b"/>
-            <a:pathLst>
-              <a:path w="381000" h="234696">
-                <a:moveTo>
-                  <a:pt x="381000" y="0"/>
-                </a:moveTo>
-                <a:lnTo>
-                  <a:pt x="134620" y="0"/>
-                </a:lnTo>
-                <a:lnTo>
-                  <a:pt x="0" y="234696"/>
-                </a:lnTo>
-              </a:path>
-            </a:pathLst>
-          </a:custGeom>
-          <a:ln w="9144">
-            <a:solidFill>
-              <a:srgbClr val="174669"/>
-            </a:solidFill>
-          </a:ln>
-        </p:spPr>
-        <p:txBody>
-          <a:bodyPr wrap="square" lIns="0" tIns="0" rIns="0" bIns="0" rtlCol="0">
-            <a:noAutofit/>
-          </a:bodyPr>
-          <a:lstStyle/>
-          <a:p>
-            <a:endParaRPr dirty="0"/>
-          </a:p>
-        </p:txBody>
-      </p:sp>
-      <p:sp>
-        <p:nvSpPr>
-          <p:cNvPr id="11" name="object 11"/>
-          <p:cNvSpPr/>
-          <p:nvPr/>
-        </p:nvSpPr>
-        <p:spPr>
-          <a:xfrm>
-            <a:off x="8523731" y="5598414"/>
-            <a:ext cx="283464" cy="245364"/>
-          </a:xfrm>
-          <a:custGeom>
-            <a:avLst/>
-            <a:gdLst/>
-            <a:ahLst/>
-            <a:cxnLst/>
-            <a:rect l="l" t="t" r="r" b="b"/>
-            <a:pathLst>
-              <a:path w="283464" h="245363">
-                <a:moveTo>
-                  <a:pt x="213106" y="0"/>
-                </a:moveTo>
-                <a:lnTo>
-                  <a:pt x="70358" y="0"/>
-                </a:lnTo>
-                <a:lnTo>
-                  <a:pt x="0" y="122682"/>
-                </a:lnTo>
-                <a:lnTo>
-                  <a:pt x="70358" y="245364"/>
-                </a:lnTo>
-                <a:lnTo>
-                  <a:pt x="213106" y="245364"/>
-                </a:lnTo>
-                <a:lnTo>
-                  <a:pt x="283464" y="122682"/>
-                </a:lnTo>
-                <a:lnTo>
-                  <a:pt x="213106" y="0"/>
-                </a:lnTo>
-                <a:close/>
-              </a:path>
-            </a:pathLst>
-          </a:custGeom>
-          <a:solidFill>
-            <a:srgbClr val="3192E0"/>
-          </a:solidFill>
-        </p:spPr>
-        <p:txBody>
-          <a:bodyPr wrap="square" lIns="0" tIns="0" rIns="0" bIns="0" rtlCol="0">
-            <a:noAutofit/>
-          </a:bodyPr>
-          <a:lstStyle/>
-          <a:p>
-            <a:endParaRPr dirty="0"/>
-          </a:p>
-        </p:txBody>
-      </p:sp>
-      <p:sp>
-        <p:nvSpPr>
-          <p:cNvPr id="12" name="object 12"/>
-          <p:cNvSpPr/>
-          <p:nvPr/>
-        </p:nvSpPr>
-        <p:spPr>
-          <a:xfrm>
-            <a:off x="8322565" y="4485894"/>
-            <a:ext cx="542543" cy="469392"/>
-          </a:xfrm>
-          <a:custGeom>
-            <a:avLst/>
-            <a:gdLst/>
-            <a:ahLst/>
-            <a:cxnLst/>
-            <a:rect l="l" t="t" r="r" b="b"/>
-            <a:pathLst>
-              <a:path w="542543" h="469392">
-                <a:moveTo>
-                  <a:pt x="407924" y="0"/>
-                </a:moveTo>
-                <a:lnTo>
-                  <a:pt x="134619" y="0"/>
-                </a:lnTo>
-                <a:lnTo>
-                  <a:pt x="0" y="234695"/>
-                </a:lnTo>
-                <a:lnTo>
-                  <a:pt x="134619" y="469391"/>
-                </a:lnTo>
-                <a:lnTo>
-                  <a:pt x="407924" y="469391"/>
-                </a:lnTo>
-                <a:lnTo>
-                  <a:pt x="542543" y="234695"/>
-                </a:lnTo>
-                <a:lnTo>
-                  <a:pt x="407924" y="0"/>
-                </a:lnTo>
-                <a:close/>
-              </a:path>
-            </a:pathLst>
-          </a:custGeom>
-          <a:solidFill>
-            <a:srgbClr val="174669"/>
-          </a:solidFill>
-        </p:spPr>
-        <p:txBody>
-          <a:bodyPr wrap="square" lIns="0" tIns="0" rIns="0" bIns="0" rtlCol="0">
-            <a:noAutofit/>
-          </a:bodyPr>
-          <a:lstStyle/>
-          <a:p>
-            <a:endParaRPr dirty="0"/>
-          </a:p>
-        </p:txBody>
-      </p:sp>
-      <p:sp>
-        <p:nvSpPr>
-          <p:cNvPr id="13" name="object 13"/>
-          <p:cNvSpPr/>
-          <p:nvPr/>
-        </p:nvSpPr>
-        <p:spPr>
-          <a:xfrm>
-            <a:off x="8763761" y="4867655"/>
-            <a:ext cx="237744" cy="205740"/>
-          </a:xfrm>
-          <a:custGeom>
-            <a:avLst/>
-            <a:gdLst/>
-            <a:ahLst/>
-            <a:cxnLst/>
-            <a:rect l="l" t="t" r="r" b="b"/>
-            <a:pathLst>
-              <a:path w="237744" h="205739">
-                <a:moveTo>
-                  <a:pt x="0" y="102870"/>
-                </a:moveTo>
-                <a:lnTo>
-                  <a:pt x="59055" y="205740"/>
-                </a:lnTo>
-                <a:lnTo>
-                  <a:pt x="178689" y="205740"/>
-                </a:lnTo>
-                <a:lnTo>
-                  <a:pt x="237744" y="102870"/>
-                </a:lnTo>
-                <a:lnTo>
-                  <a:pt x="178689" y="0"/>
-                </a:lnTo>
-                <a:lnTo>
-                  <a:pt x="59055" y="0"/>
-                </a:lnTo>
-                <a:lnTo>
-                  <a:pt x="0" y="102870"/>
-                </a:lnTo>
-                <a:close/>
-              </a:path>
-            </a:pathLst>
-          </a:custGeom>
-          <a:ln w="19811">
-            <a:solidFill>
-              <a:srgbClr val="00E0C5"/>
-            </a:solidFill>
-          </a:ln>
-        </p:spPr>
-        <p:txBody>
-          <a:bodyPr wrap="square" lIns="0" tIns="0" rIns="0" bIns="0" rtlCol="0">
-            <a:noAutofit/>
-          </a:bodyPr>
-          <a:lstStyle/>
-          <a:p>
-            <a:endParaRPr dirty="0"/>
-          </a:p>
-        </p:txBody>
-      </p:sp>
-      <p:sp>
-        <p:nvSpPr>
-          <p:cNvPr id="14" name="object 14"/>
-          <p:cNvSpPr/>
-          <p:nvPr/>
-        </p:nvSpPr>
-        <p:spPr>
-          <a:xfrm>
-            <a:off x="909827" y="1533905"/>
-            <a:ext cx="2142744" cy="1856232"/>
-          </a:xfrm>
-          <a:prstGeom prst="rect">
-            <a:avLst/>
-          </a:prstGeom>
-          <a:blipFill>
-            <a:blip r:embed="rId4" cstate="print"/>
-            <a:stretch>
-              <a:fillRect/>
-            </a:stretch>
-          </a:blipFill>
-        </p:spPr>
-        <p:txBody>
-          <a:bodyPr wrap="square" lIns="0" tIns="0" rIns="0" bIns="0" rtlCol="0">
-            <a:noAutofit/>
-          </a:bodyPr>
-          <a:lstStyle/>
-          <a:p>
-            <a:endParaRPr dirty="0"/>
-          </a:p>
-        </p:txBody>
-      </p:sp>
-      <p:sp>
-        <p:nvSpPr>
-          <p:cNvPr id="15" name="object 15"/>
-          <p:cNvSpPr txBox="1"/>
-          <p:nvPr/>
-        </p:nvSpPr>
-        <p:spPr>
-          <a:xfrm>
-            <a:off x="3232150" y="1996821"/>
-            <a:ext cx="3932138" cy="1283335"/>
-          </a:xfrm>
-          <a:prstGeom prst="rect">
-            <a:avLst/>
-          </a:prstGeom>
-        </p:spPr>
-        <p:txBody>
-          <a:bodyPr vert="horz" wrap="square" lIns="0" tIns="0" rIns="0" bIns="0" rtlCol="0">
-            <a:noAutofit/>
-          </a:bodyPr>
-          <a:lstStyle/>
-          <a:p>
-            <a:pPr marL="12700"/>
-            <a:r>
-              <a:rPr sz="8000" b="1" dirty="0">
-                <a:solidFill>
-                  <a:srgbClr val="002060"/>
-                </a:solidFill>
-                <a:latin typeface="Calibri"/>
-                <a:cs typeface="Calibri"/>
-              </a:rPr>
-              <a:t>Gracias</a:t>
-            </a:r>
-          </a:p>
-        </p:txBody>
-      </p:sp>
-      <p:sp>
-        <p:nvSpPr>
-          <p:cNvPr id="16" name="object 16"/>
-          <p:cNvSpPr/>
-          <p:nvPr/>
-        </p:nvSpPr>
-        <p:spPr>
-          <a:xfrm>
-            <a:off x="1591055" y="2070353"/>
-            <a:ext cx="780288" cy="778764"/>
-          </a:xfrm>
-          <a:custGeom>
-            <a:avLst/>
-            <a:gdLst/>
-            <a:ahLst/>
-            <a:cxnLst/>
-            <a:rect l="l" t="t" r="r" b="b"/>
-            <a:pathLst>
-              <a:path w="780288" h="778764">
-                <a:moveTo>
-                  <a:pt x="410082" y="0"/>
-                </a:moveTo>
-                <a:lnTo>
-                  <a:pt x="370205" y="0"/>
-                </a:lnTo>
-                <a:lnTo>
-                  <a:pt x="311657" y="7493"/>
-                </a:lnTo>
-                <a:lnTo>
-                  <a:pt x="274193" y="17525"/>
-                </a:lnTo>
-                <a:lnTo>
-                  <a:pt x="255524" y="23622"/>
-                </a:lnTo>
-                <a:lnTo>
-                  <a:pt x="220599" y="38608"/>
-                </a:lnTo>
-                <a:lnTo>
-                  <a:pt x="204469" y="47371"/>
-                </a:lnTo>
-                <a:lnTo>
-                  <a:pt x="188213" y="56007"/>
-                </a:lnTo>
-                <a:lnTo>
-                  <a:pt x="142112" y="88392"/>
-                </a:lnTo>
-                <a:lnTo>
-                  <a:pt x="100964" y="128143"/>
-                </a:lnTo>
-                <a:lnTo>
-                  <a:pt x="66039" y="171704"/>
-                </a:lnTo>
-                <a:lnTo>
-                  <a:pt x="38735" y="220218"/>
-                </a:lnTo>
-                <a:lnTo>
-                  <a:pt x="17399" y="273685"/>
-                </a:lnTo>
-                <a:lnTo>
-                  <a:pt x="7493" y="311023"/>
-                </a:lnTo>
-                <a:lnTo>
-                  <a:pt x="2540" y="349631"/>
-                </a:lnTo>
-                <a:lnTo>
-                  <a:pt x="0" y="369570"/>
-                </a:lnTo>
-                <a:lnTo>
-                  <a:pt x="0" y="409321"/>
-                </a:lnTo>
-                <a:lnTo>
-                  <a:pt x="2540" y="429260"/>
-                </a:lnTo>
-                <a:lnTo>
-                  <a:pt x="4953" y="449072"/>
-                </a:lnTo>
-                <a:lnTo>
-                  <a:pt x="17399" y="505079"/>
-                </a:lnTo>
-                <a:lnTo>
-                  <a:pt x="38735" y="558546"/>
-                </a:lnTo>
-                <a:lnTo>
-                  <a:pt x="66039" y="607060"/>
-                </a:lnTo>
-                <a:lnTo>
-                  <a:pt x="100964" y="650621"/>
-                </a:lnTo>
-                <a:lnTo>
-                  <a:pt x="128396" y="677926"/>
-                </a:lnTo>
-                <a:lnTo>
-                  <a:pt x="172085" y="712851"/>
-                </a:lnTo>
-                <a:lnTo>
-                  <a:pt x="220599" y="740156"/>
-                </a:lnTo>
-                <a:lnTo>
-                  <a:pt x="274193" y="761365"/>
-                </a:lnTo>
-                <a:lnTo>
-                  <a:pt x="311657" y="771271"/>
-                </a:lnTo>
-                <a:lnTo>
-                  <a:pt x="370205" y="778764"/>
-                </a:lnTo>
-                <a:lnTo>
-                  <a:pt x="410082" y="778764"/>
-                </a:lnTo>
-                <a:lnTo>
-                  <a:pt x="449961" y="773811"/>
-                </a:lnTo>
-                <a:lnTo>
-                  <a:pt x="506094" y="761365"/>
-                </a:lnTo>
-                <a:lnTo>
-                  <a:pt x="559562" y="740156"/>
-                </a:lnTo>
-                <a:lnTo>
-                  <a:pt x="608202" y="712851"/>
-                </a:lnTo>
-                <a:lnTo>
-                  <a:pt x="651891" y="677926"/>
-                </a:lnTo>
-                <a:lnTo>
-                  <a:pt x="679323" y="650621"/>
-                </a:lnTo>
-                <a:lnTo>
-                  <a:pt x="682664" y="646938"/>
-                </a:lnTo>
-                <a:lnTo>
-                  <a:pt x="390144" y="646938"/>
-                </a:lnTo>
-                <a:lnTo>
-                  <a:pt x="361442" y="645668"/>
-                </a:lnTo>
-                <a:lnTo>
-                  <a:pt x="306705" y="634492"/>
-                </a:lnTo>
-                <a:lnTo>
-                  <a:pt x="254254" y="613283"/>
-                </a:lnTo>
-                <a:lnTo>
-                  <a:pt x="206882" y="582168"/>
-                </a:lnTo>
-                <a:lnTo>
-                  <a:pt x="183261" y="558546"/>
-                </a:lnTo>
-                <a:lnTo>
-                  <a:pt x="180720" y="554863"/>
-                </a:lnTo>
-                <a:lnTo>
-                  <a:pt x="179450" y="549910"/>
-                </a:lnTo>
-                <a:lnTo>
-                  <a:pt x="178307" y="544830"/>
-                </a:lnTo>
-                <a:lnTo>
-                  <a:pt x="179450" y="541147"/>
-                </a:lnTo>
-                <a:lnTo>
-                  <a:pt x="180720" y="536194"/>
-                </a:lnTo>
-                <a:lnTo>
-                  <a:pt x="203200" y="520065"/>
-                </a:lnTo>
-                <a:lnTo>
-                  <a:pt x="757766" y="520065"/>
-                </a:lnTo>
-                <a:lnTo>
-                  <a:pt x="762762" y="505079"/>
-                </a:lnTo>
-                <a:lnTo>
-                  <a:pt x="767842" y="486410"/>
-                </a:lnTo>
-                <a:lnTo>
-                  <a:pt x="772794" y="467741"/>
-                </a:lnTo>
-                <a:lnTo>
-                  <a:pt x="775335" y="449072"/>
-                </a:lnTo>
-                <a:lnTo>
-                  <a:pt x="775938" y="444119"/>
-                </a:lnTo>
-                <a:lnTo>
-                  <a:pt x="230631" y="444119"/>
-                </a:lnTo>
-                <a:lnTo>
-                  <a:pt x="221869" y="442849"/>
-                </a:lnTo>
-                <a:lnTo>
-                  <a:pt x="189483" y="414274"/>
-                </a:lnTo>
-                <a:lnTo>
-                  <a:pt x="185800" y="395605"/>
-                </a:lnTo>
-                <a:lnTo>
-                  <a:pt x="186944" y="385699"/>
-                </a:lnTo>
-                <a:lnTo>
-                  <a:pt x="213106" y="350774"/>
-                </a:lnTo>
-                <a:lnTo>
-                  <a:pt x="230631" y="347091"/>
-                </a:lnTo>
-                <a:lnTo>
-                  <a:pt x="777440" y="347091"/>
-                </a:lnTo>
-                <a:lnTo>
-                  <a:pt x="775335" y="329692"/>
-                </a:lnTo>
-                <a:lnTo>
-                  <a:pt x="762762" y="273685"/>
-                </a:lnTo>
-                <a:lnTo>
-                  <a:pt x="741552" y="220218"/>
-                </a:lnTo>
-                <a:lnTo>
-                  <a:pt x="714248" y="171704"/>
-                </a:lnTo>
-                <a:lnTo>
-                  <a:pt x="679323" y="128143"/>
-                </a:lnTo>
-                <a:lnTo>
-                  <a:pt x="651891" y="100837"/>
-                </a:lnTo>
-                <a:lnTo>
-                  <a:pt x="608202" y="65912"/>
-                </a:lnTo>
-                <a:lnTo>
-                  <a:pt x="559562" y="38608"/>
-                </a:lnTo>
-                <a:lnTo>
-                  <a:pt x="506094" y="17525"/>
-                </a:lnTo>
-                <a:lnTo>
-                  <a:pt x="468630" y="7493"/>
-                </a:lnTo>
-                <a:lnTo>
-                  <a:pt x="410082" y="0"/>
-                </a:lnTo>
-                <a:close/>
-              </a:path>
-              <a:path w="780288" h="778764">
-                <a:moveTo>
-                  <a:pt x="757766" y="520065"/>
-                </a:moveTo>
-                <a:lnTo>
-                  <a:pt x="577088" y="520065"/>
-                </a:lnTo>
-                <a:lnTo>
-                  <a:pt x="582041" y="521208"/>
-                </a:lnTo>
-                <a:lnTo>
-                  <a:pt x="585851" y="522478"/>
-                </a:lnTo>
-                <a:lnTo>
-                  <a:pt x="600710" y="541147"/>
-                </a:lnTo>
-                <a:lnTo>
-                  <a:pt x="601980" y="544830"/>
-                </a:lnTo>
-                <a:lnTo>
-                  <a:pt x="600710" y="549910"/>
-                </a:lnTo>
-                <a:lnTo>
-                  <a:pt x="599567" y="554863"/>
-                </a:lnTo>
-                <a:lnTo>
-                  <a:pt x="597026" y="558546"/>
-                </a:lnTo>
-                <a:lnTo>
-                  <a:pt x="550926" y="599694"/>
-                </a:lnTo>
-                <a:lnTo>
-                  <a:pt x="501142" y="625729"/>
-                </a:lnTo>
-                <a:lnTo>
-                  <a:pt x="447420" y="641858"/>
-                </a:lnTo>
-                <a:lnTo>
-                  <a:pt x="390144" y="646938"/>
-                </a:lnTo>
-                <a:lnTo>
-                  <a:pt x="682664" y="646938"/>
-                </a:lnTo>
-                <a:lnTo>
-                  <a:pt x="714248" y="607060"/>
-                </a:lnTo>
-                <a:lnTo>
-                  <a:pt x="741552" y="558546"/>
-                </a:lnTo>
-                <a:lnTo>
-                  <a:pt x="756538" y="523748"/>
-                </a:lnTo>
-                <a:lnTo>
-                  <a:pt x="757766" y="520065"/>
-                </a:lnTo>
-                <a:close/>
-              </a:path>
-              <a:path w="780288" h="778764">
-                <a:moveTo>
-                  <a:pt x="577088" y="520065"/>
-                </a:moveTo>
-                <a:lnTo>
-                  <a:pt x="203200" y="520065"/>
-                </a:lnTo>
-                <a:lnTo>
-                  <a:pt x="208152" y="521208"/>
-                </a:lnTo>
-                <a:lnTo>
-                  <a:pt x="213106" y="522478"/>
-                </a:lnTo>
-                <a:lnTo>
-                  <a:pt x="216916" y="525018"/>
-                </a:lnTo>
-                <a:lnTo>
-                  <a:pt x="220599" y="527431"/>
-                </a:lnTo>
-                <a:lnTo>
-                  <a:pt x="239394" y="543687"/>
-                </a:lnTo>
-                <a:lnTo>
-                  <a:pt x="278002" y="569849"/>
-                </a:lnTo>
-                <a:lnTo>
-                  <a:pt x="320294" y="587248"/>
-                </a:lnTo>
-                <a:lnTo>
-                  <a:pt x="366521" y="595884"/>
-                </a:lnTo>
-                <a:lnTo>
-                  <a:pt x="390144" y="597154"/>
-                </a:lnTo>
-                <a:lnTo>
-                  <a:pt x="413766" y="595884"/>
-                </a:lnTo>
-                <a:lnTo>
-                  <a:pt x="459994" y="587248"/>
-                </a:lnTo>
-                <a:lnTo>
-                  <a:pt x="502285" y="569849"/>
-                </a:lnTo>
-                <a:lnTo>
-                  <a:pt x="540893" y="543687"/>
-                </a:lnTo>
-                <a:lnTo>
-                  <a:pt x="559562" y="527431"/>
-                </a:lnTo>
-                <a:lnTo>
-                  <a:pt x="563371" y="525018"/>
-                </a:lnTo>
-                <a:lnTo>
-                  <a:pt x="567182" y="522478"/>
-                </a:lnTo>
-                <a:lnTo>
-                  <a:pt x="572135" y="521208"/>
-                </a:lnTo>
-                <a:lnTo>
-                  <a:pt x="577088" y="520065"/>
-                </a:lnTo>
-                <a:close/>
-              </a:path>
-              <a:path w="780288" h="778764">
-                <a:moveTo>
-                  <a:pt x="549656" y="347091"/>
-                </a:moveTo>
-                <a:lnTo>
-                  <a:pt x="230631" y="347091"/>
-                </a:lnTo>
-                <a:lnTo>
-                  <a:pt x="239394" y="348361"/>
-                </a:lnTo>
-                <a:lnTo>
-                  <a:pt x="248031" y="350774"/>
-                </a:lnTo>
-                <a:lnTo>
-                  <a:pt x="255524" y="355854"/>
-                </a:lnTo>
-                <a:lnTo>
-                  <a:pt x="263017" y="360807"/>
-                </a:lnTo>
-                <a:lnTo>
-                  <a:pt x="267969" y="368300"/>
-                </a:lnTo>
-                <a:lnTo>
-                  <a:pt x="271780" y="376936"/>
-                </a:lnTo>
-                <a:lnTo>
-                  <a:pt x="274193" y="385699"/>
-                </a:lnTo>
-                <a:lnTo>
-                  <a:pt x="275463" y="395605"/>
-                </a:lnTo>
-                <a:lnTo>
-                  <a:pt x="274193" y="405638"/>
-                </a:lnTo>
-                <a:lnTo>
-                  <a:pt x="248031" y="440436"/>
-                </a:lnTo>
-                <a:lnTo>
-                  <a:pt x="230631" y="444119"/>
-                </a:lnTo>
-                <a:lnTo>
-                  <a:pt x="549656" y="444119"/>
-                </a:lnTo>
-                <a:lnTo>
-                  <a:pt x="512318" y="423037"/>
-                </a:lnTo>
-                <a:lnTo>
-                  <a:pt x="504825" y="395605"/>
-                </a:lnTo>
-                <a:lnTo>
-                  <a:pt x="506094" y="385699"/>
-                </a:lnTo>
-                <a:lnTo>
-                  <a:pt x="508507" y="376936"/>
-                </a:lnTo>
-                <a:lnTo>
-                  <a:pt x="512318" y="368300"/>
-                </a:lnTo>
-                <a:lnTo>
-                  <a:pt x="517270" y="360807"/>
-                </a:lnTo>
-                <a:lnTo>
-                  <a:pt x="524763" y="355854"/>
-                </a:lnTo>
-                <a:lnTo>
-                  <a:pt x="532257" y="350774"/>
-                </a:lnTo>
-                <a:lnTo>
-                  <a:pt x="540893" y="348361"/>
-                </a:lnTo>
-                <a:lnTo>
-                  <a:pt x="549656" y="347091"/>
-                </a:lnTo>
-                <a:close/>
-              </a:path>
-              <a:path w="780288" h="778764">
-                <a:moveTo>
-                  <a:pt x="777440" y="347091"/>
-                </a:moveTo>
-                <a:lnTo>
-                  <a:pt x="549656" y="347091"/>
-                </a:lnTo>
-                <a:lnTo>
-                  <a:pt x="558419" y="348361"/>
-                </a:lnTo>
-                <a:lnTo>
-                  <a:pt x="567182" y="350774"/>
-                </a:lnTo>
-                <a:lnTo>
-                  <a:pt x="593344" y="385699"/>
-                </a:lnTo>
-                <a:lnTo>
-                  <a:pt x="594487" y="395605"/>
-                </a:lnTo>
-                <a:lnTo>
-                  <a:pt x="593344" y="405638"/>
-                </a:lnTo>
-                <a:lnTo>
-                  <a:pt x="567182" y="440436"/>
-                </a:lnTo>
-                <a:lnTo>
-                  <a:pt x="549656" y="444119"/>
-                </a:lnTo>
-                <a:lnTo>
-                  <a:pt x="775938" y="444119"/>
-                </a:lnTo>
-                <a:lnTo>
-                  <a:pt x="777748" y="429260"/>
-                </a:lnTo>
-                <a:lnTo>
-                  <a:pt x="780288" y="409321"/>
-                </a:lnTo>
-                <a:lnTo>
-                  <a:pt x="780288" y="369570"/>
-                </a:lnTo>
-                <a:lnTo>
-                  <a:pt x="777748" y="349631"/>
-                </a:lnTo>
-                <a:lnTo>
-                  <a:pt x="777440" y="347091"/>
-                </a:lnTo>
-                <a:close/>
-              </a:path>
-            </a:pathLst>
-          </a:custGeom>
-          <a:solidFill>
-            <a:srgbClr val="FFFFFF"/>
-          </a:solidFill>
-        </p:spPr>
-        <p:txBody>
-          <a:bodyPr wrap="square" lIns="0" tIns="0" rIns="0" bIns="0" rtlCol="0">
-            <a:noAutofit/>
-          </a:bodyPr>
-          <a:lstStyle/>
-          <a:p>
-            <a:endParaRPr dirty="0"/>
-          </a:p>
-        </p:txBody>
-      </p:sp>
-      <p:sp>
-        <p:nvSpPr>
-          <p:cNvPr id="17" name="object 17"/>
-          <p:cNvSpPr txBox="1">
-            <a:spLocks noGrp="1"/>
-          </p:cNvSpPr>
-          <p:nvPr>
-            <p:ph type="sldNum" sz="quarter" idx="7"/>
-          </p:nvPr>
-        </p:nvSpPr>
-        <p:spPr>
-          <a:xfrm>
-            <a:off x="79756" y="5726429"/>
-            <a:ext cx="423163" cy="224029"/>
-          </a:xfrm>
-          <a:prstGeom prst="rect">
-            <a:avLst/>
-          </a:prstGeom>
-        </p:spPr>
-        <p:txBody>
-          <a:bodyPr vert="horz" wrap="square" lIns="0" tIns="0" rIns="0" bIns="0" rtlCol="0" anchor="ctr">
-            <a:noAutofit/>
-          </a:bodyPr>
-          <a:lstStyle/>
-          <a:p>
-            <a:pPr marL="25400"/>
-            <a:fld id="{81D60167-4931-47E6-BA6A-407CBD079E47}" type="slidenum">
-              <a:rPr spc="-10" dirty="0">
-                <a:solidFill>
-                  <a:srgbClr val="18BAD4"/>
-                </a:solidFill>
-                <a:latin typeface="Calibri"/>
-                <a:cs typeface="Calibri"/>
-              </a:rPr>
-              <a:pPr marL="25400"/>
-              <a:t>9</a:t>
-            </a:fld>
-            <a:endParaRPr dirty="0">
-              <a:latin typeface="Calibri"/>
-              <a:cs typeface="Calibri"/>
-            </a:endParaRPr>
-          </a:p>
-        </p:txBody>
-      </p:sp>
-    </p:spTree>
   </p:cSld>
   <p:clrMapOvr>
     <a:masterClrMapping/>
